--- a/examples/must-stories-deck/must-stories.pptx
+++ b/examples/must-stories-deck/must-stories.pptx
@@ -750,8 +750,8 @@
         </p:nvSpPr>
         <p:spPr>
           <a:xfrm>
-            <a:off x="10363200" y="6035040"/>
-            <a:ext cx="1371600" cy="365760"/>
+            <a:off x="11186160" y="6035040"/>
+            <a:ext cx="548640" cy="365760"/>
           </a:xfrm>
         </p:spPr>
         <p:txBody>
@@ -794,7 +794,7 @@
             <a:r>
               <a:rPr sz="6000" b="1" i="0">
                 <a:solidFill>
-                  <a:srgbClr val="262625"/>
+                  <a:srgbClr val="D97757"/>
                 </a:solidFill>
                 <a:latin typeface="Arial"/>
               </a:rPr>
@@ -853,8 +853,8 @@
         </p:nvSpPr>
         <p:spPr>
           <a:xfrm>
-            <a:off x="10363200" y="6035040"/>
-            <a:ext cx="1371600" cy="365760"/>
+            <a:off x="11186160" y="6035040"/>
+            <a:ext cx="548640" cy="365760"/>
           </a:xfrm>
         </p:spPr>
         <p:txBody>
@@ -897,7 +897,7 @@
             <a:r>
               <a:rPr sz="4200" b="1" i="0">
                 <a:solidFill>
-                  <a:srgbClr val="262625"/>
+                  <a:srgbClr val="D97757"/>
                 </a:solidFill>
                 <a:latin typeface="Arial"/>
               </a:rPr>
@@ -1178,8 +1178,8 @@
         </p:nvSpPr>
         <p:spPr>
           <a:xfrm>
-            <a:off x="10363200" y="6035040"/>
-            <a:ext cx="1371600" cy="365760"/>
+            <a:off x="11186160" y="6035040"/>
+            <a:ext cx="548640" cy="365760"/>
           </a:xfrm>
         </p:spPr>
         <p:txBody>
@@ -1222,7 +1222,7 @@
             <a:r>
               <a:rPr sz="4200" b="1" i="0">
                 <a:solidFill>
-                  <a:srgbClr val="262625"/>
+                  <a:srgbClr val="D97757"/>
                 </a:solidFill>
                 <a:latin typeface="Arial"/>
               </a:rPr>
@@ -1503,8 +1503,8 @@
         </p:nvSpPr>
         <p:spPr>
           <a:xfrm>
-            <a:off x="10363200" y="6035040"/>
-            <a:ext cx="1371600" cy="365760"/>
+            <a:off x="11186160" y="6035040"/>
+            <a:ext cx="548640" cy="365760"/>
           </a:xfrm>
         </p:spPr>
         <p:txBody>
@@ -1547,7 +1547,7 @@
             <a:r>
               <a:rPr sz="4200" b="1" i="0">
                 <a:solidFill>
-                  <a:srgbClr val="262625"/>
+                  <a:srgbClr val="D97757"/>
                 </a:solidFill>
                 <a:latin typeface="Arial"/>
               </a:rPr>
@@ -1584,7 +1584,7 @@
             <a:r>
               <a:rPr sz="3400" b="1" i="0">
                 <a:solidFill>
-                  <a:srgbClr val="262625"/>
+                  <a:srgbClr val="D97757"/>
                 </a:solidFill>
                 <a:latin typeface="Arial"/>
               </a:rPr>
@@ -1621,7 +1621,7 @@
             <a:r>
               <a:rPr sz="3400" b="1" i="0">
                 <a:solidFill>
-                  <a:srgbClr val="262625"/>
+                  <a:srgbClr val="D97757"/>
                 </a:solidFill>
                 <a:latin typeface="Arial"/>
               </a:rPr>
@@ -1902,8 +1902,8 @@
         </p:nvSpPr>
         <p:spPr>
           <a:xfrm>
-            <a:off x="10363200" y="6035040"/>
-            <a:ext cx="1371600" cy="365760"/>
+            <a:off x="11186160" y="6035040"/>
+            <a:ext cx="548640" cy="365760"/>
           </a:xfrm>
         </p:spPr>
         <p:txBody>
@@ -1946,7 +1946,7 @@
             <a:r>
               <a:rPr sz="4200" b="1" i="0">
                 <a:solidFill>
-                  <a:srgbClr val="262625"/>
+                  <a:srgbClr val="D97757"/>
                 </a:solidFill>
                 <a:latin typeface="Arial"/>
               </a:rPr>
@@ -2449,8 +2449,8 @@
         </p:nvSpPr>
         <p:spPr>
           <a:xfrm>
-            <a:off x="10363200" y="6035040"/>
-            <a:ext cx="1371600" cy="365760"/>
+            <a:off x="11186160" y="6035040"/>
+            <a:ext cx="548640" cy="365760"/>
           </a:xfrm>
         </p:spPr>
         <p:txBody>
@@ -2493,7 +2493,7 @@
             <a:r>
               <a:rPr sz="4200" b="1" i="0">
                 <a:solidFill>
-                  <a:srgbClr val="262625"/>
+                  <a:srgbClr val="D97757"/>
                 </a:solidFill>
                 <a:latin typeface="Arial"/>
               </a:rPr>
@@ -2513,6 +2513,43 @@
         <p:spPr>
           <a:xfrm>
             <a:off x="6233160" y="1499616"/>
+            <a:ext cx="5958840" cy="609600"/>
+          </a:xfrm>
+          <a:prstGeom prst="rect">
+            <a:avLst/>
+          </a:prstGeom>
+          <a:noFill/>
+        </p:spPr>
+        <p:txBody>
+          <a:bodyPr wrap="none" lIns="0" rIns="0">
+            <a:noAutofit/>
+          </a:bodyPr>
+          <a:lstStyle/>
+          <a:p>
+            <a:pPr algn="l"/>
+            <a:r>
+              <a:rPr sz="3400" b="0" i="0">
+                <a:solidFill>
+                  <a:srgbClr val="191919"/>
+                </a:solidFill>
+                <a:latin typeface="Arial"/>
+              </a:rPr>
+              <a:t>Built with customers.</a:t>
+            </a:r>
+          </a:p>
+        </p:txBody>
+      </p:sp>
+      <p:sp>
+        <p:nvSpPr>
+          <p:cNvPr id="7" name="TextBox 6"/>
+          <p:cNvSpPr/>
+          <p:nvPr>
+            <p:ph type="body" idx="2"/>
+          </p:nvPr>
+        </p:nvSpPr>
+        <p:spPr>
+          <a:xfrm>
+            <a:off x="6233160" y="2383536"/>
             <a:ext cx="5501640" cy="1127760"/>
           </a:xfrm>
           <a:prstGeom prst="rect">
@@ -2534,44 +2571,7 @@
                 </a:solidFill>
                 <a:latin typeface="Arial"/>
               </a:rPr>
-              <a:t>Built with customers, not just for them.</a:t>
-            </a:r>
-          </a:p>
-        </p:txBody>
-      </p:sp>
-      <p:sp>
-        <p:nvSpPr>
-          <p:cNvPr id="7" name="TextBox 6"/>
-          <p:cNvSpPr/>
-          <p:nvPr>
-            <p:ph type="body" idx="2"/>
-          </p:nvPr>
-        </p:nvSpPr>
-        <p:spPr>
-          <a:xfrm>
-            <a:off x="6233160" y="2901696"/>
-            <a:ext cx="5501640" cy="1127760"/>
-          </a:xfrm>
-          <a:prstGeom prst="rect">
-            <a:avLst/>
-          </a:prstGeom>
-          <a:noFill/>
-        </p:spPr>
-        <p:txBody>
-          <a:bodyPr wrap="square" lIns="0" rIns="0">
-            <a:noAutofit/>
-          </a:bodyPr>
-          <a:lstStyle/>
-          <a:p>
-            <a:pPr algn="l"/>
-            <a:r>
-              <a:rPr sz="3400" b="0" i="0">
-                <a:solidFill>
-                  <a:srgbClr val="191919"/>
-                </a:solidFill>
-                <a:latin typeface="Arial"/>
-              </a:rPr>
-              <a:t>60% faster rollout; 50% fewer tickets.</a:t>
+              <a:t>60% faster; 50% fewer tickets</a:t>
             </a:r>
           </a:p>
         </p:txBody>
@@ -2590,405 +2590,6 @@
 </file>
 
 <file path=ppt/slideLayouts/slideLayout18.xml><?xml version="1.0" encoding="utf-8"?>
-<p:sldLayout xmlns:a="http://schemas.openxmlformats.org/drawingml/2006/main" xmlns:r="http://schemas.openxmlformats.org/officeDocument/2006/relationships" xmlns:p="http://schemas.openxmlformats.org/presentationml/2006/main" type="blank" preserve="1">
-  <p:cSld name="slidekit · Card Grid">
-    <p:bg>
-      <p:bgPr>
-        <a:solidFill>
-          <a:srgbClr val="F0EEE6"/>
-        </a:solidFill>
-        <a:effectLst/>
-      </p:bgPr>
-    </p:bg>
-    <p:spTree>
-      <p:nvGrpSpPr>
-        <p:cNvPr id="1" name=""/>
-        <p:cNvGrpSpPr/>
-        <p:nvPr/>
-      </p:nvGrpSpPr>
-      <p:grpSpPr>
-        <a:xfrm>
-          <a:off x="0" y="0"/>
-          <a:ext cx="0" cy="0"/>
-          <a:chOff x="0" y="0"/>
-          <a:chExt cx="0" cy="0"/>
-        </a:xfrm>
-      </p:grpSpPr>
-      <p:sp>
-        <p:nvSpPr>
-          <p:cNvPr id="4" name="Slide Number Placeholder 3"/>
-          <p:cNvSpPr>
-            <a:spLocks noGrp="1"/>
-          </p:cNvSpPr>
-          <p:nvPr>
-            <p:ph type="sldNum" sz="quarter" idx="12"/>
-          </p:nvPr>
-        </p:nvSpPr>
-        <p:spPr>
-          <a:xfrm>
-            <a:off x="10363200" y="6035040"/>
-            <a:ext cx="1371600" cy="365760"/>
-          </a:xfrm>
-        </p:spPr>
-        <p:txBody>
-          <a:bodyPr/>
-          <a:lstStyle/>
-          <a:p>
-            <a:fld id="{C1FF6DA9-008F-8B48-92A6-B652298478BF}" type="slidenum">
-              <a:rPr lang="en-US" smtClean="0"/>
-              <a:t>‹#›</a:t>
-            </a:fld>
-            <a:endParaRPr lang="en-US"/>
-          </a:p>
-        </p:txBody>
-      </p:sp>
-      <p:sp>
-        <p:nvSpPr>
-          <p:cNvPr id="5" name="TextBox 4"/>
-          <p:cNvSpPr/>
-          <p:nvPr>
-            <p:ph type="title"/>
-          </p:nvPr>
-        </p:nvSpPr>
-        <p:spPr>
-          <a:xfrm>
-            <a:off x="457200" y="457200"/>
-            <a:ext cx="11277600" cy="768096"/>
-          </a:xfrm>
-          <a:prstGeom prst="rect">
-            <a:avLst/>
-          </a:prstGeom>
-          <a:noFill/>
-        </p:spPr>
-        <p:txBody>
-          <a:bodyPr wrap="none" lIns="0" rIns="0">
-            <a:noAutofit/>
-          </a:bodyPr>
-          <a:lstStyle/>
-          <a:p>
-            <a:pPr algn="l"/>
-            <a:r>
-              <a:rPr sz="4200" b="1" i="0">
-                <a:solidFill>
-                  <a:srgbClr val="262625"/>
-                </a:solidFill>
-                <a:latin typeface="Arial"/>
-              </a:rPr>
-              <a:t>What We Offer</a:t>
-            </a:r>
-          </a:p>
-        </p:txBody>
-      </p:sp>
-      <p:sp>
-        <p:nvSpPr>
-          <p:cNvPr id="6" name="TextBox 5"/>
-          <p:cNvSpPr/>
-          <p:nvPr>
-            <p:ph type="body" idx="1"/>
-          </p:nvPr>
-        </p:nvSpPr>
-        <p:spPr>
-          <a:xfrm>
-            <a:off x="457200" y="1499616"/>
-            <a:ext cx="2831366" cy="518159"/>
-          </a:xfrm>
-          <a:prstGeom prst="rect">
-            <a:avLst/>
-          </a:prstGeom>
-          <a:noFill/>
-        </p:spPr>
-        <p:txBody>
-          <a:bodyPr wrap="none" lIns="0" rIns="0">
-            <a:noAutofit/>
-          </a:bodyPr>
-          <a:lstStyle/>
-          <a:p>
-            <a:pPr algn="l"/>
-            <a:r>
-              <a:rPr sz="3400" b="1" i="0">
-                <a:solidFill>
-                  <a:srgbClr val="191919"/>
-                </a:solidFill>
-                <a:latin typeface="Arial"/>
-              </a:rPr>
-              <a:t>Insights</a:t>
-            </a:r>
-          </a:p>
-        </p:txBody>
-      </p:sp>
-      <p:sp>
-        <p:nvSpPr>
-          <p:cNvPr id="7" name="TextBox 6"/>
-          <p:cNvSpPr/>
-          <p:nvPr>
-            <p:ph type="body" idx="2"/>
-          </p:nvPr>
-        </p:nvSpPr>
-        <p:spPr>
-          <a:xfrm>
-            <a:off x="457200" y="2154935"/>
-            <a:ext cx="2613660" cy="3605785"/>
-          </a:xfrm>
-          <a:prstGeom prst="rect">
-            <a:avLst/>
-          </a:prstGeom>
-          <a:noFill/>
-        </p:spPr>
-        <p:txBody>
-          <a:bodyPr wrap="square" lIns="0" rIns="0">
-            <a:noAutofit/>
-          </a:bodyPr>
-          <a:lstStyle/>
-          <a:p>
-            <a:pPr algn="l"/>
-            <a:r>
-              <a:rPr sz="3400" b="0" i="0">
-                <a:solidFill>
-                  <a:srgbClr val="191919"/>
-                </a:solidFill>
-                <a:latin typeface="Arial"/>
-              </a:rPr>
-              <a:t>Live data and AI analytics.</a:t>
-            </a:r>
-          </a:p>
-        </p:txBody>
-      </p:sp>
-      <p:sp>
-        <p:nvSpPr>
-          <p:cNvPr id="8" name="TextBox 7"/>
-          <p:cNvSpPr/>
-          <p:nvPr>
-            <p:ph type="body" idx="3"/>
-          </p:nvPr>
-        </p:nvSpPr>
-        <p:spPr>
-          <a:xfrm>
-            <a:off x="3345180" y="1499616"/>
-            <a:ext cx="2909292" cy="518159"/>
-          </a:xfrm>
-          <a:prstGeom prst="rect">
-            <a:avLst/>
-          </a:prstGeom>
-          <a:noFill/>
-        </p:spPr>
-        <p:txBody>
-          <a:bodyPr wrap="none" lIns="0" rIns="0">
-            <a:noAutofit/>
-          </a:bodyPr>
-          <a:lstStyle/>
-          <a:p>
-            <a:pPr algn="l"/>
-            <a:r>
-              <a:rPr sz="3400" b="1" i="0">
-                <a:solidFill>
-                  <a:srgbClr val="191919"/>
-                </a:solidFill>
-                <a:latin typeface="Arial"/>
-              </a:rPr>
-              <a:t>Security</a:t>
-            </a:r>
-          </a:p>
-        </p:txBody>
-      </p:sp>
-      <p:sp>
-        <p:nvSpPr>
-          <p:cNvPr id="9" name="TextBox 8"/>
-          <p:cNvSpPr/>
-          <p:nvPr>
-            <p:ph type="body" idx="4"/>
-          </p:nvPr>
-        </p:nvSpPr>
-        <p:spPr>
-          <a:xfrm>
-            <a:off x="3345180" y="2154935"/>
-            <a:ext cx="2613660" cy="3605785"/>
-          </a:xfrm>
-          <a:prstGeom prst="rect">
-            <a:avLst/>
-          </a:prstGeom>
-          <a:noFill/>
-        </p:spPr>
-        <p:txBody>
-          <a:bodyPr wrap="square" lIns="0" rIns="0">
-            <a:noAutofit/>
-          </a:bodyPr>
-          <a:lstStyle/>
-          <a:p>
-            <a:pPr algn="l"/>
-            <a:r>
-              <a:rPr sz="3400" b="0" i="0">
-                <a:solidFill>
-                  <a:srgbClr val="191919"/>
-                </a:solidFill>
-                <a:latin typeface="Arial"/>
-              </a:rPr>
-              <a:t>Zero-trust, SOC 2 ready.</a:t>
-            </a:r>
-          </a:p>
-        </p:txBody>
-      </p:sp>
-      <p:sp>
-        <p:nvSpPr>
-          <p:cNvPr id="10" name="TextBox 9"/>
-          <p:cNvSpPr/>
-          <p:nvPr>
-            <p:ph type="body" idx="5"/>
-          </p:nvPr>
-        </p:nvSpPr>
-        <p:spPr>
-          <a:xfrm>
-            <a:off x="6233160" y="1499616"/>
-            <a:ext cx="2613660" cy="518159"/>
-          </a:xfrm>
-          <a:prstGeom prst="rect">
-            <a:avLst/>
-          </a:prstGeom>
-          <a:noFill/>
-        </p:spPr>
-        <p:txBody>
-          <a:bodyPr wrap="none" lIns="0" rIns="0">
-            <a:noAutofit/>
-          </a:bodyPr>
-          <a:lstStyle/>
-          <a:p>
-            <a:pPr algn="l"/>
-            <a:r>
-              <a:rPr sz="3400" b="1" i="0">
-                <a:solidFill>
-                  <a:srgbClr val="191919"/>
-                </a:solidFill>
-                <a:latin typeface="Arial"/>
-              </a:rPr>
-              <a:t>Speed</a:t>
-            </a:r>
-          </a:p>
-        </p:txBody>
-      </p:sp>
-      <p:sp>
-        <p:nvSpPr>
-          <p:cNvPr id="11" name="TextBox 10"/>
-          <p:cNvSpPr/>
-          <p:nvPr>
-            <p:ph type="body" idx="6"/>
-          </p:nvPr>
-        </p:nvSpPr>
-        <p:spPr>
-          <a:xfrm>
-            <a:off x="6233160" y="2154935"/>
-            <a:ext cx="2613660" cy="3605785"/>
-          </a:xfrm>
-          <a:prstGeom prst="rect">
-            <a:avLst/>
-          </a:prstGeom>
-          <a:noFill/>
-        </p:spPr>
-        <p:txBody>
-          <a:bodyPr wrap="square" lIns="0" rIns="0">
-            <a:noAutofit/>
-          </a:bodyPr>
-          <a:lstStyle/>
-          <a:p>
-            <a:pPr algn="l"/>
-            <a:r>
-              <a:rPr sz="3400" b="0" i="0">
-                <a:solidFill>
-                  <a:srgbClr val="191919"/>
-                </a:solidFill>
-                <a:latin typeface="Arial"/>
-              </a:rPr>
-              <a:t>Sub-100ms p99 latency.</a:t>
-            </a:r>
-          </a:p>
-        </p:txBody>
-      </p:sp>
-      <p:sp>
-        <p:nvSpPr>
-          <p:cNvPr id="12" name="TextBox 11"/>
-          <p:cNvSpPr/>
-          <p:nvPr>
-            <p:ph type="body" idx="7"/>
-          </p:nvPr>
-        </p:nvSpPr>
-        <p:spPr>
-          <a:xfrm>
-            <a:off x="9121140" y="1499616"/>
-            <a:ext cx="2613660" cy="518159"/>
-          </a:xfrm>
-          <a:prstGeom prst="rect">
-            <a:avLst/>
-          </a:prstGeom>
-          <a:noFill/>
-        </p:spPr>
-        <p:txBody>
-          <a:bodyPr wrap="none" lIns="0" rIns="0">
-            <a:noAutofit/>
-          </a:bodyPr>
-          <a:lstStyle/>
-          <a:p>
-            <a:pPr algn="l"/>
-            <a:r>
-              <a:rPr sz="3400" b="1" i="0">
-                <a:solidFill>
-                  <a:srgbClr val="191919"/>
-                </a:solidFill>
-                <a:latin typeface="Arial"/>
-              </a:rPr>
-              <a:t>APIs</a:t>
-            </a:r>
-          </a:p>
-        </p:txBody>
-      </p:sp>
-      <p:sp>
-        <p:nvSpPr>
-          <p:cNvPr id="13" name="TextBox 12"/>
-          <p:cNvSpPr/>
-          <p:nvPr>
-            <p:ph type="body" idx="8"/>
-          </p:nvPr>
-        </p:nvSpPr>
-        <p:spPr>
-          <a:xfrm>
-            <a:off x="9121140" y="2154935"/>
-            <a:ext cx="2613660" cy="3605785"/>
-          </a:xfrm>
-          <a:prstGeom prst="rect">
-            <a:avLst/>
-          </a:prstGeom>
-          <a:noFill/>
-        </p:spPr>
-        <p:txBody>
-          <a:bodyPr wrap="square" lIns="0" rIns="0">
-            <a:noAutofit/>
-          </a:bodyPr>
-          <a:lstStyle/>
-          <a:p>
-            <a:pPr algn="l"/>
-            <a:r>
-              <a:rPr sz="3400" b="0" i="0">
-                <a:solidFill>
-                  <a:srgbClr val="191919"/>
-                </a:solidFill>
-                <a:latin typeface="Arial"/>
-              </a:rPr>
-              <a:t>300+ open connectors.</a:t>
-            </a:r>
-          </a:p>
-        </p:txBody>
-      </p:sp>
-    </p:spTree>
-    <p:extLst>
-      <p:ext uri="{BB962C8B-B14F-4D97-AF65-F5344CB8AC3E}">
-        <p14:creationId xmlns:p14="http://schemas.microsoft.com/office/powerpoint/2010/main" val="1212999818"/>
-      </p:ext>
-    </p:extLst>
-  </p:cSld>
-  <p:clrMapOvr>
-    <a:masterClrMapping/>
-  </p:clrMapOvr>
-</p:sldLayout>
-</file>
-
-<file path=ppt/slideLayouts/slideLayout19.xml><?xml version="1.0" encoding="utf-8"?>
 <p:sldLayout xmlns:a="http://schemas.openxmlformats.org/drawingml/2006/main" xmlns:r="http://schemas.openxmlformats.org/officeDocument/2006/relationships" xmlns:p="http://schemas.openxmlformats.org/presentationml/2006/main" type="blank" preserve="1">
   <p:cSld name="slidekit · Section Divider">
     <p:bg>
@@ -3025,8 +2626,8 @@
         </p:nvSpPr>
         <p:spPr>
           <a:xfrm>
-            <a:off x="10363200" y="6035040"/>
-            <a:ext cx="1371600" cy="365760"/>
+            <a:off x="11186160" y="6035040"/>
+            <a:ext cx="548640" cy="365760"/>
           </a:xfrm>
         </p:spPr>
         <p:txBody>
@@ -3138,11 +2739,516 @@
             <a:r>
               <a:rPr sz="4200" b="1" i="0">
                 <a:solidFill>
+                  <a:srgbClr val="D97757"/>
+                </a:solidFill>
+                <a:latin typeface="Arial"/>
+              </a:rPr>
+              <a:t>Where We Stand Today</a:t>
+            </a:r>
+          </a:p>
+        </p:txBody>
+      </p:sp>
+    </p:spTree>
+    <p:extLst>
+      <p:ext uri="{BB962C8B-B14F-4D97-AF65-F5344CB8AC3E}">
+        <p14:creationId xmlns:p14="http://schemas.microsoft.com/office/powerpoint/2010/main" val="1212999818"/>
+      </p:ext>
+    </p:extLst>
+  </p:cSld>
+  <p:clrMapOvr>
+    <a:masterClrMapping/>
+  </p:clrMapOvr>
+</p:sldLayout>
+</file>
+
+<file path=ppt/slideLayouts/slideLayout19.xml><?xml version="1.0" encoding="utf-8"?>
+<p:sldLayout xmlns:a="http://schemas.openxmlformats.org/drawingml/2006/main" xmlns:r="http://schemas.openxmlformats.org/officeDocument/2006/relationships" xmlns:p="http://schemas.openxmlformats.org/presentationml/2006/main" type="blank" preserve="1">
+  <p:cSld name="slidekit · Agenda">
+    <p:bg>
+      <p:bgPr>
+        <a:solidFill>
+          <a:srgbClr val="F0EEE6"/>
+        </a:solidFill>
+        <a:effectLst/>
+      </p:bgPr>
+    </p:bg>
+    <p:spTree>
+      <p:nvGrpSpPr>
+        <p:cNvPr id="1" name=""/>
+        <p:cNvGrpSpPr/>
+        <p:nvPr/>
+      </p:nvGrpSpPr>
+      <p:grpSpPr>
+        <a:xfrm>
+          <a:off x="0" y="0"/>
+          <a:ext cx="0" cy="0"/>
+          <a:chOff x="0" y="0"/>
+          <a:chExt cx="0" cy="0"/>
+        </a:xfrm>
+      </p:grpSpPr>
+      <p:sp>
+        <p:nvSpPr>
+          <p:cNvPr id="4" name="Slide Number Placeholder 3"/>
+          <p:cNvSpPr>
+            <a:spLocks noGrp="1"/>
+          </p:cNvSpPr>
+          <p:nvPr>
+            <p:ph type="sldNum" sz="quarter" idx="12"/>
+          </p:nvPr>
+        </p:nvSpPr>
+        <p:spPr>
+          <a:xfrm>
+            <a:off x="11186160" y="6035040"/>
+            <a:ext cx="548640" cy="365760"/>
+          </a:xfrm>
+        </p:spPr>
+        <p:txBody>
+          <a:bodyPr/>
+          <a:lstStyle/>
+          <a:p>
+            <a:fld id="{C1FF6DA9-008F-8B48-92A6-B652298478BF}" type="slidenum">
+              <a:rPr lang="en-US" smtClean="0"/>
+              <a:t>‹#›</a:t>
+            </a:fld>
+            <a:endParaRPr lang="en-US"/>
+          </a:p>
+        </p:txBody>
+      </p:sp>
+      <p:sp>
+        <p:nvSpPr>
+          <p:cNvPr id="5" name="TextBox 4"/>
+          <p:cNvSpPr/>
+          <p:nvPr>
+            <p:ph type="title"/>
+          </p:nvPr>
+        </p:nvSpPr>
+        <p:spPr>
+          <a:xfrm>
+            <a:off x="457200" y="457200"/>
+            <a:ext cx="11277600" cy="768096"/>
+          </a:xfrm>
+          <a:prstGeom prst="rect">
+            <a:avLst/>
+          </a:prstGeom>
+          <a:noFill/>
+        </p:spPr>
+        <p:txBody>
+          <a:bodyPr wrap="none" lIns="0" rIns="0">
+            <a:noAutofit/>
+          </a:bodyPr>
+          <a:lstStyle/>
+          <a:p>
+            <a:pPr algn="l"/>
+            <a:r>
+              <a:rPr sz="4200" b="1" i="0">
+                <a:solidFill>
+                  <a:srgbClr val="D97757"/>
+                </a:solidFill>
+                <a:latin typeface="Arial"/>
+              </a:rPr>
+              <a:t>What We Will Cover</a:t>
+            </a:r>
+          </a:p>
+        </p:txBody>
+      </p:sp>
+      <p:sp>
+        <p:nvSpPr>
+          <p:cNvPr id="6" name="Rectangle 5"/>
+          <p:cNvSpPr/>
+          <p:nvPr>
+            <p:ph type="body" idx="1"/>
+          </p:nvPr>
+        </p:nvSpPr>
+        <p:spPr>
+          <a:xfrm>
+            <a:off x="457200" y="1280160"/>
+            <a:ext cx="11277600" cy="64008"/>
+          </a:xfrm>
+          <a:prstGeom prst="rect">
+            <a:avLst/>
+          </a:prstGeom>
+          <a:solidFill>
+            <a:srgbClr val="D97757"/>
+          </a:solidFill>
+          <a:ln>
+            <a:noFill/>
+          </a:ln>
+          <a:effectLst/>
+        </p:spPr>
+        <p:txBody>
+          <a:bodyPr rtlCol="0" anchor="ctr"/>
+          <a:lstStyle/>
+          <a:p>
+            <a:pPr algn="ctr"/>
+          </a:p>
+        </p:txBody>
+      </p:sp>
+      <p:sp>
+        <p:nvSpPr>
+          <p:cNvPr id="7" name="TextBox 6"/>
+          <p:cNvSpPr/>
+          <p:nvPr>
+            <p:ph type="body" idx="2"/>
+          </p:nvPr>
+        </p:nvSpPr>
+        <p:spPr>
+          <a:xfrm>
+            <a:off x="457200" y="1618488"/>
+            <a:ext cx="951348" cy="518159"/>
+          </a:xfrm>
+          <a:prstGeom prst="rect">
+            <a:avLst/>
+          </a:prstGeom>
+          <a:noFill/>
+        </p:spPr>
+        <p:txBody>
+          <a:bodyPr wrap="none" lIns="0" rIns="0">
+            <a:noAutofit/>
+          </a:bodyPr>
+          <a:lstStyle/>
+          <a:p>
+            <a:pPr algn="l"/>
+            <a:r>
+              <a:rPr sz="3400" b="1" i="0">
+                <a:solidFill>
+                  <a:srgbClr val="D97757"/>
+                </a:solidFill>
+                <a:latin typeface="Arial"/>
+              </a:rPr>
+              <a:t>01</a:t>
+            </a:r>
+          </a:p>
+        </p:txBody>
+      </p:sp>
+      <p:sp>
+        <p:nvSpPr>
+          <p:cNvPr id="8" name="TextBox 7"/>
+          <p:cNvSpPr/>
+          <p:nvPr>
+            <p:ph type="body" idx="3"/>
+          </p:nvPr>
+        </p:nvSpPr>
+        <p:spPr>
+          <a:xfrm>
+            <a:off x="1371600" y="1618488"/>
+            <a:ext cx="10363200" cy="518159"/>
+          </a:xfrm>
+          <a:prstGeom prst="rect">
+            <a:avLst/>
+          </a:prstGeom>
+          <a:noFill/>
+        </p:spPr>
+        <p:txBody>
+          <a:bodyPr wrap="none" lIns="0" rIns="0">
+            <a:noAutofit/>
+          </a:bodyPr>
+          <a:lstStyle/>
+          <a:p>
+            <a:pPr algn="l"/>
+            <a:r>
+              <a:rPr sz="3400" b="0" i="0">
+                <a:solidFill>
                   <a:srgbClr val="191919"/>
                 </a:solidFill>
                 <a:latin typeface="Arial"/>
               </a:rPr>
-              <a:t>Where We Stand Today</a:t>
+              <a:t>Performance against targets</a:t>
+            </a:r>
+          </a:p>
+        </p:txBody>
+      </p:sp>
+      <p:sp>
+        <p:nvSpPr>
+          <p:cNvPr id="9" name="TextBox 8"/>
+          <p:cNvSpPr/>
+          <p:nvPr>
+            <p:ph type="body" idx="4"/>
+          </p:nvPr>
+        </p:nvSpPr>
+        <p:spPr>
+          <a:xfrm>
+            <a:off x="457200" y="2501798"/>
+            <a:ext cx="951348" cy="518159"/>
+          </a:xfrm>
+          <a:prstGeom prst="rect">
+            <a:avLst/>
+          </a:prstGeom>
+          <a:noFill/>
+        </p:spPr>
+        <p:txBody>
+          <a:bodyPr wrap="none" lIns="0" rIns="0">
+            <a:noAutofit/>
+          </a:bodyPr>
+          <a:lstStyle/>
+          <a:p>
+            <a:pPr algn="l"/>
+            <a:r>
+              <a:rPr sz="3400" b="1" i="0">
+                <a:solidFill>
+                  <a:srgbClr val="D97757"/>
+                </a:solidFill>
+                <a:latin typeface="Arial"/>
+              </a:rPr>
+              <a:t>02</a:t>
+            </a:r>
+          </a:p>
+        </p:txBody>
+      </p:sp>
+      <p:sp>
+        <p:nvSpPr>
+          <p:cNvPr id="10" name="TextBox 9"/>
+          <p:cNvSpPr/>
+          <p:nvPr>
+            <p:ph type="body" idx="5"/>
+          </p:nvPr>
+        </p:nvSpPr>
+        <p:spPr>
+          <a:xfrm>
+            <a:off x="1371600" y="2501798"/>
+            <a:ext cx="10363200" cy="518159"/>
+          </a:xfrm>
+          <a:prstGeom prst="rect">
+            <a:avLst/>
+          </a:prstGeom>
+          <a:noFill/>
+        </p:spPr>
+        <p:txBody>
+          <a:bodyPr wrap="none" lIns="0" rIns="0">
+            <a:noAutofit/>
+          </a:bodyPr>
+          <a:lstStyle/>
+          <a:p>
+            <a:pPr algn="l"/>
+            <a:r>
+              <a:rPr sz="3400" b="0" i="0">
+                <a:solidFill>
+                  <a:srgbClr val="191919"/>
+                </a:solidFill>
+                <a:latin typeface="Arial"/>
+              </a:rPr>
+              <a:t>Customer and market signals</a:t>
+            </a:r>
+          </a:p>
+        </p:txBody>
+      </p:sp>
+      <p:sp>
+        <p:nvSpPr>
+          <p:cNvPr id="11" name="TextBox 10"/>
+          <p:cNvSpPr/>
+          <p:nvPr>
+            <p:ph type="body" idx="6"/>
+          </p:nvPr>
+        </p:nvSpPr>
+        <p:spPr>
+          <a:xfrm>
+            <a:off x="457200" y="3385108"/>
+            <a:ext cx="951348" cy="518159"/>
+          </a:xfrm>
+          <a:prstGeom prst="rect">
+            <a:avLst/>
+          </a:prstGeom>
+          <a:noFill/>
+        </p:spPr>
+        <p:txBody>
+          <a:bodyPr wrap="none" lIns="0" rIns="0">
+            <a:noAutofit/>
+          </a:bodyPr>
+          <a:lstStyle/>
+          <a:p>
+            <a:pPr algn="l"/>
+            <a:r>
+              <a:rPr sz="3400" b="1" i="0">
+                <a:solidFill>
+                  <a:srgbClr val="D97757"/>
+                </a:solidFill>
+                <a:latin typeface="Arial"/>
+              </a:rPr>
+              <a:t>03</a:t>
+            </a:r>
+          </a:p>
+        </p:txBody>
+      </p:sp>
+      <p:sp>
+        <p:nvSpPr>
+          <p:cNvPr id="12" name="TextBox 11"/>
+          <p:cNvSpPr/>
+          <p:nvPr>
+            <p:ph type="body" idx="7"/>
+          </p:nvPr>
+        </p:nvSpPr>
+        <p:spPr>
+          <a:xfrm>
+            <a:off x="1371600" y="3385108"/>
+            <a:ext cx="10363200" cy="518159"/>
+          </a:xfrm>
+          <a:prstGeom prst="rect">
+            <a:avLst/>
+          </a:prstGeom>
+          <a:noFill/>
+        </p:spPr>
+        <p:txBody>
+          <a:bodyPr wrap="none" lIns="0" rIns="0">
+            <a:noAutofit/>
+          </a:bodyPr>
+          <a:lstStyle/>
+          <a:p>
+            <a:pPr algn="l"/>
+            <a:r>
+              <a:rPr sz="3400" b="0" i="0">
+                <a:solidFill>
+                  <a:srgbClr val="191919"/>
+                </a:solidFill>
+                <a:latin typeface="Arial"/>
+              </a:rPr>
+              <a:t>Operational health and risks</a:t>
+            </a:r>
+          </a:p>
+        </p:txBody>
+      </p:sp>
+      <p:sp>
+        <p:nvSpPr>
+          <p:cNvPr id="13" name="TextBox 12"/>
+          <p:cNvSpPr/>
+          <p:nvPr>
+            <p:ph type="body" idx="8"/>
+          </p:nvPr>
+        </p:nvSpPr>
+        <p:spPr>
+          <a:xfrm>
+            <a:off x="457200" y="4268418"/>
+            <a:ext cx="951348" cy="518159"/>
+          </a:xfrm>
+          <a:prstGeom prst="rect">
+            <a:avLst/>
+          </a:prstGeom>
+          <a:noFill/>
+        </p:spPr>
+        <p:txBody>
+          <a:bodyPr wrap="none" lIns="0" rIns="0">
+            <a:noAutofit/>
+          </a:bodyPr>
+          <a:lstStyle/>
+          <a:p>
+            <a:pPr algn="l"/>
+            <a:r>
+              <a:rPr sz="3400" b="1" i="0">
+                <a:solidFill>
+                  <a:srgbClr val="D97757"/>
+                </a:solidFill>
+                <a:latin typeface="Arial"/>
+              </a:rPr>
+              <a:t>04</a:t>
+            </a:r>
+          </a:p>
+        </p:txBody>
+      </p:sp>
+      <p:sp>
+        <p:nvSpPr>
+          <p:cNvPr id="14" name="TextBox 13"/>
+          <p:cNvSpPr/>
+          <p:nvPr>
+            <p:ph type="body" idx="9"/>
+          </p:nvPr>
+        </p:nvSpPr>
+        <p:spPr>
+          <a:xfrm>
+            <a:off x="1371600" y="4268418"/>
+            <a:ext cx="10363200" cy="518159"/>
+          </a:xfrm>
+          <a:prstGeom prst="rect">
+            <a:avLst/>
+          </a:prstGeom>
+          <a:noFill/>
+        </p:spPr>
+        <p:txBody>
+          <a:bodyPr wrap="none" lIns="0" rIns="0">
+            <a:noAutofit/>
+          </a:bodyPr>
+          <a:lstStyle/>
+          <a:p>
+            <a:pPr algn="l"/>
+            <a:r>
+              <a:rPr sz="3400" b="0" i="0">
+                <a:solidFill>
+                  <a:srgbClr val="191919"/>
+                </a:solidFill>
+                <a:latin typeface="Arial"/>
+              </a:rPr>
+              <a:t>Roadmap for next quarter</a:t>
+            </a:r>
+          </a:p>
+        </p:txBody>
+      </p:sp>
+      <p:sp>
+        <p:nvSpPr>
+          <p:cNvPr id="15" name="TextBox 14"/>
+          <p:cNvSpPr/>
+          <p:nvPr>
+            <p:ph type="body" idx="13"/>
+          </p:nvPr>
+        </p:nvSpPr>
+        <p:spPr>
+          <a:xfrm>
+            <a:off x="457200" y="5151728"/>
+            <a:ext cx="951348" cy="518159"/>
+          </a:xfrm>
+          <a:prstGeom prst="rect">
+            <a:avLst/>
+          </a:prstGeom>
+          <a:noFill/>
+        </p:spPr>
+        <p:txBody>
+          <a:bodyPr wrap="none" lIns="0" rIns="0">
+            <a:noAutofit/>
+          </a:bodyPr>
+          <a:lstStyle/>
+          <a:p>
+            <a:pPr algn="l"/>
+            <a:r>
+              <a:rPr sz="3400" b="1" i="0">
+                <a:solidFill>
+                  <a:srgbClr val="D97757"/>
+                </a:solidFill>
+                <a:latin typeface="Arial"/>
+              </a:rPr>
+              <a:t>05</a:t>
+            </a:r>
+          </a:p>
+        </p:txBody>
+      </p:sp>
+      <p:sp>
+        <p:nvSpPr>
+          <p:cNvPr id="16" name="TextBox 15"/>
+          <p:cNvSpPr/>
+          <p:nvPr>
+            <p:ph type="body" idx="14"/>
+          </p:nvPr>
+        </p:nvSpPr>
+        <p:spPr>
+          <a:xfrm>
+            <a:off x="1371600" y="5151728"/>
+            <a:ext cx="10363200" cy="518159"/>
+          </a:xfrm>
+          <a:prstGeom prst="rect">
+            <a:avLst/>
+          </a:prstGeom>
+          <a:noFill/>
+        </p:spPr>
+        <p:txBody>
+          <a:bodyPr wrap="none" lIns="0" rIns="0">
+            <a:noAutofit/>
+          </a:bodyPr>
+          <a:lstStyle/>
+          <a:p>
+            <a:pPr algn="l"/>
+            <a:r>
+              <a:rPr sz="3400" b="0" i="0">
+                <a:solidFill>
+                  <a:srgbClr val="191919"/>
+                </a:solidFill>
+                <a:latin typeface="Arial"/>
+              </a:rPr>
+              <a:t>Decisions we need today</a:t>
             </a:r>
           </a:p>
         </p:txBody>
@@ -3332,511 +3438,6 @@
 
 <file path=ppt/slideLayouts/slideLayout20.xml><?xml version="1.0" encoding="utf-8"?>
 <p:sldLayout xmlns:a="http://schemas.openxmlformats.org/drawingml/2006/main" xmlns:r="http://schemas.openxmlformats.org/officeDocument/2006/relationships" xmlns:p="http://schemas.openxmlformats.org/presentationml/2006/main" type="blank" preserve="1">
-  <p:cSld name="slidekit · Agenda">
-    <p:bg>
-      <p:bgPr>
-        <a:solidFill>
-          <a:srgbClr val="F0EEE6"/>
-        </a:solidFill>
-        <a:effectLst/>
-      </p:bgPr>
-    </p:bg>
-    <p:spTree>
-      <p:nvGrpSpPr>
-        <p:cNvPr id="1" name=""/>
-        <p:cNvGrpSpPr/>
-        <p:nvPr/>
-      </p:nvGrpSpPr>
-      <p:grpSpPr>
-        <a:xfrm>
-          <a:off x="0" y="0"/>
-          <a:ext cx="0" cy="0"/>
-          <a:chOff x="0" y="0"/>
-          <a:chExt cx="0" cy="0"/>
-        </a:xfrm>
-      </p:grpSpPr>
-      <p:sp>
-        <p:nvSpPr>
-          <p:cNvPr id="4" name="Slide Number Placeholder 3"/>
-          <p:cNvSpPr>
-            <a:spLocks noGrp="1"/>
-          </p:cNvSpPr>
-          <p:nvPr>
-            <p:ph type="sldNum" sz="quarter" idx="12"/>
-          </p:nvPr>
-        </p:nvSpPr>
-        <p:spPr>
-          <a:xfrm>
-            <a:off x="10363200" y="6035040"/>
-            <a:ext cx="1371600" cy="365760"/>
-          </a:xfrm>
-        </p:spPr>
-        <p:txBody>
-          <a:bodyPr/>
-          <a:lstStyle/>
-          <a:p>
-            <a:fld id="{C1FF6DA9-008F-8B48-92A6-B652298478BF}" type="slidenum">
-              <a:rPr lang="en-US" smtClean="0"/>
-              <a:t>‹#›</a:t>
-            </a:fld>
-            <a:endParaRPr lang="en-US"/>
-          </a:p>
-        </p:txBody>
-      </p:sp>
-      <p:sp>
-        <p:nvSpPr>
-          <p:cNvPr id="5" name="TextBox 4"/>
-          <p:cNvSpPr/>
-          <p:nvPr>
-            <p:ph type="title"/>
-          </p:nvPr>
-        </p:nvSpPr>
-        <p:spPr>
-          <a:xfrm>
-            <a:off x="457200" y="457200"/>
-            <a:ext cx="11277600" cy="768096"/>
-          </a:xfrm>
-          <a:prstGeom prst="rect">
-            <a:avLst/>
-          </a:prstGeom>
-          <a:noFill/>
-        </p:spPr>
-        <p:txBody>
-          <a:bodyPr wrap="none" lIns="0" rIns="0">
-            <a:noAutofit/>
-          </a:bodyPr>
-          <a:lstStyle/>
-          <a:p>
-            <a:pPr algn="l"/>
-            <a:r>
-              <a:rPr sz="4200" b="1" i="0">
-                <a:solidFill>
-                  <a:srgbClr val="191919"/>
-                </a:solidFill>
-                <a:latin typeface="Arial"/>
-              </a:rPr>
-              <a:t>What We Will Cover</a:t>
-            </a:r>
-          </a:p>
-        </p:txBody>
-      </p:sp>
-      <p:sp>
-        <p:nvSpPr>
-          <p:cNvPr id="6" name="Rectangle 5"/>
-          <p:cNvSpPr/>
-          <p:nvPr>
-            <p:ph type="body" idx="1"/>
-          </p:nvPr>
-        </p:nvSpPr>
-        <p:spPr>
-          <a:xfrm>
-            <a:off x="457200" y="1280160"/>
-            <a:ext cx="11277600" cy="64008"/>
-          </a:xfrm>
-          <a:prstGeom prst="rect">
-            <a:avLst/>
-          </a:prstGeom>
-          <a:solidFill>
-            <a:srgbClr val="D97757"/>
-          </a:solidFill>
-          <a:ln>
-            <a:noFill/>
-          </a:ln>
-          <a:effectLst/>
-        </p:spPr>
-        <p:txBody>
-          <a:bodyPr rtlCol="0" anchor="ctr"/>
-          <a:lstStyle/>
-          <a:p>
-            <a:pPr algn="ctr"/>
-          </a:p>
-        </p:txBody>
-      </p:sp>
-      <p:sp>
-        <p:nvSpPr>
-          <p:cNvPr id="7" name="TextBox 6"/>
-          <p:cNvSpPr/>
-          <p:nvPr>
-            <p:ph type="body" idx="2"/>
-          </p:nvPr>
-        </p:nvSpPr>
-        <p:spPr>
-          <a:xfrm>
-            <a:off x="457200" y="1618488"/>
-            <a:ext cx="951348" cy="518159"/>
-          </a:xfrm>
-          <a:prstGeom prst="rect">
-            <a:avLst/>
-          </a:prstGeom>
-          <a:noFill/>
-        </p:spPr>
-        <p:txBody>
-          <a:bodyPr wrap="none" lIns="0" rIns="0">
-            <a:noAutofit/>
-          </a:bodyPr>
-          <a:lstStyle/>
-          <a:p>
-            <a:pPr algn="l"/>
-            <a:r>
-              <a:rPr sz="3400" b="1" i="0">
-                <a:solidFill>
-                  <a:srgbClr val="D97757"/>
-                </a:solidFill>
-                <a:latin typeface="Arial"/>
-              </a:rPr>
-              <a:t>01</a:t>
-            </a:r>
-          </a:p>
-        </p:txBody>
-      </p:sp>
-      <p:sp>
-        <p:nvSpPr>
-          <p:cNvPr id="8" name="TextBox 7"/>
-          <p:cNvSpPr/>
-          <p:nvPr>
-            <p:ph type="body" idx="3"/>
-          </p:nvPr>
-        </p:nvSpPr>
-        <p:spPr>
-          <a:xfrm>
-            <a:off x="1371600" y="1618488"/>
-            <a:ext cx="10363200" cy="518159"/>
-          </a:xfrm>
-          <a:prstGeom prst="rect">
-            <a:avLst/>
-          </a:prstGeom>
-          <a:noFill/>
-        </p:spPr>
-        <p:txBody>
-          <a:bodyPr wrap="none" lIns="0" rIns="0">
-            <a:noAutofit/>
-          </a:bodyPr>
-          <a:lstStyle/>
-          <a:p>
-            <a:pPr algn="l"/>
-            <a:r>
-              <a:rPr sz="3400" b="0" i="0">
-                <a:solidFill>
-                  <a:srgbClr val="191919"/>
-                </a:solidFill>
-                <a:latin typeface="Arial"/>
-              </a:rPr>
-              <a:t>Performance against targets</a:t>
-            </a:r>
-          </a:p>
-        </p:txBody>
-      </p:sp>
-      <p:sp>
-        <p:nvSpPr>
-          <p:cNvPr id="9" name="TextBox 8"/>
-          <p:cNvSpPr/>
-          <p:nvPr>
-            <p:ph type="body" idx="4"/>
-          </p:nvPr>
-        </p:nvSpPr>
-        <p:spPr>
-          <a:xfrm>
-            <a:off x="457200" y="2501798"/>
-            <a:ext cx="951348" cy="518159"/>
-          </a:xfrm>
-          <a:prstGeom prst="rect">
-            <a:avLst/>
-          </a:prstGeom>
-          <a:noFill/>
-        </p:spPr>
-        <p:txBody>
-          <a:bodyPr wrap="none" lIns="0" rIns="0">
-            <a:noAutofit/>
-          </a:bodyPr>
-          <a:lstStyle/>
-          <a:p>
-            <a:pPr algn="l"/>
-            <a:r>
-              <a:rPr sz="3400" b="1" i="0">
-                <a:solidFill>
-                  <a:srgbClr val="D97757"/>
-                </a:solidFill>
-                <a:latin typeface="Arial"/>
-              </a:rPr>
-              <a:t>02</a:t>
-            </a:r>
-          </a:p>
-        </p:txBody>
-      </p:sp>
-      <p:sp>
-        <p:nvSpPr>
-          <p:cNvPr id="10" name="TextBox 9"/>
-          <p:cNvSpPr/>
-          <p:nvPr>
-            <p:ph type="body" idx="5"/>
-          </p:nvPr>
-        </p:nvSpPr>
-        <p:spPr>
-          <a:xfrm>
-            <a:off x="1371600" y="2501798"/>
-            <a:ext cx="10363200" cy="518159"/>
-          </a:xfrm>
-          <a:prstGeom prst="rect">
-            <a:avLst/>
-          </a:prstGeom>
-          <a:noFill/>
-        </p:spPr>
-        <p:txBody>
-          <a:bodyPr wrap="none" lIns="0" rIns="0">
-            <a:noAutofit/>
-          </a:bodyPr>
-          <a:lstStyle/>
-          <a:p>
-            <a:pPr algn="l"/>
-            <a:r>
-              <a:rPr sz="3400" b="0" i="0">
-                <a:solidFill>
-                  <a:srgbClr val="191919"/>
-                </a:solidFill>
-                <a:latin typeface="Arial"/>
-              </a:rPr>
-              <a:t>Customer and market signals</a:t>
-            </a:r>
-          </a:p>
-        </p:txBody>
-      </p:sp>
-      <p:sp>
-        <p:nvSpPr>
-          <p:cNvPr id="11" name="TextBox 10"/>
-          <p:cNvSpPr/>
-          <p:nvPr>
-            <p:ph type="body" idx="6"/>
-          </p:nvPr>
-        </p:nvSpPr>
-        <p:spPr>
-          <a:xfrm>
-            <a:off x="457200" y="3385108"/>
-            <a:ext cx="951348" cy="518159"/>
-          </a:xfrm>
-          <a:prstGeom prst="rect">
-            <a:avLst/>
-          </a:prstGeom>
-          <a:noFill/>
-        </p:spPr>
-        <p:txBody>
-          <a:bodyPr wrap="none" lIns="0" rIns="0">
-            <a:noAutofit/>
-          </a:bodyPr>
-          <a:lstStyle/>
-          <a:p>
-            <a:pPr algn="l"/>
-            <a:r>
-              <a:rPr sz="3400" b="1" i="0">
-                <a:solidFill>
-                  <a:srgbClr val="D97757"/>
-                </a:solidFill>
-                <a:latin typeface="Arial"/>
-              </a:rPr>
-              <a:t>03</a:t>
-            </a:r>
-          </a:p>
-        </p:txBody>
-      </p:sp>
-      <p:sp>
-        <p:nvSpPr>
-          <p:cNvPr id="12" name="TextBox 11"/>
-          <p:cNvSpPr/>
-          <p:nvPr>
-            <p:ph type="body" idx="7"/>
-          </p:nvPr>
-        </p:nvSpPr>
-        <p:spPr>
-          <a:xfrm>
-            <a:off x="1371600" y="3385108"/>
-            <a:ext cx="10363200" cy="518159"/>
-          </a:xfrm>
-          <a:prstGeom prst="rect">
-            <a:avLst/>
-          </a:prstGeom>
-          <a:noFill/>
-        </p:spPr>
-        <p:txBody>
-          <a:bodyPr wrap="none" lIns="0" rIns="0">
-            <a:noAutofit/>
-          </a:bodyPr>
-          <a:lstStyle/>
-          <a:p>
-            <a:pPr algn="l"/>
-            <a:r>
-              <a:rPr sz="3400" b="0" i="0">
-                <a:solidFill>
-                  <a:srgbClr val="191919"/>
-                </a:solidFill>
-                <a:latin typeface="Arial"/>
-              </a:rPr>
-              <a:t>Operational health and risks</a:t>
-            </a:r>
-          </a:p>
-        </p:txBody>
-      </p:sp>
-      <p:sp>
-        <p:nvSpPr>
-          <p:cNvPr id="13" name="TextBox 12"/>
-          <p:cNvSpPr/>
-          <p:nvPr>
-            <p:ph type="body" idx="8"/>
-          </p:nvPr>
-        </p:nvSpPr>
-        <p:spPr>
-          <a:xfrm>
-            <a:off x="457200" y="4268418"/>
-            <a:ext cx="951348" cy="518159"/>
-          </a:xfrm>
-          <a:prstGeom prst="rect">
-            <a:avLst/>
-          </a:prstGeom>
-          <a:noFill/>
-        </p:spPr>
-        <p:txBody>
-          <a:bodyPr wrap="none" lIns="0" rIns="0">
-            <a:noAutofit/>
-          </a:bodyPr>
-          <a:lstStyle/>
-          <a:p>
-            <a:pPr algn="l"/>
-            <a:r>
-              <a:rPr sz="3400" b="1" i="0">
-                <a:solidFill>
-                  <a:srgbClr val="D97757"/>
-                </a:solidFill>
-                <a:latin typeface="Arial"/>
-              </a:rPr>
-              <a:t>04</a:t>
-            </a:r>
-          </a:p>
-        </p:txBody>
-      </p:sp>
-      <p:sp>
-        <p:nvSpPr>
-          <p:cNvPr id="14" name="TextBox 13"/>
-          <p:cNvSpPr/>
-          <p:nvPr>
-            <p:ph type="body" idx="9"/>
-          </p:nvPr>
-        </p:nvSpPr>
-        <p:spPr>
-          <a:xfrm>
-            <a:off x="1371600" y="4268418"/>
-            <a:ext cx="10363200" cy="518159"/>
-          </a:xfrm>
-          <a:prstGeom prst="rect">
-            <a:avLst/>
-          </a:prstGeom>
-          <a:noFill/>
-        </p:spPr>
-        <p:txBody>
-          <a:bodyPr wrap="none" lIns="0" rIns="0">
-            <a:noAutofit/>
-          </a:bodyPr>
-          <a:lstStyle/>
-          <a:p>
-            <a:pPr algn="l"/>
-            <a:r>
-              <a:rPr sz="3400" b="0" i="0">
-                <a:solidFill>
-                  <a:srgbClr val="191919"/>
-                </a:solidFill>
-                <a:latin typeface="Arial"/>
-              </a:rPr>
-              <a:t>Roadmap for next quarter</a:t>
-            </a:r>
-          </a:p>
-        </p:txBody>
-      </p:sp>
-      <p:sp>
-        <p:nvSpPr>
-          <p:cNvPr id="15" name="TextBox 14"/>
-          <p:cNvSpPr/>
-          <p:nvPr>
-            <p:ph type="body" idx="13"/>
-          </p:nvPr>
-        </p:nvSpPr>
-        <p:spPr>
-          <a:xfrm>
-            <a:off x="457200" y="5151728"/>
-            <a:ext cx="951348" cy="518159"/>
-          </a:xfrm>
-          <a:prstGeom prst="rect">
-            <a:avLst/>
-          </a:prstGeom>
-          <a:noFill/>
-        </p:spPr>
-        <p:txBody>
-          <a:bodyPr wrap="none" lIns="0" rIns="0">
-            <a:noAutofit/>
-          </a:bodyPr>
-          <a:lstStyle/>
-          <a:p>
-            <a:pPr algn="l"/>
-            <a:r>
-              <a:rPr sz="3400" b="1" i="0">
-                <a:solidFill>
-                  <a:srgbClr val="D97757"/>
-                </a:solidFill>
-                <a:latin typeface="Arial"/>
-              </a:rPr>
-              <a:t>05</a:t>
-            </a:r>
-          </a:p>
-        </p:txBody>
-      </p:sp>
-      <p:sp>
-        <p:nvSpPr>
-          <p:cNvPr id="16" name="TextBox 15"/>
-          <p:cNvSpPr/>
-          <p:nvPr>
-            <p:ph type="body" idx="14"/>
-          </p:nvPr>
-        </p:nvSpPr>
-        <p:spPr>
-          <a:xfrm>
-            <a:off x="1371600" y="5151728"/>
-            <a:ext cx="10363200" cy="518159"/>
-          </a:xfrm>
-          <a:prstGeom prst="rect">
-            <a:avLst/>
-          </a:prstGeom>
-          <a:noFill/>
-        </p:spPr>
-        <p:txBody>
-          <a:bodyPr wrap="none" lIns="0" rIns="0">
-            <a:noAutofit/>
-          </a:bodyPr>
-          <a:lstStyle/>
-          <a:p>
-            <a:pPr algn="l"/>
-            <a:r>
-              <a:rPr sz="3400" b="0" i="0">
-                <a:solidFill>
-                  <a:srgbClr val="191919"/>
-                </a:solidFill>
-                <a:latin typeface="Arial"/>
-              </a:rPr>
-              <a:t>Decisions we need today</a:t>
-            </a:r>
-          </a:p>
-        </p:txBody>
-      </p:sp>
-    </p:spTree>
-    <p:extLst>
-      <p:ext uri="{BB962C8B-B14F-4D97-AF65-F5344CB8AC3E}">
-        <p14:creationId xmlns:p14="http://schemas.microsoft.com/office/powerpoint/2010/main" val="1212999818"/>
-      </p:ext>
-    </p:extLst>
-  </p:cSld>
-  <p:clrMapOvr>
-    <a:masterClrMapping/>
-  </p:clrMapOvr>
-</p:sldLayout>
-</file>
-
-<file path=ppt/slideLayouts/slideLayout21.xml><?xml version="1.0" encoding="utf-8"?>
-<p:sldLayout xmlns:a="http://schemas.openxmlformats.org/drawingml/2006/main" xmlns:r="http://schemas.openxmlformats.org/officeDocument/2006/relationships" xmlns:p="http://schemas.openxmlformats.org/presentationml/2006/main" type="blank" preserve="1">
   <p:cSld name="slidekit · Big Number">
     <p:bg>
       <p:bgPr>
@@ -3872,8 +3473,8 @@
         </p:nvSpPr>
         <p:spPr>
           <a:xfrm>
-            <a:off x="10363200" y="6035040"/>
-            <a:ext cx="1371600" cy="365760"/>
+            <a:off x="11186160" y="6035040"/>
+            <a:ext cx="548640" cy="365760"/>
           </a:xfrm>
         </p:spPr>
         <p:txBody>
@@ -4007,7 +3608,7 @@
 </p:sldLayout>
 </file>
 
-<file path=ppt/slideLayouts/slideLayout22.xml><?xml version="1.0" encoding="utf-8"?>
+<file path=ppt/slideLayouts/slideLayout21.xml><?xml version="1.0" encoding="utf-8"?>
 <p:sldLayout xmlns:a="http://schemas.openxmlformats.org/drawingml/2006/main" xmlns:r="http://schemas.openxmlformats.org/officeDocument/2006/relationships" xmlns:p="http://schemas.openxmlformats.org/presentationml/2006/main" type="blank" preserve="1">
   <p:cSld name="slidekit · Pull Quote">
     <p:bg>
@@ -4044,8 +3645,8 @@
         </p:nvSpPr>
         <p:spPr>
           <a:xfrm>
-            <a:off x="10363200" y="6035040"/>
-            <a:ext cx="1371600" cy="365760"/>
+            <a:off x="11186160" y="6035040"/>
+            <a:ext cx="548640" cy="365760"/>
           </a:xfrm>
         </p:spPr>
         <p:txBody>
@@ -4070,8 +3671,8 @@
         </p:nvSpPr>
         <p:spPr>
           <a:xfrm>
-            <a:off x="457200" y="2301240"/>
-            <a:ext cx="128016" cy="2255520"/>
+            <a:off x="457200" y="2621280"/>
+            <a:ext cx="128016" cy="1615440"/>
           </a:xfrm>
           <a:prstGeom prst="rect">
             <a:avLst/>
@@ -4102,16 +3703,16 @@
         </p:nvSpPr>
         <p:spPr>
           <a:xfrm>
-            <a:off x="996696" y="2301240"/>
-            <a:ext cx="10738104" cy="1371600"/>
-          </a:xfrm>
-          <a:prstGeom prst="rect">
-            <a:avLst/>
-          </a:prstGeom>
-          <a:noFill/>
-        </p:spPr>
-        <p:txBody>
-          <a:bodyPr wrap="square" lIns="0" rIns="0">
+            <a:off x="996696" y="2621280"/>
+            <a:ext cx="11195304" cy="731520"/>
+          </a:xfrm>
+          <a:prstGeom prst="rect">
+            <a:avLst/>
+          </a:prstGeom>
+          <a:noFill/>
+        </p:spPr>
+        <p:txBody>
+          <a:bodyPr wrap="none" lIns="0" rIns="0">
             <a:noAutofit/>
           </a:bodyPr>
           <a:lstStyle/>
@@ -4124,7 +3725,7 @@
                 </a:solidFill>
                 <a:latin typeface="Arial"/>
               </a:rPr>
-              <a:t>"We stopped buying tools and started buying outcomes."</a:t>
+              <a:t>"We buy outcomes, not tools."</a:t>
             </a:r>
           </a:p>
         </p:txBody>
@@ -4139,7 +3740,7 @@
         </p:nvSpPr>
         <p:spPr>
           <a:xfrm>
-            <a:off x="996696" y="3947160"/>
+            <a:off x="996696" y="3627120"/>
             <a:ext cx="11195304" cy="609600"/>
           </a:xfrm>
           <a:prstGeom prst="rect">
@@ -4157,7 +3758,7 @@
             <a:r>
               <a:rPr sz="3400" b="0" i="0">
                 <a:solidFill>
-                  <a:srgbClr val="6C6A64"/>
+                  <a:srgbClr val="191919"/>
                 </a:solidFill>
                 <a:latin typeface="Arial"/>
               </a:rPr>
@@ -4179,7 +3780,7 @@
 </p:sldLayout>
 </file>
 
-<file path=ppt/slideLayouts/slideLayout23.xml><?xml version="1.0" encoding="utf-8"?>
+<file path=ppt/slideLayouts/slideLayout22.xml><?xml version="1.0" encoding="utf-8"?>
 <p:sldLayout xmlns:a="http://schemas.openxmlformats.org/drawingml/2006/main" xmlns:r="http://schemas.openxmlformats.org/officeDocument/2006/relationships" xmlns:p="http://schemas.openxmlformats.org/presentationml/2006/main" type="blank" preserve="1">
   <p:cSld name="slidekit · Definition">
     <p:bg>
@@ -4216,8 +3817,8 @@
         </p:nvSpPr>
         <p:spPr>
           <a:xfrm>
-            <a:off x="10363200" y="6035040"/>
-            <a:ext cx="1371600" cy="365760"/>
+            <a:off x="11186160" y="6035040"/>
+            <a:ext cx="548640" cy="365760"/>
           </a:xfrm>
         </p:spPr>
         <p:txBody>
@@ -4242,8 +3843,8 @@
         </p:nvSpPr>
         <p:spPr>
           <a:xfrm>
-            <a:off x="457200" y="1965960"/>
-            <a:ext cx="128016" cy="2926080"/>
+            <a:off x="457200" y="2484120"/>
+            <a:ext cx="128016" cy="1889760"/>
           </a:xfrm>
           <a:prstGeom prst="rect">
             <a:avLst/>
@@ -4274,7 +3875,7 @@
         </p:nvSpPr>
         <p:spPr>
           <a:xfrm>
-            <a:off x="996696" y="1965960"/>
+            <a:off x="996696" y="2484120"/>
             <a:ext cx="11195304" cy="1005840"/>
           </a:xfrm>
           <a:prstGeom prst="rect">
@@ -4311,16 +3912,16 @@
         </p:nvSpPr>
         <p:spPr>
           <a:xfrm>
-            <a:off x="996696" y="3246120"/>
-            <a:ext cx="10738104" cy="1645920"/>
-          </a:xfrm>
-          <a:prstGeom prst="rect">
-            <a:avLst/>
-          </a:prstGeom>
-          <a:noFill/>
-        </p:spPr>
-        <p:txBody>
-          <a:bodyPr wrap="square" lIns="0" rIns="0">
+            <a:off x="996696" y="3764280"/>
+            <a:ext cx="11195304" cy="609600"/>
+          </a:xfrm>
+          <a:prstGeom prst="rect">
+            <a:avLst/>
+          </a:prstGeom>
+          <a:noFill/>
+        </p:spPr>
+        <p:txBody>
+          <a:bodyPr wrap="none" lIns="0" rIns="0">
             <a:noAutofit/>
           </a:bodyPr>
           <a:lstStyle/>
@@ -4333,7 +3934,7 @@
                 </a:solidFill>
                 <a:latin typeface="Arial"/>
               </a:rPr>
-              <a:t>The percentage of recurring revenue retained from existing customers over a period, including expansion and after churn.</a:t>
+              <a:t>Revenue kept from existing customers.</a:t>
             </a:r>
           </a:p>
         </p:txBody>
@@ -4351,7 +3952,7 @@
 </p:sldLayout>
 </file>
 
-<file path=ppt/slideLayouts/slideLayout24.xml><?xml version="1.0" encoding="utf-8"?>
+<file path=ppt/slideLayouts/slideLayout23.xml><?xml version="1.0" encoding="utf-8"?>
 <p:sldLayout xmlns:a="http://schemas.openxmlformats.org/drawingml/2006/main" xmlns:r="http://schemas.openxmlformats.org/officeDocument/2006/relationships" xmlns:p="http://schemas.openxmlformats.org/presentationml/2006/main" type="blank" preserve="1">
   <p:cSld name="slidekit · Question">
     <p:bg>
@@ -4388,8 +3989,8 @@
         </p:nvSpPr>
         <p:spPr>
           <a:xfrm>
-            <a:off x="10363200" y="6035040"/>
-            <a:ext cx="1371600" cy="365760"/>
+            <a:off x="11186160" y="6035040"/>
+            <a:ext cx="548640" cy="365760"/>
           </a:xfrm>
         </p:spPr>
         <p:txBody>
@@ -4414,8 +4015,8 @@
         </p:nvSpPr>
         <p:spPr>
           <a:xfrm>
-            <a:off x="457200" y="2011680"/>
-            <a:ext cx="128016" cy="2834640"/>
+            <a:off x="457200" y="2926080"/>
+            <a:ext cx="128016" cy="1005840"/>
           </a:xfrm>
           <a:prstGeom prst="rect">
             <a:avLst/>
@@ -4446,16 +4047,16 @@
         </p:nvSpPr>
         <p:spPr>
           <a:xfrm>
-            <a:off x="996696" y="2011680"/>
-            <a:ext cx="10738104" cy="2834640"/>
-          </a:xfrm>
-          <a:prstGeom prst="rect">
-            <a:avLst/>
-          </a:prstGeom>
-          <a:noFill/>
-        </p:spPr>
-        <p:txBody>
-          <a:bodyPr wrap="square" lIns="0" rIns="0">
+            <a:off x="996696" y="2926080"/>
+            <a:ext cx="11195304" cy="1005840"/>
+          </a:xfrm>
+          <a:prstGeom prst="rect">
+            <a:avLst/>
+          </a:prstGeom>
+          <a:noFill/>
+        </p:spPr>
+        <p:txBody>
+          <a:bodyPr wrap="none" lIns="0" rIns="0">
             <a:noAutofit/>
           </a:bodyPr>
           <a:lstStyle/>
@@ -4468,7 +4069,7 @@
                 </a:solidFill>
                 <a:latin typeface="Arial"/>
               </a:rPr>
-              <a:t>What would we build if we trusted our customers completely?</a:t>
+              <a:t>What if we trusted users?</a:t>
             </a:r>
           </a:p>
         </p:txBody>
@@ -4486,7 +4087,7 @@
 </p:sldLayout>
 </file>
 
-<file path=ppt/slideLayouts/slideLayout25.xml><?xml version="1.0" encoding="utf-8"?>
+<file path=ppt/slideLayouts/slideLayout24.xml><?xml version="1.0" encoding="utf-8"?>
 <p:sldLayout xmlns:a="http://schemas.openxmlformats.org/drawingml/2006/main" xmlns:r="http://schemas.openxmlformats.org/officeDocument/2006/relationships" xmlns:p="http://schemas.openxmlformats.org/presentationml/2006/main" type="blank" preserve="1">
   <p:cSld name="slidekit · Bullet List">
     <p:bg>
@@ -4523,8 +4124,8 @@
         </p:nvSpPr>
         <p:spPr>
           <a:xfrm>
-            <a:off x="10363200" y="6035040"/>
-            <a:ext cx="1371600" cy="365760"/>
+            <a:off x="11186160" y="6035040"/>
+            <a:ext cx="548640" cy="365760"/>
           </a:xfrm>
         </p:spPr>
         <p:txBody>
@@ -4567,7 +4168,7 @@
             <a:r>
               <a:rPr sz="4200" b="1" i="0">
                 <a:solidFill>
-                  <a:srgbClr val="191919"/>
+                  <a:srgbClr val="D97757"/>
                 </a:solidFill>
                 <a:latin typeface="Arial"/>
               </a:rPr>
@@ -4700,7 +4301,7 @@
 </p:sldLayout>
 </file>
 
-<file path=ppt/slideLayouts/slideLayout26.xml><?xml version="1.0" encoding="utf-8"?>
+<file path=ppt/slideLayouts/slideLayout25.xml><?xml version="1.0" encoding="utf-8"?>
 <p:sldLayout xmlns:a="http://schemas.openxmlformats.org/drawingml/2006/main" xmlns:r="http://schemas.openxmlformats.org/officeDocument/2006/relationships" xmlns:p="http://schemas.openxmlformats.org/presentationml/2006/main" type="blank" preserve="1">
   <p:cSld name="slidekit · Code Block">
     <p:bg>
@@ -4737,8 +4338,8 @@
         </p:nvSpPr>
         <p:spPr>
           <a:xfrm>
-            <a:off x="10363200" y="6035040"/>
-            <a:ext cx="1371600" cy="365760"/>
+            <a:off x="11186160" y="6035040"/>
+            <a:ext cx="548640" cy="365760"/>
           </a:xfrm>
         </p:spPr>
         <p:txBody>
@@ -4770,7 +4371,7 @@
             <a:avLst/>
           </a:prstGeom>
           <a:solidFill>
-            <a:srgbClr val="FF5F56"/>
+            <a:srgbClr val="FFFFFF"/>
           </a:solidFill>
           <a:ln>
             <a:noFill/>
@@ -4802,7 +4403,7 @@
             <a:avLst/>
           </a:prstGeom>
           <a:solidFill>
-            <a:srgbClr val="FFBD2E"/>
+            <a:srgbClr val="FFFFFF"/>
           </a:solidFill>
           <a:ln>
             <a:noFill/>
@@ -4834,7 +4435,7 @@
             <a:avLst/>
           </a:prstGeom>
           <a:solidFill>
-            <a:srgbClr val="27C93F"/>
+            <a:srgbClr val="FFFFFF"/>
           </a:solidFill>
           <a:ln>
             <a:noFill/>
@@ -4877,7 +4478,7 @@
             <a:r>
               <a:rPr sz="4200" b="0" i="0">
                 <a:solidFill>
-                  <a:srgbClr val="D4D4D4"/>
+                  <a:srgbClr val="FFFFFF"/>
                 </a:solidFill>
                 <a:latin typeface="Arial"/>
               </a:rPr>
@@ -4914,7 +4515,7 @@
             <a:r>
               <a:rPr sz="3400" b="0" i="0">
                 <a:solidFill>
-                  <a:srgbClr val="6A9955"/>
+                  <a:srgbClr val="FFFFFF"/>
                 </a:solidFill>
                 <a:latin typeface="Arial"/>
               </a:rPr>
@@ -4971,7 +4572,7 @@
         <p:spPr>
           <a:xfrm>
             <a:off x="1057461" y="2356103"/>
-            <a:ext cx="302848" cy="518159"/>
+            <a:ext cx="2524382" cy="518159"/>
           </a:xfrm>
           <a:prstGeom prst="rect">
             <a:avLst/>
@@ -4988,11 +4589,11 @@
             <a:r>
               <a:rPr sz="3400" b="0" i="0">
                 <a:solidFill>
-                  <a:srgbClr val="D4D4D4"/>
-                </a:solidFill>
-                <a:latin typeface="Arial"/>
-              </a:rPr>
-              <a:t> </a:t>
+                  <a:srgbClr val="FFFFFF"/>
+                </a:solidFill>
+                <a:latin typeface="Arial"/>
+              </a:rPr>
+              <a:t> main():</a:t>
             </a:r>
           </a:p>
         </p:txBody>
@@ -5007,8 +4608,8 @@
         </p:nvSpPr>
         <p:spPr>
           <a:xfrm>
-            <a:off x="1177429" y="2356103"/>
-            <a:ext cx="1680348" cy="518159"/>
+            <a:off x="457200" y="2874262"/>
+            <a:ext cx="7046475" cy="518159"/>
           </a:xfrm>
           <a:prstGeom prst="rect">
             <a:avLst/>
@@ -5025,11 +4626,11 @@
             <a:r>
               <a:rPr sz="3400" b="0" i="0">
                 <a:solidFill>
-                  <a:srgbClr val="DCDCAA"/>
-                </a:solidFill>
-                <a:latin typeface="Arial"/>
-              </a:rPr>
-              <a:t>main</a:t>
+                  <a:srgbClr val="FFFFFF"/>
+                </a:solidFill>
+                <a:latin typeface="Arial"/>
+              </a:rPr>
+              <a:t>    print("Hello, world!")</a:t>
             </a:r>
           </a:p>
         </p:txBody>
@@ -5044,8 +4645,8 @@
         </p:nvSpPr>
         <p:spPr>
           <a:xfrm>
-            <a:off x="2113347" y="2356103"/>
-            <a:ext cx="834964" cy="518159"/>
+            <a:off x="457200" y="3910580"/>
+            <a:ext cx="2140486" cy="518159"/>
           </a:xfrm>
           <a:prstGeom prst="rect">
             <a:avLst/>
@@ -5062,11 +4663,11 @@
             <a:r>
               <a:rPr sz="3400" b="0" i="0">
                 <a:solidFill>
-                  <a:srgbClr val="D4D4D4"/>
-                </a:solidFill>
-                <a:latin typeface="Arial"/>
-              </a:rPr>
-              <a:t>():</a:t>
+                  <a:srgbClr val="FFFFFF"/>
+                </a:solidFill>
+                <a:latin typeface="Arial"/>
+              </a:rPr>
+              <a:t>main()</a:t>
             </a:r>
           </a:p>
         </p:txBody>
@@ -5077,265 +4678,6 @@
           <p:cNvSpPr/>
           <p:nvPr>
             <p:ph type="body" idx="13"/>
-          </p:nvPr>
-        </p:nvSpPr>
-        <p:spPr>
-          <a:xfrm>
-            <a:off x="457200" y="2874262"/>
-            <a:ext cx="662751" cy="518159"/>
-          </a:xfrm>
-          <a:prstGeom prst="rect">
-            <a:avLst/>
-          </a:prstGeom>
-          <a:noFill/>
-        </p:spPr>
-        <p:txBody>
-          <a:bodyPr wrap="none" lIns="0" rIns="0">
-            <a:noAutofit/>
-          </a:bodyPr>
-          <a:lstStyle/>
-          <a:p>
-            <a:pPr algn="l"/>
-            <a:r>
-              <a:rPr sz="3400" b="0" i="0">
-                <a:solidFill>
-                  <a:srgbClr val="D4D4D4"/>
-                </a:solidFill>
-                <a:latin typeface="Arial"/>
-              </a:rPr>
-              <a:t>    </a:t>
-            </a:r>
-          </a:p>
-        </p:txBody>
-      </p:sp>
-      <p:sp>
-        <p:nvSpPr>
-          <p:cNvPr id="15" name="TextBox 14"/>
-          <p:cNvSpPr/>
-          <p:nvPr>
-            <p:ph type="body" idx="14"/>
-          </p:nvPr>
-        </p:nvSpPr>
-        <p:spPr>
-          <a:xfrm>
-            <a:off x="937071" y="2874262"/>
-            <a:ext cx="1526857" cy="518159"/>
-          </a:xfrm>
-          <a:prstGeom prst="rect">
-            <a:avLst/>
-          </a:prstGeom>
-          <a:noFill/>
-        </p:spPr>
-        <p:txBody>
-          <a:bodyPr wrap="none" lIns="0" rIns="0">
-            <a:noAutofit/>
-          </a:bodyPr>
-          <a:lstStyle/>
-          <a:p>
-            <a:pPr algn="l"/>
-            <a:r>
-              <a:rPr sz="3400" b="0" i="0">
-                <a:solidFill>
-                  <a:srgbClr val="DCDCAA"/>
-                </a:solidFill>
-                <a:latin typeface="Arial"/>
-              </a:rPr>
-              <a:t>print</a:t>
-            </a:r>
-          </a:p>
-        </p:txBody>
-      </p:sp>
-      <p:sp>
-        <p:nvSpPr>
-          <p:cNvPr id="16" name="TextBox 15"/>
-          <p:cNvSpPr/>
-          <p:nvPr>
-            <p:ph type="body" idx="15"/>
-          </p:nvPr>
-        </p:nvSpPr>
-        <p:spPr>
-          <a:xfrm>
-            <a:off x="1777057" y="2874262"/>
-            <a:ext cx="412948" cy="518159"/>
-          </a:xfrm>
-          <a:prstGeom prst="rect">
-            <a:avLst/>
-          </a:prstGeom>
-          <a:noFill/>
-        </p:spPr>
-        <p:txBody>
-          <a:bodyPr wrap="none" lIns="0" rIns="0">
-            <a:noAutofit/>
-          </a:bodyPr>
-          <a:lstStyle/>
-          <a:p>
-            <a:pPr algn="l"/>
-            <a:r>
-              <a:rPr sz="3400" b="0" i="0">
-                <a:solidFill>
-                  <a:srgbClr val="D4D4D4"/>
-                </a:solidFill>
-                <a:latin typeface="Arial"/>
-              </a:rPr>
-              <a:t>(</a:t>
-            </a:r>
-          </a:p>
-        </p:txBody>
-      </p:sp>
-      <p:sp>
-        <p:nvSpPr>
-          <p:cNvPr id="17" name="TextBox 16"/>
-          <p:cNvSpPr/>
-          <p:nvPr>
-            <p:ph type="body" idx="16"/>
-          </p:nvPr>
-        </p:nvSpPr>
-        <p:spPr>
-          <a:xfrm>
-            <a:off x="1920850" y="2874262"/>
-            <a:ext cx="4474566" cy="518159"/>
-          </a:xfrm>
-          <a:prstGeom prst="rect">
-            <a:avLst/>
-          </a:prstGeom>
-          <a:noFill/>
-        </p:spPr>
-        <p:txBody>
-          <a:bodyPr wrap="none" lIns="0" rIns="0">
-            <a:noAutofit/>
-          </a:bodyPr>
-          <a:lstStyle/>
-          <a:p>
-            <a:pPr algn="l"/>
-            <a:r>
-              <a:rPr sz="3400" b="0" i="0">
-                <a:solidFill>
-                  <a:srgbClr val="CE9178"/>
-                </a:solidFill>
-                <a:latin typeface="Arial"/>
-              </a:rPr>
-              <a:t>"Hello, world!"</a:t>
-            </a:r>
-          </a:p>
-        </p:txBody>
-      </p:sp>
-      <p:sp>
-        <p:nvSpPr>
-          <p:cNvPr id="18" name="TextBox 17"/>
-          <p:cNvSpPr/>
-          <p:nvPr>
-            <p:ph type="body" idx="17"/>
-          </p:nvPr>
-        </p:nvSpPr>
-        <p:spPr>
-          <a:xfrm>
-            <a:off x="4603155" y="2874262"/>
-            <a:ext cx="412948" cy="518159"/>
-          </a:xfrm>
-          <a:prstGeom prst="rect">
-            <a:avLst/>
-          </a:prstGeom>
-          <a:noFill/>
-        </p:spPr>
-        <p:txBody>
-          <a:bodyPr wrap="none" lIns="0" rIns="0">
-            <a:noAutofit/>
-          </a:bodyPr>
-          <a:lstStyle/>
-          <a:p>
-            <a:pPr algn="l"/>
-            <a:r>
-              <a:rPr sz="3400" b="0" i="0">
-                <a:solidFill>
-                  <a:srgbClr val="D4D4D4"/>
-                </a:solidFill>
-                <a:latin typeface="Arial"/>
-              </a:rPr>
-              <a:t>)</a:t>
-            </a:r>
-          </a:p>
-        </p:txBody>
-      </p:sp>
-      <p:sp>
-        <p:nvSpPr>
-          <p:cNvPr id="19" name="TextBox 18"/>
-          <p:cNvSpPr/>
-          <p:nvPr>
-            <p:ph type="body" idx="18"/>
-          </p:nvPr>
-        </p:nvSpPr>
-        <p:spPr>
-          <a:xfrm>
-            <a:off x="457200" y="3910580"/>
-            <a:ext cx="1680348" cy="518159"/>
-          </a:xfrm>
-          <a:prstGeom prst="rect">
-            <a:avLst/>
-          </a:prstGeom>
-          <a:noFill/>
-        </p:spPr>
-        <p:txBody>
-          <a:bodyPr wrap="none" lIns="0" rIns="0">
-            <a:noAutofit/>
-          </a:bodyPr>
-          <a:lstStyle/>
-          <a:p>
-            <a:pPr algn="l"/>
-            <a:r>
-              <a:rPr sz="3400" b="0" i="0">
-                <a:solidFill>
-                  <a:srgbClr val="DCDCAA"/>
-                </a:solidFill>
-                <a:latin typeface="Arial"/>
-              </a:rPr>
-              <a:t>main</a:t>
-            </a:r>
-          </a:p>
-        </p:txBody>
-      </p:sp>
-      <p:sp>
-        <p:nvSpPr>
-          <p:cNvPr id="20" name="TextBox 19"/>
-          <p:cNvSpPr/>
-          <p:nvPr>
-            <p:ph type="body" idx="19"/>
-          </p:nvPr>
-        </p:nvSpPr>
-        <p:spPr>
-          <a:xfrm>
-            <a:off x="1393118" y="3910580"/>
-            <a:ext cx="643017" cy="518159"/>
-          </a:xfrm>
-          <a:prstGeom prst="rect">
-            <a:avLst/>
-          </a:prstGeom>
-          <a:noFill/>
-        </p:spPr>
-        <p:txBody>
-          <a:bodyPr wrap="none" lIns="0" rIns="0">
-            <a:noAutofit/>
-          </a:bodyPr>
-          <a:lstStyle/>
-          <a:p>
-            <a:pPr algn="l"/>
-            <a:r>
-              <a:rPr sz="3400" b="0" i="0">
-                <a:solidFill>
-                  <a:srgbClr val="D4D4D4"/>
-                </a:solidFill>
-                <a:latin typeface="Arial"/>
-              </a:rPr>
-              <a:t>()</a:t>
-            </a:r>
-          </a:p>
-        </p:txBody>
-      </p:sp>
-      <p:sp>
-        <p:nvSpPr>
-          <p:cNvPr id="21" name="TextBox 20"/>
-          <p:cNvSpPr/>
-          <p:nvPr>
-            <p:ph type="body" idx="20"/>
           </p:nvPr>
         </p:nvSpPr>
         <p:spPr>
@@ -5358,7 +4700,7 @@
             <a:r>
               <a:rPr sz="3400" b="0" i="0">
                 <a:solidFill>
-                  <a:srgbClr val="4EC9B0"/>
+                  <a:srgbClr val="569CD6"/>
                 </a:solidFill>
                 <a:latin typeface="Arial"/>
               </a:rPr>
@@ -5369,10 +4711,10 @@
       </p:sp>
       <p:sp>
         <p:nvSpPr>
-          <p:cNvPr id="22" name="TextBox 21"/>
-          <p:cNvSpPr/>
-          <p:nvPr>
-            <p:ph type="body" idx="21"/>
+          <p:cNvPr id="15" name="TextBox 14"/>
+          <p:cNvSpPr/>
+          <p:nvPr>
+            <p:ph type="body" idx="14"/>
           </p:nvPr>
         </p:nvSpPr>
         <p:spPr>
@@ -5395,7 +4737,7 @@
             <a:r>
               <a:rPr sz="3400" b="0" i="0">
                 <a:solidFill>
-                  <a:srgbClr val="D4D4D4"/>
+                  <a:srgbClr val="FFFFFF"/>
                 </a:solidFill>
                 <a:latin typeface="Arial"/>
               </a:rPr>
@@ -5406,10 +4748,10 @@
       </p:sp>
       <p:sp>
         <p:nvSpPr>
-          <p:cNvPr id="23" name="TextBox 22"/>
-          <p:cNvSpPr/>
-          <p:nvPr>
-            <p:ph type="body" idx="22"/>
+          <p:cNvPr id="16" name="TextBox 15"/>
+          <p:cNvSpPr/>
+          <p:nvPr>
+            <p:ph type="body" idx="15"/>
           </p:nvPr>
         </p:nvSpPr>
         <p:spPr>
@@ -5432,7 +4774,7 @@
             <a:r>
               <a:rPr sz="3400" b="0" i="0">
                 <a:solidFill>
-                  <a:srgbClr val="D4D4D4"/>
+                  <a:srgbClr val="FFFFFF"/>
                 </a:solidFill>
                 <a:latin typeface="Arial"/>
               </a:rPr>
@@ -5454,7 +4796,7 @@
 </p:sldLayout>
 </file>
 
-<file path=ppt/slideLayouts/slideLayout27.xml><?xml version="1.0" encoding="utf-8"?>
+<file path=ppt/slideLayouts/slideLayout26.xml><?xml version="1.0" encoding="utf-8"?>
 <p:sldLayout xmlns:a="http://schemas.openxmlformats.org/drawingml/2006/main" xmlns:r="http://schemas.openxmlformats.org/officeDocument/2006/relationships" xmlns:p="http://schemas.openxmlformats.org/presentationml/2006/main" type="blank" preserve="1">
   <p:cSld name="slidekit · File Tree">
     <p:bg>
@@ -5491,8 +4833,8 @@
         </p:nvSpPr>
         <p:spPr>
           <a:xfrm>
-            <a:off x="10363200" y="6035040"/>
-            <a:ext cx="1371600" cy="365760"/>
+            <a:off x="11186160" y="6035040"/>
+            <a:ext cx="548640" cy="365760"/>
           </a:xfrm>
         </p:spPr>
         <p:txBody>
@@ -5535,7 +4877,7 @@
             <a:r>
               <a:rPr sz="4200" b="1" i="0">
                 <a:solidFill>
-                  <a:srgbClr val="262625"/>
+                  <a:srgbClr val="D97757"/>
                 </a:solidFill>
                 <a:latin typeface="Arial"/>
               </a:rPr>
@@ -5563,7 +4905,7 @@
             </a:avLst>
           </a:prstGeom>
           <a:solidFill>
-            <a:srgbClr val="0C1A1C"/>
+            <a:srgbClr val="191919"/>
           </a:solidFill>
           <a:ln>
             <a:noFill/>
@@ -5606,7 +4948,7 @@
             <a:r>
               <a:rPr sz="2600" b="1" i="0">
                 <a:solidFill>
-                  <a:srgbClr val="569CD6"/>
+                  <a:srgbClr val="D97757"/>
                 </a:solidFill>
                 <a:latin typeface="Courier New"/>
               </a:rPr>
@@ -5643,7 +4985,7 @@
             <a:r>
               <a:rPr sz="2600" b="0" i="0">
                 <a:solidFill>
-                  <a:srgbClr val="55707A"/>
+                  <a:srgbClr val="D97757"/>
                 </a:solidFill>
                 <a:latin typeface="Courier New"/>
               </a:rPr>
@@ -5680,7 +5022,7 @@
             <a:r>
               <a:rPr sz="2600" b="1" i="0">
                 <a:solidFill>
-                  <a:srgbClr val="569CD6"/>
+                  <a:srgbClr val="D97757"/>
                 </a:solidFill>
                 <a:latin typeface="Courier New"/>
               </a:rPr>
@@ -5717,7 +5059,7 @@
             <a:r>
               <a:rPr sz="2600" b="0" i="0">
                 <a:solidFill>
-                  <a:srgbClr val="55707A"/>
+                  <a:srgbClr val="D97757"/>
                 </a:solidFill>
                 <a:latin typeface="Courier New"/>
               </a:rPr>
@@ -5754,7 +5096,7 @@
             <a:r>
               <a:rPr sz="2600" b="1" i="0">
                 <a:solidFill>
-                  <a:srgbClr val="569CD6"/>
+                  <a:srgbClr val="D97757"/>
                 </a:solidFill>
                 <a:latin typeface="Courier New"/>
               </a:rPr>
@@ -5791,7 +5133,7 @@
             <a:r>
               <a:rPr sz="2600" b="0" i="0">
                 <a:solidFill>
-                  <a:srgbClr val="55707A"/>
+                  <a:srgbClr val="D97757"/>
                 </a:solidFill>
                 <a:latin typeface="Courier New"/>
               </a:rPr>
@@ -5828,7 +5170,7 @@
             <a:r>
               <a:rPr sz="2600" b="0" i="0">
                 <a:solidFill>
-                  <a:srgbClr val="D4D4D4"/>
+                  <a:srgbClr val="F0EEE6"/>
                 </a:solidFill>
                 <a:latin typeface="Courier New"/>
               </a:rPr>
@@ -5865,7 +5207,7 @@
             <a:r>
               <a:rPr sz="2600" b="0" i="0">
                 <a:solidFill>
-                  <a:srgbClr val="55707A"/>
+                  <a:srgbClr val="D97757"/>
                 </a:solidFill>
                 <a:latin typeface="Courier New"/>
               </a:rPr>
@@ -5902,7 +5244,7 @@
             <a:r>
               <a:rPr sz="2600" b="0" i="0">
                 <a:solidFill>
-                  <a:srgbClr val="D4D4D4"/>
+                  <a:srgbClr val="F0EEE6"/>
                 </a:solidFill>
                 <a:latin typeface="Courier New"/>
               </a:rPr>
@@ -5939,7 +5281,7 @@
             <a:r>
               <a:rPr sz="2600" b="0" i="0">
                 <a:solidFill>
-                  <a:srgbClr val="55707A"/>
+                  <a:srgbClr val="D97757"/>
                 </a:solidFill>
                 <a:latin typeface="Courier New"/>
               </a:rPr>
@@ -5976,7 +5318,7 @@
             <a:r>
               <a:rPr sz="2600" b="0" i="0">
                 <a:solidFill>
-                  <a:srgbClr val="D4D4D4"/>
+                  <a:srgbClr val="F0EEE6"/>
                 </a:solidFill>
                 <a:latin typeface="Courier New"/>
               </a:rPr>
@@ -6013,7 +5355,7 @@
             <a:r>
               <a:rPr sz="2600" b="0" i="0">
                 <a:solidFill>
-                  <a:srgbClr val="55707A"/>
+                  <a:srgbClr val="D97757"/>
                 </a:solidFill>
                 <a:latin typeface="Courier New"/>
               </a:rPr>
@@ -6050,7 +5392,7 @@
             <a:r>
               <a:rPr sz="2600" b="0" i="0">
                 <a:solidFill>
-                  <a:srgbClr val="D4D4D4"/>
+                  <a:srgbClr val="F0EEE6"/>
                 </a:solidFill>
                 <a:latin typeface="Courier New"/>
               </a:rPr>
@@ -6087,7 +5429,7 @@
             <a:r>
               <a:rPr sz="2600" b="0" i="0">
                 <a:solidFill>
-                  <a:srgbClr val="55707A"/>
+                  <a:srgbClr val="D97757"/>
                 </a:solidFill>
                 <a:latin typeface="Courier New"/>
               </a:rPr>
@@ -6124,7 +5466,7 @@
             <a:r>
               <a:rPr sz="2600" b="0" i="0">
                 <a:solidFill>
-                  <a:srgbClr val="D4D4D4"/>
+                  <a:srgbClr val="F0EEE6"/>
                 </a:solidFill>
                 <a:latin typeface="Courier New"/>
               </a:rPr>
@@ -6146,7 +5488,7 @@
 </p:sldLayout>
 </file>
 
-<file path=ppt/slideLayouts/slideLayout28.xml><?xml version="1.0" encoding="utf-8"?>
+<file path=ppt/slideLayouts/slideLayout27.xml><?xml version="1.0" encoding="utf-8"?>
 <p:sldLayout xmlns:a="http://schemas.openxmlformats.org/drawingml/2006/main" xmlns:r="http://schemas.openxmlformats.org/officeDocument/2006/relationships" xmlns:p="http://schemas.openxmlformats.org/presentationml/2006/main" type="blank" preserve="1">
   <p:cSld name="slidekit · Numbered Steps">
     <p:bg>
@@ -6183,8 +5525,8 @@
         </p:nvSpPr>
         <p:spPr>
           <a:xfrm>
-            <a:off x="10363200" y="6035040"/>
-            <a:ext cx="1371600" cy="365760"/>
+            <a:off x="11186160" y="6035040"/>
+            <a:ext cx="548640" cy="365760"/>
           </a:xfrm>
         </p:spPr>
         <p:txBody>
@@ -6227,7 +5569,7 @@
             <a:r>
               <a:rPr sz="4200" b="1" i="0">
                 <a:solidFill>
-                  <a:srgbClr val="191919"/>
+                  <a:srgbClr val="D97757"/>
                 </a:solidFill>
                 <a:latin typeface="Arial"/>
               </a:rPr>
@@ -6264,7 +5606,7 @@
             <a:r>
               <a:rPr sz="4200" b="1" i="0">
                 <a:solidFill>
-                  <a:srgbClr val="262625"/>
+                  <a:srgbClr val="D97757"/>
                 </a:solidFill>
                 <a:latin typeface="Arial"/>
               </a:rPr>
@@ -6301,7 +5643,7 @@
             <a:r>
               <a:rPr sz="4200" b="1" i="0">
                 <a:solidFill>
-                  <a:srgbClr val="262625"/>
+                  <a:srgbClr val="D97757"/>
                 </a:solidFill>
                 <a:latin typeface="Arial"/>
               </a:rPr>
@@ -6375,7 +5717,7 @@
             <a:r>
               <a:rPr sz="4200" b="1" i="0">
                 <a:solidFill>
-                  <a:srgbClr val="262625"/>
+                  <a:srgbClr val="D97757"/>
                 </a:solidFill>
                 <a:latin typeface="Arial"/>
               </a:rPr>
@@ -6412,7 +5754,7 @@
             <a:r>
               <a:rPr sz="4200" b="1" i="0">
                 <a:solidFill>
-                  <a:srgbClr val="262625"/>
+                  <a:srgbClr val="D97757"/>
                 </a:solidFill>
                 <a:latin typeface="Arial"/>
               </a:rPr>
@@ -6486,7 +5828,7 @@
             <a:r>
               <a:rPr sz="4200" b="1" i="0">
                 <a:solidFill>
-                  <a:srgbClr val="262625"/>
+                  <a:srgbClr val="D97757"/>
                 </a:solidFill>
                 <a:latin typeface="Arial"/>
               </a:rPr>
@@ -6523,7 +5865,7 @@
             <a:r>
               <a:rPr sz="4200" b="1" i="0">
                 <a:solidFill>
-                  <a:srgbClr val="262625"/>
+                  <a:srgbClr val="D97757"/>
                 </a:solidFill>
                 <a:latin typeface="Arial"/>
               </a:rPr>
@@ -6582,7 +5924,7 @@
 </p:sldLayout>
 </file>
 
-<file path=ppt/slideLayouts/slideLayout29.xml><?xml version="1.0" encoding="utf-8"?>
+<file path=ppt/slideLayouts/slideLayout28.xml><?xml version="1.0" encoding="utf-8"?>
 <p:sldLayout xmlns:a="http://schemas.openxmlformats.org/drawingml/2006/main" xmlns:r="http://schemas.openxmlformats.org/officeDocument/2006/relationships" xmlns:p="http://schemas.openxmlformats.org/presentationml/2006/main" type="blank" preserve="1">
   <p:cSld name="slidekit · Two Panel List">
     <p:bg>
@@ -6619,8 +5961,8 @@
         </p:nvSpPr>
         <p:spPr>
           <a:xfrm>
-            <a:off x="10363200" y="6035040"/>
-            <a:ext cx="1371600" cy="365760"/>
+            <a:off x="11186160" y="6035040"/>
+            <a:ext cx="548640" cy="365760"/>
           </a:xfrm>
         </p:spPr>
         <p:txBody>
@@ -6663,7 +6005,7 @@
             <a:r>
               <a:rPr sz="4200" b="1" i="0">
                 <a:solidFill>
-                  <a:srgbClr val="262625"/>
+                  <a:srgbClr val="D97757"/>
                 </a:solidFill>
                 <a:latin typeface="Arial"/>
               </a:rPr>
@@ -6700,7 +6042,7 @@
             <a:r>
               <a:rPr sz="3400" b="1" i="0">
                 <a:solidFill>
-                  <a:srgbClr val="262625"/>
+                  <a:srgbClr val="D97757"/>
                 </a:solidFill>
                 <a:latin typeface="Arial"/>
               </a:rPr>
@@ -6719,14 +6061,14 @@
         </p:nvSpPr>
         <p:spPr>
           <a:xfrm>
-            <a:off x="548640" y="2176271"/>
-            <a:ext cx="1650492" cy="54864"/>
+            <a:off x="457200" y="2176271"/>
+            <a:ext cx="1367718" cy="54864"/>
           </a:xfrm>
           <a:prstGeom prst="rect">
             <a:avLst/>
           </a:prstGeom>
           <a:solidFill>
-            <a:srgbClr val="262625"/>
+            <a:srgbClr val="D97757"/>
           </a:solidFill>
           <a:ln>
             <a:noFill/>
@@ -6769,7 +6111,7 @@
             <a:r>
               <a:rPr sz="3400" b="1" i="0">
                 <a:solidFill>
-                  <a:srgbClr val="6C6A64"/>
+                  <a:srgbClr val="191919"/>
                 </a:solidFill>
                 <a:latin typeface="Arial"/>
               </a:rPr>
@@ -6788,14 +6130,14 @@
         </p:nvSpPr>
         <p:spPr>
           <a:xfrm>
-            <a:off x="6324600" y="2176271"/>
-            <a:ext cx="1650492" cy="54864"/>
+            <a:off x="6233160" y="2176271"/>
+            <a:ext cx="1007604" cy="54864"/>
           </a:xfrm>
           <a:prstGeom prst="rect">
             <a:avLst/>
           </a:prstGeom>
           <a:solidFill>
-            <a:srgbClr val="6C6A64"/>
+            <a:srgbClr val="191919"/>
           </a:solidFill>
           <a:ln>
             <a:noFill/>
@@ -7028,6 +6370,294 @@
                 <a:latin typeface="Arial"/>
               </a:rPr>
               <a:t>In-product live chat</a:t>
+            </a:r>
+          </a:p>
+        </p:txBody>
+      </p:sp>
+    </p:spTree>
+    <p:extLst>
+      <p:ext uri="{BB962C8B-B14F-4D97-AF65-F5344CB8AC3E}">
+        <p14:creationId xmlns:p14="http://schemas.microsoft.com/office/powerpoint/2010/main" val="1212999818"/>
+      </p:ext>
+    </p:extLst>
+  </p:cSld>
+  <p:clrMapOvr>
+    <a:masterClrMapping/>
+  </p:clrMapOvr>
+</p:sldLayout>
+</file>
+
+<file path=ppt/slideLayouts/slideLayout29.xml><?xml version="1.0" encoding="utf-8"?>
+<p:sldLayout xmlns:a="http://schemas.openxmlformats.org/drawingml/2006/main" xmlns:r="http://schemas.openxmlformats.org/officeDocument/2006/relationships" xmlns:p="http://schemas.openxmlformats.org/presentationml/2006/main" type="blank" preserve="1">
+  <p:cSld name="slidekit · This vs That">
+    <p:bg>
+      <p:bgPr>
+        <a:solidFill>
+          <a:srgbClr val="F0EEE6"/>
+        </a:solidFill>
+        <a:effectLst/>
+      </p:bgPr>
+    </p:bg>
+    <p:spTree>
+      <p:nvGrpSpPr>
+        <p:cNvPr id="1" name=""/>
+        <p:cNvGrpSpPr/>
+        <p:nvPr/>
+      </p:nvGrpSpPr>
+      <p:grpSpPr>
+        <a:xfrm>
+          <a:off x="0" y="0"/>
+          <a:ext cx="0" cy="0"/>
+          <a:chOff x="0" y="0"/>
+          <a:chExt cx="0" cy="0"/>
+        </a:xfrm>
+      </p:grpSpPr>
+      <p:sp>
+        <p:nvSpPr>
+          <p:cNvPr id="4" name="Slide Number Placeholder 3"/>
+          <p:cNvSpPr>
+            <a:spLocks noGrp="1"/>
+          </p:cNvSpPr>
+          <p:nvPr>
+            <p:ph type="sldNum" sz="quarter" idx="12"/>
+          </p:nvPr>
+        </p:nvSpPr>
+        <p:spPr>
+          <a:xfrm>
+            <a:off x="11186160" y="6035040"/>
+            <a:ext cx="548640" cy="365760"/>
+          </a:xfrm>
+        </p:spPr>
+        <p:txBody>
+          <a:bodyPr/>
+          <a:lstStyle/>
+          <a:p>
+            <a:fld id="{C1FF6DA9-008F-8B48-92A6-B652298478BF}" type="slidenum">
+              <a:rPr lang="en-US" smtClean="0"/>
+              <a:t>‹#›</a:t>
+            </a:fld>
+            <a:endParaRPr lang="en-US"/>
+          </a:p>
+        </p:txBody>
+      </p:sp>
+      <p:sp>
+        <p:nvSpPr>
+          <p:cNvPr id="5" name="TextBox 4"/>
+          <p:cNvSpPr/>
+          <p:nvPr>
+            <p:ph type="title"/>
+          </p:nvPr>
+        </p:nvSpPr>
+        <p:spPr>
+          <a:xfrm>
+            <a:off x="457200" y="457200"/>
+            <a:ext cx="11277600" cy="768096"/>
+          </a:xfrm>
+          <a:prstGeom prst="rect">
+            <a:avLst/>
+          </a:prstGeom>
+          <a:noFill/>
+        </p:spPr>
+        <p:txBody>
+          <a:bodyPr wrap="none" lIns="0" rIns="0">
+            <a:noAutofit/>
+          </a:bodyPr>
+          <a:lstStyle/>
+          <a:p>
+            <a:pPr algn="l"/>
+            <a:r>
+              <a:rPr sz="4200" b="1" i="0">
+                <a:solidFill>
+                  <a:srgbClr val="D97757"/>
+                </a:solidFill>
+                <a:latin typeface="Arial"/>
+              </a:rPr>
+              <a:t>Cloud or On-Prem</a:t>
+            </a:r>
+          </a:p>
+        </p:txBody>
+      </p:sp>
+      <p:sp>
+        <p:nvSpPr>
+          <p:cNvPr id="6" name="TextBox 5"/>
+          <p:cNvSpPr/>
+          <p:nvPr>
+            <p:ph type="body" idx="1"/>
+          </p:nvPr>
+        </p:nvSpPr>
+        <p:spPr>
+          <a:xfrm>
+            <a:off x="457200" y="2776728"/>
+            <a:ext cx="4792980" cy="914400"/>
+          </a:xfrm>
+          <a:prstGeom prst="rect">
+            <a:avLst/>
+          </a:prstGeom>
+          <a:noFill/>
+        </p:spPr>
+        <p:txBody>
+          <a:bodyPr wrap="none" lIns="0" rIns="0">
+            <a:noAutofit/>
+          </a:bodyPr>
+          <a:lstStyle/>
+          <a:p>
+            <a:pPr algn="ctr"/>
+            <a:r>
+              <a:rPr sz="6000" b="1" i="0">
+                <a:solidFill>
+                  <a:srgbClr val="191919"/>
+                </a:solidFill>
+                <a:latin typeface="Arial"/>
+              </a:rPr>
+              <a:t>3 wks</a:t>
+            </a:r>
+          </a:p>
+        </p:txBody>
+      </p:sp>
+      <p:sp>
+        <p:nvSpPr>
+          <p:cNvPr id="7" name="TextBox 6"/>
+          <p:cNvSpPr/>
+          <p:nvPr>
+            <p:ph type="body" idx="2"/>
+          </p:nvPr>
+        </p:nvSpPr>
+        <p:spPr>
+          <a:xfrm>
+            <a:off x="0" y="3965448"/>
+            <a:ext cx="5707380" cy="518159"/>
+          </a:xfrm>
+          <a:prstGeom prst="rect">
+            <a:avLst/>
+          </a:prstGeom>
+          <a:noFill/>
+        </p:spPr>
+        <p:txBody>
+          <a:bodyPr wrap="none" lIns="0" rIns="0">
+            <a:noAutofit/>
+          </a:bodyPr>
+          <a:lstStyle/>
+          <a:p>
+            <a:pPr algn="ctr"/>
+            <a:r>
+              <a:rPr sz="3400" b="0" i="0">
+                <a:solidFill>
+                  <a:srgbClr val="191919"/>
+                </a:solidFill>
+                <a:latin typeface="Arial"/>
+              </a:rPr>
+              <a:t>Cloud time-to-launch</a:t>
+            </a:r>
+          </a:p>
+        </p:txBody>
+      </p:sp>
+      <p:sp>
+        <p:nvSpPr>
+          <p:cNvPr id="8" name="TextBox 7"/>
+          <p:cNvSpPr/>
+          <p:nvPr>
+            <p:ph type="body" idx="3"/>
+          </p:nvPr>
+        </p:nvSpPr>
+        <p:spPr>
+          <a:xfrm>
+            <a:off x="6941820" y="2776728"/>
+            <a:ext cx="4792980" cy="914400"/>
+          </a:xfrm>
+          <a:prstGeom prst="rect">
+            <a:avLst/>
+          </a:prstGeom>
+          <a:noFill/>
+        </p:spPr>
+        <p:txBody>
+          <a:bodyPr wrap="none" lIns="0" rIns="0">
+            <a:noAutofit/>
+          </a:bodyPr>
+          <a:lstStyle/>
+          <a:p>
+            <a:pPr algn="ctr"/>
+            <a:r>
+              <a:rPr sz="6000" b="1" i="0">
+                <a:solidFill>
+                  <a:srgbClr val="191919"/>
+                </a:solidFill>
+                <a:latin typeface="Arial"/>
+              </a:rPr>
+              <a:t>6 mo</a:t>
+            </a:r>
+          </a:p>
+        </p:txBody>
+      </p:sp>
+      <p:sp>
+        <p:nvSpPr>
+          <p:cNvPr id="9" name="TextBox 8"/>
+          <p:cNvSpPr/>
+          <p:nvPr>
+            <p:ph type="body" idx="4"/>
+          </p:nvPr>
+        </p:nvSpPr>
+        <p:spPr>
+          <a:xfrm>
+            <a:off x="6484620" y="3965448"/>
+            <a:ext cx="5707380" cy="518159"/>
+          </a:xfrm>
+          <a:prstGeom prst="rect">
+            <a:avLst/>
+          </a:prstGeom>
+          <a:noFill/>
+        </p:spPr>
+        <p:txBody>
+          <a:bodyPr wrap="none" lIns="0" rIns="0">
+            <a:noAutofit/>
+          </a:bodyPr>
+          <a:lstStyle/>
+          <a:p>
+            <a:pPr algn="ctr"/>
+            <a:r>
+              <a:rPr sz="3400" b="0" i="0">
+                <a:solidFill>
+                  <a:srgbClr val="191919"/>
+                </a:solidFill>
+                <a:latin typeface="Arial"/>
+              </a:rPr>
+              <a:t>On-prem time-to-launch</a:t>
+            </a:r>
+          </a:p>
+        </p:txBody>
+      </p:sp>
+      <p:sp>
+        <p:nvSpPr>
+          <p:cNvPr id="10" name="TextBox 9"/>
+          <p:cNvSpPr/>
+          <p:nvPr>
+            <p:ph type="body" idx="5"/>
+          </p:nvPr>
+        </p:nvSpPr>
+        <p:spPr>
+          <a:xfrm>
+            <a:off x="5435323" y="3310127"/>
+            <a:ext cx="1321354" cy="640080"/>
+          </a:xfrm>
+          <a:prstGeom prst="rect">
+            <a:avLst/>
+          </a:prstGeom>
+          <a:noFill/>
+        </p:spPr>
+        <p:txBody>
+          <a:bodyPr wrap="none" lIns="0" rIns="0">
+            <a:noAutofit/>
+          </a:bodyPr>
+          <a:lstStyle/>
+          <a:p>
+            <a:pPr algn="ctr"/>
+            <a:r>
+              <a:rPr sz="4200" b="1" i="0">
+                <a:solidFill>
+                  <a:srgbClr val="191919"/>
+                </a:solidFill>
+                <a:latin typeface="Arial"/>
+              </a:rPr>
+              <a:t>VS</a:t>
             </a:r>
           </a:p>
         </p:txBody>
@@ -7293,294 +6923,6 @@
 
 <file path=ppt/slideLayouts/slideLayout30.xml><?xml version="1.0" encoding="utf-8"?>
 <p:sldLayout xmlns:a="http://schemas.openxmlformats.org/drawingml/2006/main" xmlns:r="http://schemas.openxmlformats.org/officeDocument/2006/relationships" xmlns:p="http://schemas.openxmlformats.org/presentationml/2006/main" type="blank" preserve="1">
-  <p:cSld name="slidekit · This vs That">
-    <p:bg>
-      <p:bgPr>
-        <a:solidFill>
-          <a:srgbClr val="F0EEE6"/>
-        </a:solidFill>
-        <a:effectLst/>
-      </p:bgPr>
-    </p:bg>
-    <p:spTree>
-      <p:nvGrpSpPr>
-        <p:cNvPr id="1" name=""/>
-        <p:cNvGrpSpPr/>
-        <p:nvPr/>
-      </p:nvGrpSpPr>
-      <p:grpSpPr>
-        <a:xfrm>
-          <a:off x="0" y="0"/>
-          <a:ext cx="0" cy="0"/>
-          <a:chOff x="0" y="0"/>
-          <a:chExt cx="0" cy="0"/>
-        </a:xfrm>
-      </p:grpSpPr>
-      <p:sp>
-        <p:nvSpPr>
-          <p:cNvPr id="4" name="Slide Number Placeholder 3"/>
-          <p:cNvSpPr>
-            <a:spLocks noGrp="1"/>
-          </p:cNvSpPr>
-          <p:nvPr>
-            <p:ph type="sldNum" sz="quarter" idx="12"/>
-          </p:nvPr>
-        </p:nvSpPr>
-        <p:spPr>
-          <a:xfrm>
-            <a:off x="10363200" y="6035040"/>
-            <a:ext cx="1371600" cy="365760"/>
-          </a:xfrm>
-        </p:spPr>
-        <p:txBody>
-          <a:bodyPr/>
-          <a:lstStyle/>
-          <a:p>
-            <a:fld id="{C1FF6DA9-008F-8B48-92A6-B652298478BF}" type="slidenum">
-              <a:rPr lang="en-US" smtClean="0"/>
-              <a:t>‹#›</a:t>
-            </a:fld>
-            <a:endParaRPr lang="en-US"/>
-          </a:p>
-        </p:txBody>
-      </p:sp>
-      <p:sp>
-        <p:nvSpPr>
-          <p:cNvPr id="5" name="TextBox 4"/>
-          <p:cNvSpPr/>
-          <p:nvPr>
-            <p:ph type="title"/>
-          </p:nvPr>
-        </p:nvSpPr>
-        <p:spPr>
-          <a:xfrm>
-            <a:off x="457200" y="457200"/>
-            <a:ext cx="11277600" cy="768096"/>
-          </a:xfrm>
-          <a:prstGeom prst="rect">
-            <a:avLst/>
-          </a:prstGeom>
-          <a:noFill/>
-        </p:spPr>
-        <p:txBody>
-          <a:bodyPr wrap="none" lIns="0" rIns="0">
-            <a:noAutofit/>
-          </a:bodyPr>
-          <a:lstStyle/>
-          <a:p>
-            <a:pPr algn="l"/>
-            <a:r>
-              <a:rPr sz="4200" b="1" i="0">
-                <a:solidFill>
-                  <a:srgbClr val="262625"/>
-                </a:solidFill>
-                <a:latin typeface="Arial"/>
-              </a:rPr>
-              <a:t>Cloud or On-Prem</a:t>
-            </a:r>
-          </a:p>
-        </p:txBody>
-      </p:sp>
-      <p:sp>
-        <p:nvSpPr>
-          <p:cNvPr id="6" name="TextBox 5"/>
-          <p:cNvSpPr/>
-          <p:nvPr>
-            <p:ph type="body" idx="1"/>
-          </p:nvPr>
-        </p:nvSpPr>
-        <p:spPr>
-          <a:xfrm>
-            <a:off x="457200" y="2776728"/>
-            <a:ext cx="4792980" cy="914400"/>
-          </a:xfrm>
-          <a:prstGeom prst="rect">
-            <a:avLst/>
-          </a:prstGeom>
-          <a:noFill/>
-        </p:spPr>
-        <p:txBody>
-          <a:bodyPr wrap="none" lIns="0" rIns="0">
-            <a:noAutofit/>
-          </a:bodyPr>
-          <a:lstStyle/>
-          <a:p>
-            <a:pPr algn="ctr"/>
-            <a:r>
-              <a:rPr sz="6000" b="1" i="0">
-                <a:solidFill>
-                  <a:srgbClr val="191919"/>
-                </a:solidFill>
-                <a:latin typeface="Arial"/>
-              </a:rPr>
-              <a:t>3 wks</a:t>
-            </a:r>
-          </a:p>
-        </p:txBody>
-      </p:sp>
-      <p:sp>
-        <p:nvSpPr>
-          <p:cNvPr id="7" name="TextBox 6"/>
-          <p:cNvSpPr/>
-          <p:nvPr>
-            <p:ph type="body" idx="2"/>
-          </p:nvPr>
-        </p:nvSpPr>
-        <p:spPr>
-          <a:xfrm>
-            <a:off x="0" y="3965448"/>
-            <a:ext cx="5707380" cy="518159"/>
-          </a:xfrm>
-          <a:prstGeom prst="rect">
-            <a:avLst/>
-          </a:prstGeom>
-          <a:noFill/>
-        </p:spPr>
-        <p:txBody>
-          <a:bodyPr wrap="none" lIns="0" rIns="0">
-            <a:noAutofit/>
-          </a:bodyPr>
-          <a:lstStyle/>
-          <a:p>
-            <a:pPr algn="ctr"/>
-            <a:r>
-              <a:rPr sz="3400" b="0" i="0">
-                <a:solidFill>
-                  <a:srgbClr val="191919"/>
-                </a:solidFill>
-                <a:latin typeface="Arial"/>
-              </a:rPr>
-              <a:t>Cloud time-to-launch</a:t>
-            </a:r>
-          </a:p>
-        </p:txBody>
-      </p:sp>
-      <p:sp>
-        <p:nvSpPr>
-          <p:cNvPr id="8" name="TextBox 7"/>
-          <p:cNvSpPr/>
-          <p:nvPr>
-            <p:ph type="body" idx="3"/>
-          </p:nvPr>
-        </p:nvSpPr>
-        <p:spPr>
-          <a:xfrm>
-            <a:off x="6941820" y="2776728"/>
-            <a:ext cx="4792980" cy="914400"/>
-          </a:xfrm>
-          <a:prstGeom prst="rect">
-            <a:avLst/>
-          </a:prstGeom>
-          <a:noFill/>
-        </p:spPr>
-        <p:txBody>
-          <a:bodyPr wrap="none" lIns="0" rIns="0">
-            <a:noAutofit/>
-          </a:bodyPr>
-          <a:lstStyle/>
-          <a:p>
-            <a:pPr algn="ctr"/>
-            <a:r>
-              <a:rPr sz="6000" b="1" i="0">
-                <a:solidFill>
-                  <a:srgbClr val="191919"/>
-                </a:solidFill>
-                <a:latin typeface="Arial"/>
-              </a:rPr>
-              <a:t>6 mo</a:t>
-            </a:r>
-          </a:p>
-        </p:txBody>
-      </p:sp>
-      <p:sp>
-        <p:nvSpPr>
-          <p:cNvPr id="9" name="TextBox 8"/>
-          <p:cNvSpPr/>
-          <p:nvPr>
-            <p:ph type="body" idx="4"/>
-          </p:nvPr>
-        </p:nvSpPr>
-        <p:spPr>
-          <a:xfrm>
-            <a:off x="6484620" y="3965448"/>
-            <a:ext cx="5707380" cy="518159"/>
-          </a:xfrm>
-          <a:prstGeom prst="rect">
-            <a:avLst/>
-          </a:prstGeom>
-          <a:noFill/>
-        </p:spPr>
-        <p:txBody>
-          <a:bodyPr wrap="none" lIns="0" rIns="0">
-            <a:noAutofit/>
-          </a:bodyPr>
-          <a:lstStyle/>
-          <a:p>
-            <a:pPr algn="ctr"/>
-            <a:r>
-              <a:rPr sz="3400" b="0" i="0">
-                <a:solidFill>
-                  <a:srgbClr val="191919"/>
-                </a:solidFill>
-                <a:latin typeface="Arial"/>
-              </a:rPr>
-              <a:t>On-prem time-to-launch</a:t>
-            </a:r>
-          </a:p>
-        </p:txBody>
-      </p:sp>
-      <p:sp>
-        <p:nvSpPr>
-          <p:cNvPr id="10" name="TextBox 9"/>
-          <p:cNvSpPr/>
-          <p:nvPr>
-            <p:ph type="body" idx="5"/>
-          </p:nvPr>
-        </p:nvSpPr>
-        <p:spPr>
-          <a:xfrm>
-            <a:off x="5435323" y="3310127"/>
-            <a:ext cx="1321354" cy="640080"/>
-          </a:xfrm>
-          <a:prstGeom prst="rect">
-            <a:avLst/>
-          </a:prstGeom>
-          <a:noFill/>
-        </p:spPr>
-        <p:txBody>
-          <a:bodyPr wrap="none" lIns="0" rIns="0">
-            <a:noAutofit/>
-          </a:bodyPr>
-          <a:lstStyle/>
-          <a:p>
-            <a:pPr algn="ctr"/>
-            <a:r>
-              <a:rPr sz="4200" b="1" i="0">
-                <a:solidFill>
-                  <a:srgbClr val="6C6A64"/>
-                </a:solidFill>
-                <a:latin typeface="Arial"/>
-              </a:rPr>
-              <a:t>VS</a:t>
-            </a:r>
-          </a:p>
-        </p:txBody>
-      </p:sp>
-    </p:spTree>
-    <p:extLst>
-      <p:ext uri="{BB962C8B-B14F-4D97-AF65-F5344CB8AC3E}">
-        <p14:creationId xmlns:p14="http://schemas.microsoft.com/office/powerpoint/2010/main" val="1212999818"/>
-      </p:ext>
-    </p:extLst>
-  </p:cSld>
-  <p:clrMapOvr>
-    <a:masterClrMapping/>
-  </p:clrMapOvr>
-</p:sldLayout>
-</file>
-
-<file path=ppt/slideLayouts/slideLayout31.xml><?xml version="1.0" encoding="utf-8"?>
-<p:sldLayout xmlns:a="http://schemas.openxmlformats.org/drawingml/2006/main" xmlns:r="http://schemas.openxmlformats.org/officeDocument/2006/relationships" xmlns:p="http://schemas.openxmlformats.org/presentationml/2006/main" type="blank" preserve="1">
   <p:cSld name="slidekit · KPI Grid">
     <p:bg>
       <p:bgPr>
@@ -7616,8 +6958,8 @@
         </p:nvSpPr>
         <p:spPr>
           <a:xfrm>
-            <a:off x="10363200" y="6035040"/>
-            <a:ext cx="1371600" cy="365760"/>
+            <a:off x="11186160" y="6035040"/>
+            <a:ext cx="548640" cy="365760"/>
           </a:xfrm>
         </p:spPr>
         <p:txBody>
@@ -7660,7 +7002,7 @@
             <a:r>
               <a:rPr sz="4200" b="1" i="0">
                 <a:solidFill>
-                  <a:srgbClr val="262625"/>
+                  <a:srgbClr val="D97757"/>
                 </a:solidFill>
                 <a:latin typeface="Arial"/>
               </a:rPr>
@@ -8103,7 +7445,7 @@
         </p:nvSpPr>
         <p:spPr>
           <a:xfrm>
-            <a:off x="4307840" y="3797808"/>
+            <a:off x="4307840" y="4056888"/>
             <a:ext cx="3576320" cy="640080"/>
           </a:xfrm>
           <a:prstGeom prst="rect">
@@ -8140,7 +7482,7 @@
         </p:nvSpPr>
         <p:spPr>
           <a:xfrm>
-            <a:off x="5559552" y="4492752"/>
+            <a:off x="5559552" y="4751832"/>
             <a:ext cx="1072896" cy="54864"/>
           </a:xfrm>
           <a:prstGeom prst="rect">
@@ -8172,16 +7514,16 @@
         </p:nvSpPr>
         <p:spPr>
           <a:xfrm>
-            <a:off x="4307840" y="4602480"/>
-            <a:ext cx="3576320" cy="1127760"/>
-          </a:xfrm>
-          <a:prstGeom prst="rect">
-            <a:avLst/>
-          </a:prstGeom>
-          <a:noFill/>
-        </p:spPr>
-        <p:txBody>
-          <a:bodyPr wrap="square" lIns="0" rIns="0">
+            <a:off x="3943896" y="4861560"/>
+            <a:ext cx="4304208" cy="609600"/>
+          </a:xfrm>
+          <a:prstGeom prst="rect">
+            <a:avLst/>
+          </a:prstGeom>
+          <a:noFill/>
+        </p:spPr>
+        <p:txBody>
+          <a:bodyPr wrap="none" lIns="0" rIns="0">
             <a:noAutofit/>
           </a:bodyPr>
           <a:lstStyle/>
@@ -8194,7 +7536,7 @@
                 </a:solidFill>
                 <a:latin typeface="Arial"/>
               </a:rPr>
-              <a:t>Avg. time to value</a:t>
+              <a:t>Time to value</a:t>
             </a:r>
           </a:p>
         </p:txBody>
@@ -8318,7 +7660,7 @@
 </p:sldLayout>
 </file>
 
-<file path=ppt/slideLayouts/slideLayout32.xml><?xml version="1.0" encoding="utf-8"?>
+<file path=ppt/slideLayouts/slideLayout31.xml><?xml version="1.0" encoding="utf-8"?>
 <p:sldLayout xmlns:a="http://schemas.openxmlformats.org/drawingml/2006/main" xmlns:r="http://schemas.openxmlformats.org/officeDocument/2006/relationships" xmlns:p="http://schemas.openxmlformats.org/presentationml/2006/main" type="blank" preserve="1">
   <p:cSld name="slidekit · Chart With Insight">
     <p:bg>
@@ -8355,8 +7697,8 @@
         </p:nvSpPr>
         <p:spPr>
           <a:xfrm>
-            <a:off x="10363200" y="6035040"/>
-            <a:ext cx="1371600" cy="365760"/>
+            <a:off x="11186160" y="6035040"/>
+            <a:ext cx="548640" cy="365760"/>
           </a:xfrm>
         </p:spPr>
         <p:txBody>
@@ -8399,7 +7741,7 @@
             <a:r>
               <a:rPr sz="4200" b="1" i="0">
                 <a:solidFill>
-                  <a:srgbClr val="262625"/>
+                  <a:srgbClr val="D97757"/>
                 </a:solidFill>
                 <a:latin typeface="Arial"/>
               </a:rPr>
@@ -8505,7 +7847,7 @@
             <a:r>
               <a:rPr sz="2500" b="0" i="0">
                 <a:solidFill>
-                  <a:srgbClr val="6C6A64"/>
+                  <a:srgbClr val="191919"/>
                 </a:solidFill>
                 <a:latin typeface="Arial"/>
               </a:rPr>
@@ -8611,7 +7953,7 @@
             <a:r>
               <a:rPr sz="2500" b="0" i="0">
                 <a:solidFill>
-                  <a:srgbClr val="6C6A64"/>
+                  <a:srgbClr val="191919"/>
                 </a:solidFill>
                 <a:latin typeface="Arial"/>
               </a:rPr>
@@ -8717,7 +8059,7 @@
             <a:r>
               <a:rPr sz="2500" b="0" i="0">
                 <a:solidFill>
-                  <a:srgbClr val="6C6A64"/>
+                  <a:srgbClr val="191919"/>
                 </a:solidFill>
                 <a:latin typeface="Arial"/>
               </a:rPr>
@@ -8823,7 +8165,7 @@
             <a:r>
               <a:rPr sz="2500" b="0" i="0">
                 <a:solidFill>
-                  <a:srgbClr val="6C6A64"/>
+                  <a:srgbClr val="191919"/>
                 </a:solidFill>
                 <a:latin typeface="Arial"/>
               </a:rPr>
@@ -8842,8 +8184,8 @@
         </p:nvSpPr>
         <p:spPr>
           <a:xfrm>
-            <a:off x="7498080" y="1770888"/>
-            <a:ext cx="128016" cy="3718560"/>
+            <a:off x="7498080" y="3325368"/>
+            <a:ext cx="128016" cy="609600"/>
           </a:xfrm>
           <a:prstGeom prst="rect">
             <a:avLst/>
@@ -8874,16 +8216,16 @@
         </p:nvSpPr>
         <p:spPr>
           <a:xfrm>
-            <a:off x="8037576" y="1770888"/>
-            <a:ext cx="3697224" cy="3718560"/>
-          </a:xfrm>
-          <a:prstGeom prst="rect">
-            <a:avLst/>
-          </a:prstGeom>
-          <a:noFill/>
-        </p:spPr>
-        <p:txBody>
-          <a:bodyPr wrap="square" lIns="0" rIns="0">
+            <a:off x="8037576" y="3325368"/>
+            <a:ext cx="4154424" cy="609600"/>
+          </a:xfrm>
+          <a:prstGeom prst="rect">
+            <a:avLst/>
+          </a:prstGeom>
+          <a:noFill/>
+        </p:spPr>
+        <p:txBody>
+          <a:bodyPr wrap="none" lIns="0" rIns="0">
             <a:noAutofit/>
           </a:bodyPr>
           <a:lstStyle/>
@@ -8896,7 +8238,7 @@
                 </a:solidFill>
                 <a:latin typeface="Arial"/>
               </a:rPr>
-              <a:t>Activations nearly quadrupled once self-serve onboarding shipped in February.</a:t>
+              <a:t>Activations 4x.</a:t>
             </a:r>
           </a:p>
         </p:txBody>
@@ -8914,7 +8256,7 @@
 </p:sldLayout>
 </file>
 
-<file path=ppt/slideLayouts/slideLayout33.xml><?xml version="1.0" encoding="utf-8"?>
+<file path=ppt/slideLayouts/slideLayout32.xml><?xml version="1.0" encoding="utf-8"?>
 <p:sldLayout xmlns:a="http://schemas.openxmlformats.org/drawingml/2006/main" xmlns:r="http://schemas.openxmlformats.org/officeDocument/2006/relationships" xmlns:p="http://schemas.openxmlformats.org/presentationml/2006/main" type="blank" preserve="1">
   <p:cSld name="slidekit · Table">
     <p:bg>
@@ -8951,8 +8293,8 @@
         </p:nvSpPr>
         <p:spPr>
           <a:xfrm>
-            <a:off x="10363200" y="6035040"/>
-            <a:ext cx="1371600" cy="365760"/>
+            <a:off x="11186160" y="6035040"/>
+            <a:ext cx="548640" cy="365760"/>
           </a:xfrm>
         </p:spPr>
         <p:txBody>
@@ -8995,7 +8337,7 @@
             <a:r>
               <a:rPr sz="4200" b="1" i="0">
                 <a:solidFill>
-                  <a:srgbClr val="262625"/>
+                  <a:srgbClr val="D97757"/>
                 </a:solidFill>
                 <a:latin typeface="Arial"/>
               </a:rPr>
@@ -9032,7 +8374,7 @@
             <a:r>
               <a:rPr sz="3400" b="1" i="0">
                 <a:solidFill>
-                  <a:srgbClr val="262625"/>
+                  <a:srgbClr val="D97757"/>
                 </a:solidFill>
                 <a:latin typeface="Arial"/>
               </a:rPr>
@@ -9069,7 +8411,7 @@
             <a:r>
               <a:rPr sz="3400" b="1" i="0">
                 <a:solidFill>
-                  <a:srgbClr val="262625"/>
+                  <a:srgbClr val="D97757"/>
                 </a:solidFill>
                 <a:latin typeface="Arial"/>
               </a:rPr>
@@ -9106,7 +8448,7 @@
             <a:r>
               <a:rPr sz="3400" b="1" i="0">
                 <a:solidFill>
-                  <a:srgbClr val="262625"/>
+                  <a:srgbClr val="D97757"/>
                 </a:solidFill>
                 <a:latin typeface="Arial"/>
               </a:rPr>
@@ -9604,7 +8946,7 @@
 </p:sldLayout>
 </file>
 
-<file path=ppt/slideLayouts/slideLayout34.xml><?xml version="1.0" encoding="utf-8"?>
+<file path=ppt/slideLayouts/slideLayout33.xml><?xml version="1.0" encoding="utf-8"?>
 <p:sldLayout xmlns:a="http://schemas.openxmlformats.org/drawingml/2006/main" xmlns:r="http://schemas.openxmlformats.org/officeDocument/2006/relationships" xmlns:p="http://schemas.openxmlformats.org/presentationml/2006/main" type="blank" preserve="1">
   <p:cSld name="slidekit · Metric Comparison">
     <p:bg>
@@ -9641,8 +8983,8 @@
         </p:nvSpPr>
         <p:spPr>
           <a:xfrm>
-            <a:off x="10363200" y="6035040"/>
-            <a:ext cx="1371600" cy="365760"/>
+            <a:off x="11186160" y="6035040"/>
+            <a:ext cx="548640" cy="365760"/>
           </a:xfrm>
         </p:spPr>
         <p:txBody>
@@ -9685,7 +9027,7 @@
             <a:r>
               <a:rPr sz="4200" b="1" i="0">
                 <a:solidFill>
-                  <a:srgbClr val="262625"/>
+                  <a:srgbClr val="D97757"/>
                 </a:solidFill>
                 <a:latin typeface="Arial"/>
               </a:rPr>
@@ -9704,7 +9046,7 @@
         </p:nvSpPr>
         <p:spPr>
           <a:xfrm>
-            <a:off x="457200" y="2075688"/>
+            <a:off x="457200" y="2334768"/>
             <a:ext cx="3576320" cy="914400"/>
           </a:xfrm>
           <a:prstGeom prst="rect">
@@ -9741,16 +9083,16 @@
         </p:nvSpPr>
         <p:spPr>
           <a:xfrm>
-            <a:off x="457200" y="3264408"/>
-            <a:ext cx="3576320" cy="1127760"/>
-          </a:xfrm>
-          <a:prstGeom prst="rect">
-            <a:avLst/>
-          </a:prstGeom>
-          <a:noFill/>
-        </p:spPr>
-        <p:txBody>
-          <a:bodyPr wrap="square" lIns="0" rIns="0">
+            <a:off x="457200" y="3523488"/>
+            <a:ext cx="3576320" cy="609600"/>
+          </a:xfrm>
+          <a:prstGeom prst="rect">
+            <a:avLst/>
+          </a:prstGeom>
+          <a:noFill/>
+        </p:spPr>
+        <p:txBody>
+          <a:bodyPr wrap="none" lIns="0" rIns="0">
             <a:noAutofit/>
           </a:bodyPr>
           <a:lstStyle/>
@@ -9763,7 +9105,7 @@
                 </a:solidFill>
                 <a:latin typeface="Arial"/>
               </a:rPr>
-              <a:t>Annual recurring revenue</a:t>
+              <a:t>Revenue</a:t>
             </a:r>
           </a:p>
         </p:txBody>
@@ -9778,7 +9120,7 @@
         </p:nvSpPr>
         <p:spPr>
           <a:xfrm>
-            <a:off x="1522569" y="4666488"/>
+            <a:off x="1522569" y="4407408"/>
             <a:ext cx="1445581" cy="518159"/>
           </a:xfrm>
           <a:prstGeom prst="rect">
@@ -9810,7 +9152,7 @@
         </p:nvSpPr>
         <p:spPr>
           <a:xfrm>
-            <a:off x="1260802" y="4666488"/>
+            <a:off x="1260802" y="4407408"/>
             <a:ext cx="1969115" cy="518159"/>
           </a:xfrm>
           <a:prstGeom prst="rect">
@@ -9847,7 +9189,7 @@
         </p:nvSpPr>
         <p:spPr>
           <a:xfrm>
-            <a:off x="4307840" y="2075688"/>
+            <a:off x="4307840" y="2334768"/>
             <a:ext cx="3576320" cy="914400"/>
           </a:xfrm>
           <a:prstGeom prst="rect">
@@ -9884,8 +9226,8 @@
         </p:nvSpPr>
         <p:spPr>
           <a:xfrm>
-            <a:off x="3834934" y="3264408"/>
-            <a:ext cx="4522132" cy="1127760"/>
+            <a:off x="3834934" y="3523488"/>
+            <a:ext cx="4522132" cy="609600"/>
           </a:xfrm>
           <a:prstGeom prst="rect">
             <a:avLst/>
@@ -9921,7 +9263,7 @@
         </p:nvSpPr>
         <p:spPr>
           <a:xfrm>
-            <a:off x="5175547" y="4666488"/>
+            <a:off x="5175547" y="4407408"/>
             <a:ext cx="1840906" cy="518159"/>
           </a:xfrm>
           <a:prstGeom prst="rect">
@@ -9953,7 +9295,7 @@
         </p:nvSpPr>
         <p:spPr>
           <a:xfrm>
-            <a:off x="4795183" y="4666488"/>
+            <a:off x="4795183" y="4407408"/>
             <a:ext cx="2601634" cy="518159"/>
           </a:xfrm>
           <a:prstGeom prst="rect">
@@ -9990,7 +9332,7 @@
         </p:nvSpPr>
         <p:spPr>
           <a:xfrm>
-            <a:off x="8158480" y="2075688"/>
+            <a:off x="8158480" y="2334768"/>
             <a:ext cx="3576320" cy="914400"/>
           </a:xfrm>
           <a:prstGeom prst="rect">
@@ -10027,16 +9369,16 @@
         </p:nvSpPr>
         <p:spPr>
           <a:xfrm>
-            <a:off x="8158480" y="3264408"/>
-            <a:ext cx="3576320" cy="1127760"/>
-          </a:xfrm>
-          <a:prstGeom prst="rect">
-            <a:avLst/>
-          </a:prstGeom>
-          <a:noFill/>
-        </p:spPr>
-        <p:txBody>
-          <a:bodyPr wrap="square" lIns="0" rIns="0">
+            <a:off x="7701280" y="3523488"/>
+            <a:ext cx="4490720" cy="609600"/>
+          </a:xfrm>
+          <a:prstGeom prst="rect">
+            <a:avLst/>
+          </a:prstGeom>
+          <a:noFill/>
+        </p:spPr>
+        <p:txBody>
+          <a:bodyPr wrap="none" lIns="0" rIns="0">
             <a:noAutofit/>
           </a:bodyPr>
           <a:lstStyle/>
@@ -10049,7 +9391,7 @@
                 </a:solidFill>
                 <a:latin typeface="Arial"/>
               </a:rPr>
-              <a:t>Net promoter score</a:t>
+              <a:t>Promoter score</a:t>
             </a:r>
           </a:p>
         </p:txBody>
@@ -10064,7 +9406,7 @@
         </p:nvSpPr>
         <p:spPr>
           <a:xfrm>
-            <a:off x="9427731" y="4666488"/>
+            <a:off x="9427731" y="4407408"/>
             <a:ext cx="1037817" cy="518159"/>
           </a:xfrm>
           <a:prstGeom prst="rect">
@@ -10096,7 +9438,7 @@
         </p:nvSpPr>
         <p:spPr>
           <a:xfrm>
-            <a:off x="9288294" y="4666488"/>
+            <a:off x="9288294" y="4407408"/>
             <a:ext cx="1316691" cy="518159"/>
           </a:xfrm>
           <a:prstGeom prst="rect">
@@ -10136,7 +9478,7 @@
 </p:sldLayout>
 </file>
 
-<file path=ppt/slideLayouts/slideLayout35.xml><?xml version="1.0" encoding="utf-8"?>
+<file path=ppt/slideLayouts/slideLayout34.xml><?xml version="1.0" encoding="utf-8"?>
 <p:sldLayout xmlns:a="http://schemas.openxmlformats.org/drawingml/2006/main" xmlns:r="http://schemas.openxmlformats.org/officeDocument/2006/relationships" xmlns:p="http://schemas.openxmlformats.org/presentationml/2006/main" type="blank" preserve="1">
   <p:cSld name="slidekit · Process Steps">
     <p:bg>
@@ -10173,8 +9515,8 @@
         </p:nvSpPr>
         <p:spPr>
           <a:xfrm>
-            <a:off x="10363200" y="6035040"/>
-            <a:ext cx="1371600" cy="365760"/>
+            <a:off x="11186160" y="6035040"/>
+            <a:ext cx="548640" cy="365760"/>
           </a:xfrm>
         </p:spPr>
         <p:txBody>
@@ -10217,7 +9559,7 @@
             <a:r>
               <a:rPr sz="4200" b="1" i="0">
                 <a:solidFill>
-                  <a:srgbClr val="262625"/>
+                  <a:srgbClr val="D97757"/>
                 </a:solidFill>
                 <a:latin typeface="Arial"/>
               </a:rPr>
@@ -10254,7 +9596,7 @@
             <a:r>
               <a:rPr sz="4200" b="1" i="0">
                 <a:solidFill>
-                  <a:srgbClr val="262625"/>
+                  <a:srgbClr val="D97757"/>
                 </a:solidFill>
                 <a:latin typeface="Arial"/>
               </a:rPr>
@@ -10274,13 +9616,13 @@
         <p:spPr>
           <a:xfrm>
             <a:off x="457200" y="2194560"/>
-            <a:ext cx="784098" cy="54864"/>
+            <a:ext cx="593303" cy="54864"/>
           </a:xfrm>
           <a:prstGeom prst="rect">
             <a:avLst/>
           </a:prstGeom>
           <a:solidFill>
-            <a:srgbClr val="262625"/>
+            <a:srgbClr val="D97757"/>
           </a:solidFill>
           <a:ln>
             <a:noFill/>
@@ -10323,7 +9665,7 @@
             <a:r>
               <a:rPr sz="3400" b="1" i="0">
                 <a:solidFill>
-                  <a:srgbClr val="262625"/>
+                  <a:srgbClr val="D97757"/>
                 </a:solidFill>
                 <a:latin typeface="Arial"/>
               </a:rPr>
@@ -10397,7 +9739,7 @@
             <a:r>
               <a:rPr sz="4200" b="1" i="0">
                 <a:solidFill>
-                  <a:srgbClr val="262625"/>
+                  <a:srgbClr val="D97757"/>
                 </a:solidFill>
                 <a:latin typeface="Arial"/>
               </a:rPr>
@@ -10417,13 +9759,13 @@
         <p:spPr>
           <a:xfrm>
             <a:off x="3345180" y="2194560"/>
-            <a:ext cx="784098" cy="54864"/>
+            <a:ext cx="593303" cy="54864"/>
           </a:xfrm>
           <a:prstGeom prst="rect">
             <a:avLst/>
           </a:prstGeom>
           <a:solidFill>
-            <a:srgbClr val="262625"/>
+            <a:srgbClr val="D97757"/>
           </a:solidFill>
           <a:ln>
             <a:noFill/>
@@ -10466,7 +9808,7 @@
             <a:r>
               <a:rPr sz="3400" b="1" i="0">
                 <a:solidFill>
-                  <a:srgbClr val="262625"/>
+                  <a:srgbClr val="D97757"/>
                 </a:solidFill>
                 <a:latin typeface="Arial"/>
               </a:rPr>
@@ -10540,7 +9882,7 @@
             <a:r>
               <a:rPr sz="4200" b="1" i="0">
                 <a:solidFill>
-                  <a:srgbClr val="262625"/>
+                  <a:srgbClr val="D97757"/>
                 </a:solidFill>
                 <a:latin typeface="Arial"/>
               </a:rPr>
@@ -10560,13 +9902,13 @@
         <p:spPr>
           <a:xfrm>
             <a:off x="6233160" y="2194560"/>
-            <a:ext cx="784098" cy="54864"/>
+            <a:ext cx="593303" cy="54864"/>
           </a:xfrm>
           <a:prstGeom prst="rect">
             <a:avLst/>
           </a:prstGeom>
           <a:solidFill>
-            <a:srgbClr val="262625"/>
+            <a:srgbClr val="D97757"/>
           </a:solidFill>
           <a:ln>
             <a:noFill/>
@@ -10609,7 +9951,7 @@
             <a:r>
               <a:rPr sz="3400" b="1" i="0">
                 <a:solidFill>
-                  <a:srgbClr val="262625"/>
+                  <a:srgbClr val="D97757"/>
                 </a:solidFill>
                 <a:latin typeface="Arial"/>
               </a:rPr>
@@ -10683,7 +10025,7 @@
             <a:r>
               <a:rPr sz="4200" b="1" i="0">
                 <a:solidFill>
-                  <a:srgbClr val="262625"/>
+                  <a:srgbClr val="D97757"/>
                 </a:solidFill>
                 <a:latin typeface="Arial"/>
               </a:rPr>
@@ -10703,13 +10045,13 @@
         <p:spPr>
           <a:xfrm>
             <a:off x="9121140" y="2194560"/>
-            <a:ext cx="784098" cy="54864"/>
+            <a:ext cx="593303" cy="54864"/>
           </a:xfrm>
           <a:prstGeom prst="rect">
             <a:avLst/>
           </a:prstGeom>
           <a:solidFill>
-            <a:srgbClr val="262625"/>
+            <a:srgbClr val="D97757"/>
           </a:solidFill>
           <a:ln>
             <a:noFill/>
@@ -10752,7 +10094,7 @@
             <a:r>
               <a:rPr sz="3400" b="1" i="0">
                 <a:solidFill>
-                  <a:srgbClr val="262625"/>
+                  <a:srgbClr val="D97757"/>
                 </a:solidFill>
                 <a:latin typeface="Arial"/>
               </a:rPr>
@@ -10811,7 +10153,7 @@
 </p:sldLayout>
 </file>
 
-<file path=ppt/slideLayouts/slideLayout36.xml><?xml version="1.0" encoding="utf-8"?>
+<file path=ppt/slideLayouts/slideLayout35.xml><?xml version="1.0" encoding="utf-8"?>
 <p:sldLayout xmlns:a="http://schemas.openxmlformats.org/drawingml/2006/main" xmlns:r="http://schemas.openxmlformats.org/officeDocument/2006/relationships" xmlns:p="http://schemas.openxmlformats.org/presentationml/2006/main" type="blank" preserve="1">
   <p:cSld name="slidekit · Roadmap">
     <p:bg>
@@ -10848,8 +10190,8 @@
         </p:nvSpPr>
         <p:spPr>
           <a:xfrm>
-            <a:off x="10363200" y="6035040"/>
-            <a:ext cx="1371600" cy="365760"/>
+            <a:off x="11186160" y="6035040"/>
+            <a:ext cx="548640" cy="365760"/>
           </a:xfrm>
         </p:spPr>
         <p:txBody>
@@ -10892,7 +10234,7 @@
             <a:r>
               <a:rPr sz="4200" b="1" i="0">
                 <a:solidFill>
-                  <a:srgbClr val="262625"/>
+                  <a:srgbClr val="D97757"/>
                 </a:solidFill>
                 <a:latin typeface="Arial"/>
               </a:rPr>
@@ -11343,7 +10685,7 @@
 </p:sldLayout>
 </file>
 
-<file path=ppt/slideLayouts/slideLayout37.xml><?xml version="1.0" encoding="utf-8"?>
+<file path=ppt/slideLayouts/slideLayout36.xml><?xml version="1.0" encoding="utf-8"?>
 <p:sldLayout xmlns:a="http://schemas.openxmlformats.org/drawingml/2006/main" xmlns:r="http://schemas.openxmlformats.org/officeDocument/2006/relationships" xmlns:p="http://schemas.openxmlformats.org/presentationml/2006/main" type="blank" preserve="1">
   <p:cSld name="slidekit · Funnel">
     <p:bg>
@@ -11380,8 +10722,8 @@
         </p:nvSpPr>
         <p:spPr>
           <a:xfrm>
-            <a:off x="10363200" y="6035040"/>
-            <a:ext cx="1371600" cy="365760"/>
+            <a:off x="11186160" y="6035040"/>
+            <a:ext cx="548640" cy="365760"/>
           </a:xfrm>
         </p:spPr>
         <p:txBody>
@@ -11424,7 +10766,7 @@
             <a:r>
               <a:rPr sz="4200" b="1" i="0">
                 <a:solidFill>
-                  <a:srgbClr val="262625"/>
+                  <a:srgbClr val="D97757"/>
                 </a:solidFill>
                 <a:latin typeface="Arial"/>
               </a:rPr>
@@ -11722,7 +11064,7 @@
 </p:sldLayout>
 </file>
 
-<file path=ppt/slideLayouts/slideLayout38.xml><?xml version="1.0" encoding="utf-8"?>
+<file path=ppt/slideLayouts/slideLayout37.xml><?xml version="1.0" encoding="utf-8"?>
 <p:sldLayout xmlns:a="http://schemas.openxmlformats.org/drawingml/2006/main" xmlns:r="http://schemas.openxmlformats.org/officeDocument/2006/relationships" xmlns:p="http://schemas.openxmlformats.org/presentationml/2006/main" type="blank" preserve="1">
   <p:cSld name="slidekit · Nested Circles">
     <p:bg>
@@ -11759,8 +11101,8 @@
         </p:nvSpPr>
         <p:spPr>
           <a:xfrm>
-            <a:off x="10363200" y="6035040"/>
-            <a:ext cx="1371600" cy="365760"/>
+            <a:off x="11186160" y="6035040"/>
+            <a:ext cx="548640" cy="365760"/>
           </a:xfrm>
         </p:spPr>
         <p:txBody>
@@ -11803,7 +11145,7 @@
             <a:r>
               <a:rPr sz="4200" b="1" i="0">
                 <a:solidFill>
-                  <a:srgbClr val="262625"/>
+                  <a:srgbClr val="D97757"/>
                 </a:solidFill>
                 <a:latin typeface="Arial"/>
               </a:rPr>
@@ -11829,7 +11171,7 @@
             <a:avLst/>
           </a:prstGeom>
           <a:solidFill>
-            <a:srgbClr val="6C6A64"/>
+            <a:srgbClr val="191919"/>
           </a:solidFill>
           <a:ln>
             <a:noFill/>
@@ -11893,7 +11235,7 @@
             <a:avLst/>
           </a:prstGeom>
           <a:solidFill>
-            <a:srgbClr val="262625"/>
+            <a:srgbClr val="191919"/>
           </a:solidFill>
           <a:ln>
             <a:noFill/>
@@ -12143,7 +11485,7 @@
 </p:sldLayout>
 </file>
 
-<file path=ppt/slideLayouts/slideLayout39.xml><?xml version="1.0" encoding="utf-8"?>
+<file path=ppt/slideLayouts/slideLayout38.xml><?xml version="1.0" encoding="utf-8"?>
 <p:sldLayout xmlns:a="http://schemas.openxmlformats.org/drawingml/2006/main" xmlns:r="http://schemas.openxmlformats.org/officeDocument/2006/relationships" xmlns:p="http://schemas.openxmlformats.org/presentationml/2006/main" type="blank" preserve="1">
   <p:cSld name="slidekit · Pyramid">
     <p:bg>
@@ -12180,8 +11522,8 @@
         </p:nvSpPr>
         <p:spPr>
           <a:xfrm>
-            <a:off x="10363200" y="6035040"/>
-            <a:ext cx="1371600" cy="365760"/>
+            <a:off x="11186160" y="6035040"/>
+            <a:ext cx="548640" cy="365760"/>
           </a:xfrm>
         </p:spPr>
         <p:txBody>
@@ -12224,7 +11566,7 @@
             <a:r>
               <a:rPr sz="4200" b="1" i="0">
                 <a:solidFill>
-                  <a:srgbClr val="262625"/>
+                  <a:srgbClr val="D97757"/>
                 </a:solidFill>
                 <a:latin typeface="Arial"/>
               </a:rPr>
@@ -12245,75 +11587,6 @@
           <a:xfrm>
             <a:off x="3840480" y="1499616"/>
             <a:ext cx="4511040" cy="859536"/>
-          </a:xfrm>
-          <a:prstGeom prst="rect">
-            <a:avLst/>
-          </a:prstGeom>
-          <a:solidFill>
-            <a:srgbClr val="262625"/>
-          </a:solidFill>
-          <a:ln>
-            <a:noFill/>
-          </a:ln>
-          <a:effectLst/>
-        </p:spPr>
-        <p:txBody>
-          <a:bodyPr rtlCol="0" anchor="ctr"/>
-          <a:lstStyle/>
-          <a:p>
-            <a:pPr algn="ctr"/>
-          </a:p>
-        </p:txBody>
-      </p:sp>
-      <p:sp>
-        <p:nvSpPr>
-          <p:cNvPr id="7" name="TextBox 6"/>
-          <p:cNvSpPr/>
-          <p:nvPr>
-            <p:ph type="body" idx="2"/>
-          </p:nvPr>
-        </p:nvSpPr>
-        <p:spPr>
-          <a:xfrm>
-            <a:off x="3840480" y="1499616"/>
-            <a:ext cx="4511040" cy="859536"/>
-          </a:xfrm>
-          <a:prstGeom prst="rect">
-            <a:avLst/>
-          </a:prstGeom>
-          <a:noFill/>
-        </p:spPr>
-        <p:txBody>
-          <a:bodyPr wrap="none" lIns="0" rIns="0">
-            <a:noAutofit/>
-          </a:bodyPr>
-          <a:lstStyle/>
-          <a:p>
-            <a:pPr algn="l"/>
-            <a:r>
-              <a:rPr sz="3400" b="1" i="0">
-                <a:solidFill>
-                  <a:srgbClr val="F0EEE6"/>
-                </a:solidFill>
-                <a:latin typeface="Arial"/>
-              </a:rPr>
-              <a:t>Vision</a:t>
-            </a:r>
-          </a:p>
-        </p:txBody>
-      </p:sp>
-      <p:sp>
-        <p:nvSpPr>
-          <p:cNvPr id="8" name="Rectangle 7"/>
-          <p:cNvSpPr/>
-          <p:nvPr>
-            <p:ph type="body" idx="3"/>
-          </p:nvPr>
-        </p:nvSpPr>
-        <p:spPr>
-          <a:xfrm>
-            <a:off x="2712720" y="2633472"/>
-            <a:ext cx="6766560" cy="859536"/>
           </a:xfrm>
           <a:prstGeom prst="rect">
             <a:avLst/>
@@ -12336,122 +11609,53 @@
       </p:sp>
       <p:sp>
         <p:nvSpPr>
-          <p:cNvPr id="9" name="TextBox 8"/>
-          <p:cNvSpPr/>
-          <p:nvPr>
-            <p:ph type="body" idx="4"/>
+          <p:cNvPr id="7" name="TextBox 6"/>
+          <p:cNvSpPr/>
+          <p:nvPr>
+            <p:ph type="body" idx="2"/>
+          </p:nvPr>
+        </p:nvSpPr>
+        <p:spPr>
+          <a:xfrm>
+            <a:off x="3840480" y="1499616"/>
+            <a:ext cx="4511040" cy="859536"/>
+          </a:xfrm>
+          <a:prstGeom prst="rect">
+            <a:avLst/>
+          </a:prstGeom>
+          <a:noFill/>
+        </p:spPr>
+        <p:txBody>
+          <a:bodyPr wrap="none" lIns="0" rIns="0">
+            <a:noAutofit/>
+          </a:bodyPr>
+          <a:lstStyle/>
+          <a:p>
+            <a:pPr algn="l"/>
+            <a:r>
+              <a:rPr sz="3400" b="1" i="0">
+                <a:solidFill>
+                  <a:srgbClr val="F0EEE6"/>
+                </a:solidFill>
+                <a:latin typeface="Arial"/>
+              </a:rPr>
+              <a:t>Vision</a:t>
+            </a:r>
+          </a:p>
+        </p:txBody>
+      </p:sp>
+      <p:sp>
+        <p:nvSpPr>
+          <p:cNvPr id="8" name="Rectangle 7"/>
+          <p:cNvSpPr/>
+          <p:nvPr>
+            <p:ph type="body" idx="3"/>
           </p:nvPr>
         </p:nvSpPr>
         <p:spPr>
           <a:xfrm>
             <a:off x="2712720" y="2633472"/>
             <a:ext cx="6766560" cy="859536"/>
-          </a:xfrm>
-          <a:prstGeom prst="rect">
-            <a:avLst/>
-          </a:prstGeom>
-          <a:noFill/>
-        </p:spPr>
-        <p:txBody>
-          <a:bodyPr wrap="none" lIns="0" rIns="0">
-            <a:noAutofit/>
-          </a:bodyPr>
-          <a:lstStyle/>
-          <a:p>
-            <a:pPr algn="l"/>
-            <a:r>
-              <a:rPr sz="3400" b="1" i="0">
-                <a:solidFill>
-                  <a:srgbClr val="F0EEE6"/>
-                </a:solidFill>
-                <a:latin typeface="Arial"/>
-              </a:rPr>
-              <a:t>Strategy</a:t>
-            </a:r>
-          </a:p>
-        </p:txBody>
-      </p:sp>
-      <p:sp>
-        <p:nvSpPr>
-          <p:cNvPr id="10" name="Rectangle 9"/>
-          <p:cNvSpPr/>
-          <p:nvPr>
-            <p:ph type="body" idx="5"/>
-          </p:nvPr>
-        </p:nvSpPr>
-        <p:spPr>
-          <a:xfrm>
-            <a:off x="1584960" y="3767328"/>
-            <a:ext cx="9022080" cy="859536"/>
-          </a:xfrm>
-          <a:prstGeom prst="rect">
-            <a:avLst/>
-          </a:prstGeom>
-          <a:solidFill>
-            <a:srgbClr val="262625"/>
-          </a:solidFill>
-          <a:ln>
-            <a:noFill/>
-          </a:ln>
-          <a:effectLst/>
-        </p:spPr>
-        <p:txBody>
-          <a:bodyPr rtlCol="0" anchor="ctr"/>
-          <a:lstStyle/>
-          <a:p>
-            <a:pPr algn="ctr"/>
-          </a:p>
-        </p:txBody>
-      </p:sp>
-      <p:sp>
-        <p:nvSpPr>
-          <p:cNvPr id="11" name="TextBox 10"/>
-          <p:cNvSpPr/>
-          <p:nvPr>
-            <p:ph type="body" idx="6"/>
-          </p:nvPr>
-        </p:nvSpPr>
-        <p:spPr>
-          <a:xfrm>
-            <a:off x="1584960" y="3767328"/>
-            <a:ext cx="9022080" cy="859536"/>
-          </a:xfrm>
-          <a:prstGeom prst="rect">
-            <a:avLst/>
-          </a:prstGeom>
-          <a:noFill/>
-        </p:spPr>
-        <p:txBody>
-          <a:bodyPr wrap="none" lIns="0" rIns="0">
-            <a:noAutofit/>
-          </a:bodyPr>
-          <a:lstStyle/>
-          <a:p>
-            <a:pPr algn="l"/>
-            <a:r>
-              <a:rPr sz="3400" b="1" i="0">
-                <a:solidFill>
-                  <a:srgbClr val="F0EEE6"/>
-                </a:solidFill>
-                <a:latin typeface="Arial"/>
-              </a:rPr>
-              <a:t>Goals</a:t>
-            </a:r>
-          </a:p>
-        </p:txBody>
-      </p:sp>
-      <p:sp>
-        <p:nvSpPr>
-          <p:cNvPr id="12" name="Rectangle 11"/>
-          <p:cNvSpPr/>
-          <p:nvPr>
-            <p:ph type="body" idx="7"/>
-          </p:nvPr>
-        </p:nvSpPr>
-        <p:spPr>
-          <a:xfrm>
-            <a:off x="457200" y="4901184"/>
-            <a:ext cx="11277600" cy="859536"/>
           </a:xfrm>
           <a:prstGeom prst="rect">
             <a:avLst/>
@@ -12474,10 +11678,116 @@
       </p:sp>
       <p:sp>
         <p:nvSpPr>
-          <p:cNvPr id="13" name="TextBox 12"/>
-          <p:cNvSpPr/>
-          <p:nvPr>
-            <p:ph type="body" idx="8"/>
+          <p:cNvPr id="9" name="TextBox 8"/>
+          <p:cNvSpPr/>
+          <p:nvPr>
+            <p:ph type="body" idx="4"/>
+          </p:nvPr>
+        </p:nvSpPr>
+        <p:spPr>
+          <a:xfrm>
+            <a:off x="2712720" y="2633472"/>
+            <a:ext cx="6766560" cy="859536"/>
+          </a:xfrm>
+          <a:prstGeom prst="rect">
+            <a:avLst/>
+          </a:prstGeom>
+          <a:noFill/>
+        </p:spPr>
+        <p:txBody>
+          <a:bodyPr wrap="none" lIns="0" rIns="0">
+            <a:noAutofit/>
+          </a:bodyPr>
+          <a:lstStyle/>
+          <a:p>
+            <a:pPr algn="l"/>
+            <a:r>
+              <a:rPr sz="3400" b="1" i="0">
+                <a:solidFill>
+                  <a:srgbClr val="F0EEE6"/>
+                </a:solidFill>
+                <a:latin typeface="Arial"/>
+              </a:rPr>
+              <a:t>Strategy</a:t>
+            </a:r>
+          </a:p>
+        </p:txBody>
+      </p:sp>
+      <p:sp>
+        <p:nvSpPr>
+          <p:cNvPr id="10" name="Rectangle 9"/>
+          <p:cNvSpPr/>
+          <p:nvPr>
+            <p:ph type="body" idx="5"/>
+          </p:nvPr>
+        </p:nvSpPr>
+        <p:spPr>
+          <a:xfrm>
+            <a:off x="1584960" y="3767328"/>
+            <a:ext cx="9022080" cy="859536"/>
+          </a:xfrm>
+          <a:prstGeom prst="rect">
+            <a:avLst/>
+          </a:prstGeom>
+          <a:solidFill>
+            <a:srgbClr val="D97757"/>
+          </a:solidFill>
+          <a:ln>
+            <a:noFill/>
+          </a:ln>
+          <a:effectLst/>
+        </p:spPr>
+        <p:txBody>
+          <a:bodyPr rtlCol="0" anchor="ctr"/>
+          <a:lstStyle/>
+          <a:p>
+            <a:pPr algn="ctr"/>
+          </a:p>
+        </p:txBody>
+      </p:sp>
+      <p:sp>
+        <p:nvSpPr>
+          <p:cNvPr id="11" name="TextBox 10"/>
+          <p:cNvSpPr/>
+          <p:nvPr>
+            <p:ph type="body" idx="6"/>
+          </p:nvPr>
+        </p:nvSpPr>
+        <p:spPr>
+          <a:xfrm>
+            <a:off x="1584960" y="3767328"/>
+            <a:ext cx="9022080" cy="859536"/>
+          </a:xfrm>
+          <a:prstGeom prst="rect">
+            <a:avLst/>
+          </a:prstGeom>
+          <a:noFill/>
+        </p:spPr>
+        <p:txBody>
+          <a:bodyPr wrap="none" lIns="0" rIns="0">
+            <a:noAutofit/>
+          </a:bodyPr>
+          <a:lstStyle/>
+          <a:p>
+            <a:pPr algn="l"/>
+            <a:r>
+              <a:rPr sz="3400" b="1" i="0">
+                <a:solidFill>
+                  <a:srgbClr val="F0EEE6"/>
+                </a:solidFill>
+                <a:latin typeface="Arial"/>
+              </a:rPr>
+              <a:t>Goals</a:t>
+            </a:r>
+          </a:p>
+        </p:txBody>
+      </p:sp>
+      <p:sp>
+        <p:nvSpPr>
+          <p:cNvPr id="12" name="Rectangle 11"/>
+          <p:cNvSpPr/>
+          <p:nvPr>
+            <p:ph type="body" idx="7"/>
           </p:nvPr>
         </p:nvSpPr>
         <p:spPr>
@@ -12488,6 +11798,38 @@
           <a:prstGeom prst="rect">
             <a:avLst/>
           </a:prstGeom>
+          <a:solidFill>
+            <a:srgbClr val="D97757"/>
+          </a:solidFill>
+          <a:ln>
+            <a:noFill/>
+          </a:ln>
+          <a:effectLst/>
+        </p:spPr>
+        <p:txBody>
+          <a:bodyPr rtlCol="0" anchor="ctr"/>
+          <a:lstStyle/>
+          <a:p>
+            <a:pPr algn="ctr"/>
+          </a:p>
+        </p:txBody>
+      </p:sp>
+      <p:sp>
+        <p:nvSpPr>
+          <p:cNvPr id="13" name="TextBox 12"/>
+          <p:cNvSpPr/>
+          <p:nvPr>
+            <p:ph type="body" idx="8"/>
+          </p:nvPr>
+        </p:nvSpPr>
+        <p:spPr>
+          <a:xfrm>
+            <a:off x="457200" y="4901184"/>
+            <a:ext cx="11277600" cy="859536"/>
+          </a:xfrm>
+          <a:prstGeom prst="rect">
+            <a:avLst/>
+          </a:prstGeom>
           <a:noFill/>
         </p:spPr>
         <p:txBody>
@@ -12505,6 +11847,533 @@
                 <a:latin typeface="Arial"/>
               </a:rPr>
               <a:t>Tactics</a:t>
+            </a:r>
+          </a:p>
+        </p:txBody>
+      </p:sp>
+    </p:spTree>
+    <p:extLst>
+      <p:ext uri="{BB962C8B-B14F-4D97-AF65-F5344CB8AC3E}">
+        <p14:creationId xmlns:p14="http://schemas.microsoft.com/office/powerpoint/2010/main" val="1212999818"/>
+      </p:ext>
+    </p:extLst>
+  </p:cSld>
+  <p:clrMapOvr>
+    <a:masterClrMapping/>
+  </p:clrMapOvr>
+</p:sldLayout>
+</file>
+
+<file path=ppt/slideLayouts/slideLayout39.xml><?xml version="1.0" encoding="utf-8"?>
+<p:sldLayout xmlns:a="http://schemas.openxmlformats.org/drawingml/2006/main" xmlns:r="http://schemas.openxmlformats.org/officeDocument/2006/relationships" xmlns:p="http://schemas.openxmlformats.org/presentationml/2006/main" type="blank" preserve="1">
+  <p:cSld name="slidekit · SWOT">
+    <p:bg>
+      <p:bgPr>
+        <a:solidFill>
+          <a:srgbClr val="F0EEE6"/>
+        </a:solidFill>
+        <a:effectLst/>
+      </p:bgPr>
+    </p:bg>
+    <p:spTree>
+      <p:nvGrpSpPr>
+        <p:cNvPr id="1" name=""/>
+        <p:cNvGrpSpPr/>
+        <p:nvPr/>
+      </p:nvGrpSpPr>
+      <p:grpSpPr>
+        <a:xfrm>
+          <a:off x="0" y="0"/>
+          <a:ext cx="0" cy="0"/>
+          <a:chOff x="0" y="0"/>
+          <a:chExt cx="0" cy="0"/>
+        </a:xfrm>
+      </p:grpSpPr>
+      <p:sp>
+        <p:nvSpPr>
+          <p:cNvPr id="4" name="Slide Number Placeholder 3"/>
+          <p:cNvSpPr>
+            <a:spLocks noGrp="1"/>
+          </p:cNvSpPr>
+          <p:nvPr>
+            <p:ph type="sldNum" sz="quarter" idx="12"/>
+          </p:nvPr>
+        </p:nvSpPr>
+        <p:spPr>
+          <a:xfrm>
+            <a:off x="11186160" y="6035040"/>
+            <a:ext cx="548640" cy="365760"/>
+          </a:xfrm>
+        </p:spPr>
+        <p:txBody>
+          <a:bodyPr/>
+          <a:lstStyle/>
+          <a:p>
+            <a:fld id="{C1FF6DA9-008F-8B48-92A6-B652298478BF}" type="slidenum">
+              <a:rPr lang="en-US" smtClean="0"/>
+              <a:t>‹#›</a:t>
+            </a:fld>
+            <a:endParaRPr lang="en-US"/>
+          </a:p>
+        </p:txBody>
+      </p:sp>
+      <p:sp>
+        <p:nvSpPr>
+          <p:cNvPr id="5" name="TextBox 4"/>
+          <p:cNvSpPr/>
+          <p:nvPr>
+            <p:ph type="title"/>
+          </p:nvPr>
+        </p:nvSpPr>
+        <p:spPr>
+          <a:xfrm>
+            <a:off x="457200" y="457200"/>
+            <a:ext cx="11277600" cy="768096"/>
+          </a:xfrm>
+          <a:prstGeom prst="rect">
+            <a:avLst/>
+          </a:prstGeom>
+          <a:noFill/>
+        </p:spPr>
+        <p:txBody>
+          <a:bodyPr wrap="none" lIns="0" rIns="0">
+            <a:noAutofit/>
+          </a:bodyPr>
+          <a:lstStyle/>
+          <a:p>
+            <a:pPr algn="l"/>
+            <a:r>
+              <a:rPr sz="4200" b="1" i="0">
+                <a:solidFill>
+                  <a:srgbClr val="D97757"/>
+                </a:solidFill>
+                <a:latin typeface="Arial"/>
+              </a:rPr>
+              <a:t>SWOT Analysis</a:t>
+            </a:r>
+          </a:p>
+        </p:txBody>
+      </p:sp>
+      <p:sp>
+        <p:nvSpPr>
+          <p:cNvPr id="6" name="TextBox 5"/>
+          <p:cNvSpPr/>
+          <p:nvPr>
+            <p:ph type="body" idx="1"/>
+          </p:nvPr>
+        </p:nvSpPr>
+        <p:spPr>
+          <a:xfrm>
+            <a:off x="457200" y="1499616"/>
+            <a:ext cx="5501640" cy="621791"/>
+          </a:xfrm>
+          <a:prstGeom prst="rect">
+            <a:avLst/>
+          </a:prstGeom>
+          <a:noFill/>
+        </p:spPr>
+        <p:txBody>
+          <a:bodyPr wrap="none" lIns="0" rIns="0">
+            <a:noAutofit/>
+          </a:bodyPr>
+          <a:lstStyle/>
+          <a:p>
+            <a:pPr algn="l"/>
+            <a:r>
+              <a:rPr sz="3400" b="1" i="0">
+                <a:solidFill>
+                  <a:srgbClr val="D97757"/>
+                </a:solidFill>
+                <a:latin typeface="Arial"/>
+              </a:rPr>
+              <a:t>Strengths</a:t>
+            </a:r>
+          </a:p>
+        </p:txBody>
+      </p:sp>
+      <p:sp>
+        <p:nvSpPr>
+          <p:cNvPr id="7" name="Rectangle 6"/>
+          <p:cNvSpPr/>
+          <p:nvPr>
+            <p:ph type="body" idx="2"/>
+          </p:nvPr>
+        </p:nvSpPr>
+        <p:spPr>
+          <a:xfrm>
+            <a:off x="457200" y="2176271"/>
+            <a:ext cx="2015207" cy="54864"/>
+          </a:xfrm>
+          <a:prstGeom prst="rect">
+            <a:avLst/>
+          </a:prstGeom>
+          <a:solidFill>
+            <a:srgbClr val="D97757"/>
+          </a:solidFill>
+          <a:ln>
+            <a:noFill/>
+          </a:ln>
+          <a:effectLst/>
+        </p:spPr>
+        <p:txBody>
+          <a:bodyPr rtlCol="0" anchor="ctr"/>
+          <a:lstStyle/>
+          <a:p>
+            <a:pPr algn="ctr"/>
+          </a:p>
+        </p:txBody>
+      </p:sp>
+      <p:sp>
+        <p:nvSpPr>
+          <p:cNvPr id="8" name="TextBox 7"/>
+          <p:cNvSpPr/>
+          <p:nvPr>
+            <p:ph type="body" idx="3"/>
+          </p:nvPr>
+        </p:nvSpPr>
+        <p:spPr>
+          <a:xfrm>
+            <a:off x="457200" y="2395727"/>
+            <a:ext cx="7863523" cy="609600"/>
+          </a:xfrm>
+          <a:prstGeom prst="rect">
+            <a:avLst/>
+          </a:prstGeom>
+          <a:noFill/>
+        </p:spPr>
+        <p:txBody>
+          <a:bodyPr wrap="none" lIns="0" rIns="0">
+            <a:noAutofit/>
+          </a:bodyPr>
+          <a:lstStyle/>
+          <a:p>
+            <a:pPr algn="l"/>
+            <a:r>
+              <a:rPr sz="3400" b="0" i="0">
+                <a:solidFill>
+                  <a:srgbClr val="191919"/>
+                </a:solidFill>
+                <a:latin typeface="Arial"/>
+              </a:rPr>
+              <a:t>Strong brand, loyal users</a:t>
+            </a:r>
+          </a:p>
+        </p:txBody>
+      </p:sp>
+      <p:sp>
+        <p:nvSpPr>
+          <p:cNvPr id="9" name="TextBox 8"/>
+          <p:cNvSpPr/>
+          <p:nvPr>
+            <p:ph type="body" idx="4"/>
+          </p:nvPr>
+        </p:nvSpPr>
+        <p:spPr>
+          <a:xfrm>
+            <a:off x="6233160" y="1499616"/>
+            <a:ext cx="5501640" cy="621791"/>
+          </a:xfrm>
+          <a:prstGeom prst="rect">
+            <a:avLst/>
+          </a:prstGeom>
+          <a:noFill/>
+        </p:spPr>
+        <p:txBody>
+          <a:bodyPr wrap="none" lIns="0" rIns="0">
+            <a:noAutofit/>
+          </a:bodyPr>
+          <a:lstStyle/>
+          <a:p>
+            <a:pPr algn="l"/>
+            <a:r>
+              <a:rPr sz="3400" b="1" i="0">
+                <a:solidFill>
+                  <a:srgbClr val="191919"/>
+                </a:solidFill>
+                <a:latin typeface="Arial"/>
+              </a:rPr>
+              <a:t>Weaknesses</a:t>
+            </a:r>
+          </a:p>
+        </p:txBody>
+      </p:sp>
+      <p:sp>
+        <p:nvSpPr>
+          <p:cNvPr id="10" name="Rectangle 9"/>
+          <p:cNvSpPr/>
+          <p:nvPr>
+            <p:ph type="body" idx="5"/>
+          </p:nvPr>
+        </p:nvSpPr>
+        <p:spPr>
+          <a:xfrm>
+            <a:off x="6233160" y="2176271"/>
+            <a:ext cx="2584686" cy="54864"/>
+          </a:xfrm>
+          <a:prstGeom prst="rect">
+            <a:avLst/>
+          </a:prstGeom>
+          <a:solidFill>
+            <a:srgbClr val="191919"/>
+          </a:solidFill>
+          <a:ln>
+            <a:noFill/>
+          </a:ln>
+          <a:effectLst/>
+        </p:spPr>
+        <p:txBody>
+          <a:bodyPr rtlCol="0" anchor="ctr"/>
+          <a:lstStyle/>
+          <a:p>
+            <a:pPr algn="ctr"/>
+          </a:p>
+        </p:txBody>
+      </p:sp>
+      <p:sp>
+        <p:nvSpPr>
+          <p:cNvPr id="11" name="TextBox 10"/>
+          <p:cNvSpPr/>
+          <p:nvPr>
+            <p:ph type="body" idx="6"/>
+          </p:nvPr>
+        </p:nvSpPr>
+        <p:spPr>
+          <a:xfrm>
+            <a:off x="6233160" y="2395727"/>
+            <a:ext cx="5958840" cy="609600"/>
+          </a:xfrm>
+          <a:prstGeom prst="rect">
+            <a:avLst/>
+          </a:prstGeom>
+          <a:noFill/>
+        </p:spPr>
+        <p:txBody>
+          <a:bodyPr wrap="none" lIns="0" rIns="0">
+            <a:noAutofit/>
+          </a:bodyPr>
+          <a:lstStyle/>
+          <a:p>
+            <a:pPr algn="l"/>
+            <a:r>
+              <a:rPr sz="3400" b="0" i="0">
+                <a:solidFill>
+                  <a:srgbClr val="191919"/>
+                </a:solidFill>
+                <a:latin typeface="Arial"/>
+              </a:rPr>
+              <a:t>Thin margins, small team</a:t>
+            </a:r>
+          </a:p>
+        </p:txBody>
+      </p:sp>
+      <p:sp>
+        <p:nvSpPr>
+          <p:cNvPr id="12" name="TextBox 11"/>
+          <p:cNvSpPr/>
+          <p:nvPr>
+            <p:ph type="body" idx="7"/>
+          </p:nvPr>
+        </p:nvSpPr>
+        <p:spPr>
+          <a:xfrm>
+            <a:off x="457200" y="3767328"/>
+            <a:ext cx="5501640" cy="621791"/>
+          </a:xfrm>
+          <a:prstGeom prst="rect">
+            <a:avLst/>
+          </a:prstGeom>
+          <a:noFill/>
+        </p:spPr>
+        <p:txBody>
+          <a:bodyPr wrap="none" lIns="0" rIns="0">
+            <a:noAutofit/>
+          </a:bodyPr>
+          <a:lstStyle/>
+          <a:p>
+            <a:pPr algn="l"/>
+            <a:r>
+              <a:rPr sz="3400" b="1" i="0">
+                <a:solidFill>
+                  <a:srgbClr val="D97757"/>
+                </a:solidFill>
+                <a:latin typeface="Arial"/>
+              </a:rPr>
+              <a:t>Opportunities</a:t>
+            </a:r>
+          </a:p>
+        </p:txBody>
+      </p:sp>
+      <p:sp>
+        <p:nvSpPr>
+          <p:cNvPr id="13" name="Rectangle 12"/>
+          <p:cNvSpPr/>
+          <p:nvPr>
+            <p:ph type="body" idx="8"/>
+          </p:nvPr>
+        </p:nvSpPr>
+        <p:spPr>
+          <a:xfrm>
+            <a:off x="457200" y="4443983"/>
+            <a:ext cx="2830525" cy="54864"/>
+          </a:xfrm>
+          <a:prstGeom prst="rect">
+            <a:avLst/>
+          </a:prstGeom>
+          <a:solidFill>
+            <a:srgbClr val="D97757"/>
+          </a:solidFill>
+          <a:ln>
+            <a:noFill/>
+          </a:ln>
+          <a:effectLst/>
+        </p:spPr>
+        <p:txBody>
+          <a:bodyPr rtlCol="0" anchor="ctr"/>
+          <a:lstStyle/>
+          <a:p>
+            <a:pPr algn="ctr"/>
+          </a:p>
+        </p:txBody>
+      </p:sp>
+      <p:sp>
+        <p:nvSpPr>
+          <p:cNvPr id="14" name="TextBox 13"/>
+          <p:cNvSpPr/>
+          <p:nvPr>
+            <p:ph type="body" idx="9"/>
+          </p:nvPr>
+        </p:nvSpPr>
+        <p:spPr>
+          <a:xfrm>
+            <a:off x="457200" y="4663439"/>
+            <a:ext cx="8015326" cy="609600"/>
+          </a:xfrm>
+          <a:prstGeom prst="rect">
+            <a:avLst/>
+          </a:prstGeom>
+          <a:noFill/>
+        </p:spPr>
+        <p:txBody>
+          <a:bodyPr wrap="none" lIns="0" rIns="0">
+            <a:noAutofit/>
+          </a:bodyPr>
+          <a:lstStyle/>
+          <a:p>
+            <a:pPr algn="l"/>
+            <a:r>
+              <a:rPr sz="3400" b="0" i="0">
+                <a:solidFill>
+                  <a:srgbClr val="191919"/>
+                </a:solidFill>
+                <a:latin typeface="Arial"/>
+              </a:rPr>
+              <a:t>New markets via partners</a:t>
+            </a:r>
+          </a:p>
+        </p:txBody>
+      </p:sp>
+      <p:sp>
+        <p:nvSpPr>
+          <p:cNvPr id="15" name="TextBox 14"/>
+          <p:cNvSpPr/>
+          <p:nvPr>
+            <p:ph type="body" idx="13"/>
+          </p:nvPr>
+        </p:nvSpPr>
+        <p:spPr>
+          <a:xfrm>
+            <a:off x="6233160" y="3767328"/>
+            <a:ext cx="5501640" cy="621791"/>
+          </a:xfrm>
+          <a:prstGeom prst="rect">
+            <a:avLst/>
+          </a:prstGeom>
+          <a:noFill/>
+        </p:spPr>
+        <p:txBody>
+          <a:bodyPr wrap="none" lIns="0" rIns="0">
+            <a:noAutofit/>
+          </a:bodyPr>
+          <a:lstStyle/>
+          <a:p>
+            <a:pPr algn="l"/>
+            <a:r>
+              <a:rPr sz="3400" b="1" i="0">
+                <a:solidFill>
+                  <a:srgbClr val="191919"/>
+                </a:solidFill>
+                <a:latin typeface="Arial"/>
+              </a:rPr>
+              <a:t>Threats</a:t>
+            </a:r>
+          </a:p>
+        </p:txBody>
+      </p:sp>
+      <p:sp>
+        <p:nvSpPr>
+          <p:cNvPr id="16" name="Rectangle 15"/>
+          <p:cNvSpPr/>
+          <p:nvPr>
+            <p:ph type="body" idx="14"/>
+          </p:nvPr>
+        </p:nvSpPr>
+        <p:spPr>
+          <a:xfrm>
+            <a:off x="6233160" y="4443983"/>
+            <a:ext cx="1559793" cy="54864"/>
+          </a:xfrm>
+          <a:prstGeom prst="rect">
+            <a:avLst/>
+          </a:prstGeom>
+          <a:solidFill>
+            <a:srgbClr val="191919"/>
+          </a:solidFill>
+          <a:ln>
+            <a:noFill/>
+          </a:ln>
+          <a:effectLst/>
+        </p:spPr>
+        <p:txBody>
+          <a:bodyPr rtlCol="0" anchor="ctr"/>
+          <a:lstStyle/>
+          <a:p>
+            <a:pPr algn="ctr"/>
+          </a:p>
+        </p:txBody>
+      </p:sp>
+      <p:sp>
+        <p:nvSpPr>
+          <p:cNvPr id="17" name="TextBox 16"/>
+          <p:cNvSpPr/>
+          <p:nvPr>
+            <p:ph type="body" idx="15"/>
+          </p:nvPr>
+        </p:nvSpPr>
+        <p:spPr>
+          <a:xfrm>
+            <a:off x="6233160" y="4663439"/>
+            <a:ext cx="5958840" cy="609600"/>
+          </a:xfrm>
+          <a:prstGeom prst="rect">
+            <a:avLst/>
+          </a:prstGeom>
+          <a:noFill/>
+        </p:spPr>
+        <p:txBody>
+          <a:bodyPr wrap="none" lIns="0" rIns="0">
+            <a:noAutofit/>
+          </a:bodyPr>
+          <a:lstStyle/>
+          <a:p>
+            <a:pPr algn="l"/>
+            <a:r>
+              <a:rPr sz="3400" b="0" i="0">
+                <a:solidFill>
+                  <a:srgbClr val="191919"/>
+                </a:solidFill>
+                <a:latin typeface="Arial"/>
+              </a:rPr>
+              <a:t>New entrants cut prices</a:t>
             </a:r>
           </a:p>
         </p:txBody>
@@ -12812,533 +12681,6 @@
 
 <file path=ppt/slideLayouts/slideLayout40.xml><?xml version="1.0" encoding="utf-8"?>
 <p:sldLayout xmlns:a="http://schemas.openxmlformats.org/drawingml/2006/main" xmlns:r="http://schemas.openxmlformats.org/officeDocument/2006/relationships" xmlns:p="http://schemas.openxmlformats.org/presentationml/2006/main" type="blank" preserve="1">
-  <p:cSld name="slidekit · SWOT">
-    <p:bg>
-      <p:bgPr>
-        <a:solidFill>
-          <a:srgbClr val="F0EEE6"/>
-        </a:solidFill>
-        <a:effectLst/>
-      </p:bgPr>
-    </p:bg>
-    <p:spTree>
-      <p:nvGrpSpPr>
-        <p:cNvPr id="1" name=""/>
-        <p:cNvGrpSpPr/>
-        <p:nvPr/>
-      </p:nvGrpSpPr>
-      <p:grpSpPr>
-        <a:xfrm>
-          <a:off x="0" y="0"/>
-          <a:ext cx="0" cy="0"/>
-          <a:chOff x="0" y="0"/>
-          <a:chExt cx="0" cy="0"/>
-        </a:xfrm>
-      </p:grpSpPr>
-      <p:sp>
-        <p:nvSpPr>
-          <p:cNvPr id="4" name="Slide Number Placeholder 3"/>
-          <p:cNvSpPr>
-            <a:spLocks noGrp="1"/>
-          </p:cNvSpPr>
-          <p:nvPr>
-            <p:ph type="sldNum" sz="quarter" idx="12"/>
-          </p:nvPr>
-        </p:nvSpPr>
-        <p:spPr>
-          <a:xfrm>
-            <a:off x="10363200" y="6035040"/>
-            <a:ext cx="1371600" cy="365760"/>
-          </a:xfrm>
-        </p:spPr>
-        <p:txBody>
-          <a:bodyPr/>
-          <a:lstStyle/>
-          <a:p>
-            <a:fld id="{C1FF6DA9-008F-8B48-92A6-B652298478BF}" type="slidenum">
-              <a:rPr lang="en-US" smtClean="0"/>
-              <a:t>‹#›</a:t>
-            </a:fld>
-            <a:endParaRPr lang="en-US"/>
-          </a:p>
-        </p:txBody>
-      </p:sp>
-      <p:sp>
-        <p:nvSpPr>
-          <p:cNvPr id="5" name="TextBox 4"/>
-          <p:cNvSpPr/>
-          <p:nvPr>
-            <p:ph type="title"/>
-          </p:nvPr>
-        </p:nvSpPr>
-        <p:spPr>
-          <a:xfrm>
-            <a:off x="457200" y="457200"/>
-            <a:ext cx="11277600" cy="768096"/>
-          </a:xfrm>
-          <a:prstGeom prst="rect">
-            <a:avLst/>
-          </a:prstGeom>
-          <a:noFill/>
-        </p:spPr>
-        <p:txBody>
-          <a:bodyPr wrap="none" lIns="0" rIns="0">
-            <a:noAutofit/>
-          </a:bodyPr>
-          <a:lstStyle/>
-          <a:p>
-            <a:pPr algn="l"/>
-            <a:r>
-              <a:rPr sz="4200" b="1" i="0">
-                <a:solidFill>
-                  <a:srgbClr val="262625"/>
-                </a:solidFill>
-                <a:latin typeface="Arial"/>
-              </a:rPr>
-              <a:t>SWOT Analysis</a:t>
-            </a:r>
-          </a:p>
-        </p:txBody>
-      </p:sp>
-      <p:sp>
-        <p:nvSpPr>
-          <p:cNvPr id="6" name="TextBox 5"/>
-          <p:cNvSpPr/>
-          <p:nvPr>
-            <p:ph type="body" idx="1"/>
-          </p:nvPr>
-        </p:nvSpPr>
-        <p:spPr>
-          <a:xfrm>
-            <a:off x="457200" y="1499616"/>
-            <a:ext cx="5501640" cy="621791"/>
-          </a:xfrm>
-          <a:prstGeom prst="rect">
-            <a:avLst/>
-          </a:prstGeom>
-          <a:noFill/>
-        </p:spPr>
-        <p:txBody>
-          <a:bodyPr wrap="none" lIns="0" rIns="0">
-            <a:noAutofit/>
-          </a:bodyPr>
-          <a:lstStyle/>
-          <a:p>
-            <a:pPr algn="l"/>
-            <a:r>
-              <a:rPr sz="3400" b="1" i="0">
-                <a:solidFill>
-                  <a:srgbClr val="D97757"/>
-                </a:solidFill>
-                <a:latin typeface="Arial"/>
-              </a:rPr>
-              <a:t>Strengths</a:t>
-            </a:r>
-          </a:p>
-        </p:txBody>
-      </p:sp>
-      <p:sp>
-        <p:nvSpPr>
-          <p:cNvPr id="7" name="Rectangle 6"/>
-          <p:cNvSpPr/>
-          <p:nvPr>
-            <p:ph type="body" idx="2"/>
-          </p:nvPr>
-        </p:nvSpPr>
-        <p:spPr>
-          <a:xfrm>
-            <a:off x="457200" y="2176271"/>
-            <a:ext cx="1650492" cy="54864"/>
-          </a:xfrm>
-          <a:prstGeom prst="rect">
-            <a:avLst/>
-          </a:prstGeom>
-          <a:solidFill>
-            <a:srgbClr val="D97757"/>
-          </a:solidFill>
-          <a:ln>
-            <a:noFill/>
-          </a:ln>
-          <a:effectLst/>
-        </p:spPr>
-        <p:txBody>
-          <a:bodyPr rtlCol="0" anchor="ctr"/>
-          <a:lstStyle/>
-          <a:p>
-            <a:pPr algn="ctr"/>
-          </a:p>
-        </p:txBody>
-      </p:sp>
-      <p:sp>
-        <p:nvSpPr>
-          <p:cNvPr id="8" name="TextBox 7"/>
-          <p:cNvSpPr/>
-          <p:nvPr>
-            <p:ph type="body" idx="3"/>
-          </p:nvPr>
-        </p:nvSpPr>
-        <p:spPr>
-          <a:xfrm>
-            <a:off x="457200" y="2395727"/>
-            <a:ext cx="5501640" cy="1097281"/>
-          </a:xfrm>
-          <a:prstGeom prst="rect">
-            <a:avLst/>
-          </a:prstGeom>
-          <a:noFill/>
-        </p:spPr>
-        <p:txBody>
-          <a:bodyPr wrap="square" lIns="0" rIns="0">
-            <a:noAutofit/>
-          </a:bodyPr>
-          <a:lstStyle/>
-          <a:p>
-            <a:pPr algn="l"/>
-            <a:r>
-              <a:rPr sz="3400" b="0" i="0">
-                <a:solidFill>
-                  <a:srgbClr val="191919"/>
-                </a:solidFill>
-                <a:latin typeface="Arial"/>
-              </a:rPr>
-              <a:t>A strong brand with loyal users</a:t>
-            </a:r>
-          </a:p>
-        </p:txBody>
-      </p:sp>
-      <p:sp>
-        <p:nvSpPr>
-          <p:cNvPr id="9" name="TextBox 8"/>
-          <p:cNvSpPr/>
-          <p:nvPr>
-            <p:ph type="body" idx="4"/>
-          </p:nvPr>
-        </p:nvSpPr>
-        <p:spPr>
-          <a:xfrm>
-            <a:off x="6233160" y="1499616"/>
-            <a:ext cx="5501640" cy="621791"/>
-          </a:xfrm>
-          <a:prstGeom prst="rect">
-            <a:avLst/>
-          </a:prstGeom>
-          <a:noFill/>
-        </p:spPr>
-        <p:txBody>
-          <a:bodyPr wrap="none" lIns="0" rIns="0">
-            <a:noAutofit/>
-          </a:bodyPr>
-          <a:lstStyle/>
-          <a:p>
-            <a:pPr algn="l"/>
-            <a:r>
-              <a:rPr sz="3400" b="1" i="0">
-                <a:solidFill>
-                  <a:srgbClr val="6C6A64"/>
-                </a:solidFill>
-                <a:latin typeface="Arial"/>
-              </a:rPr>
-              <a:t>Weaknesses</a:t>
-            </a:r>
-          </a:p>
-        </p:txBody>
-      </p:sp>
-      <p:sp>
-        <p:nvSpPr>
-          <p:cNvPr id="10" name="Rectangle 9"/>
-          <p:cNvSpPr/>
-          <p:nvPr>
-            <p:ph type="body" idx="5"/>
-          </p:nvPr>
-        </p:nvSpPr>
-        <p:spPr>
-          <a:xfrm>
-            <a:off x="6233160" y="2176271"/>
-            <a:ext cx="1650492" cy="54864"/>
-          </a:xfrm>
-          <a:prstGeom prst="rect">
-            <a:avLst/>
-          </a:prstGeom>
-          <a:solidFill>
-            <a:srgbClr val="6C6A64"/>
-          </a:solidFill>
-          <a:ln>
-            <a:noFill/>
-          </a:ln>
-          <a:effectLst/>
-        </p:spPr>
-        <p:txBody>
-          <a:bodyPr rtlCol="0" anchor="ctr"/>
-          <a:lstStyle/>
-          <a:p>
-            <a:pPr algn="ctr"/>
-          </a:p>
-        </p:txBody>
-      </p:sp>
-      <p:sp>
-        <p:nvSpPr>
-          <p:cNvPr id="11" name="TextBox 10"/>
-          <p:cNvSpPr/>
-          <p:nvPr>
-            <p:ph type="body" idx="6"/>
-          </p:nvPr>
-        </p:nvSpPr>
-        <p:spPr>
-          <a:xfrm>
-            <a:off x="6233160" y="2395727"/>
-            <a:ext cx="5501640" cy="1097281"/>
-          </a:xfrm>
-          <a:prstGeom prst="rect">
-            <a:avLst/>
-          </a:prstGeom>
-          <a:noFill/>
-        </p:spPr>
-        <p:txBody>
-          <a:bodyPr wrap="square" lIns="0" rIns="0">
-            <a:noAutofit/>
-          </a:bodyPr>
-          <a:lstStyle/>
-          <a:p>
-            <a:pPr algn="l"/>
-            <a:r>
-              <a:rPr sz="3400" b="0" i="0">
-                <a:solidFill>
-                  <a:srgbClr val="191919"/>
-                </a:solidFill>
-                <a:latin typeface="Arial"/>
-              </a:rPr>
-              <a:t>Thin margins and a small team</a:t>
-            </a:r>
-          </a:p>
-        </p:txBody>
-      </p:sp>
-      <p:sp>
-        <p:nvSpPr>
-          <p:cNvPr id="12" name="TextBox 11"/>
-          <p:cNvSpPr/>
-          <p:nvPr>
-            <p:ph type="body" idx="7"/>
-          </p:nvPr>
-        </p:nvSpPr>
-        <p:spPr>
-          <a:xfrm>
-            <a:off x="457200" y="3767328"/>
-            <a:ext cx="5501640" cy="621791"/>
-          </a:xfrm>
-          <a:prstGeom prst="rect">
-            <a:avLst/>
-          </a:prstGeom>
-          <a:noFill/>
-        </p:spPr>
-        <p:txBody>
-          <a:bodyPr wrap="none" lIns="0" rIns="0">
-            <a:noAutofit/>
-          </a:bodyPr>
-          <a:lstStyle/>
-          <a:p>
-            <a:pPr algn="l"/>
-            <a:r>
-              <a:rPr sz="3400" b="1" i="0">
-                <a:solidFill>
-                  <a:srgbClr val="D97757"/>
-                </a:solidFill>
-                <a:latin typeface="Arial"/>
-              </a:rPr>
-              <a:t>Opportunities</a:t>
-            </a:r>
-          </a:p>
-        </p:txBody>
-      </p:sp>
-      <p:sp>
-        <p:nvSpPr>
-          <p:cNvPr id="13" name="Rectangle 12"/>
-          <p:cNvSpPr/>
-          <p:nvPr>
-            <p:ph type="body" idx="8"/>
-          </p:nvPr>
-        </p:nvSpPr>
-        <p:spPr>
-          <a:xfrm>
-            <a:off x="457200" y="4443983"/>
-            <a:ext cx="1650492" cy="54864"/>
-          </a:xfrm>
-          <a:prstGeom prst="rect">
-            <a:avLst/>
-          </a:prstGeom>
-          <a:solidFill>
-            <a:srgbClr val="D97757"/>
-          </a:solidFill>
-          <a:ln>
-            <a:noFill/>
-          </a:ln>
-          <a:effectLst/>
-        </p:spPr>
-        <p:txBody>
-          <a:bodyPr rtlCol="0" anchor="ctr"/>
-          <a:lstStyle/>
-          <a:p>
-            <a:pPr algn="ctr"/>
-          </a:p>
-        </p:txBody>
-      </p:sp>
-      <p:sp>
-        <p:nvSpPr>
-          <p:cNvPr id="14" name="TextBox 13"/>
-          <p:cNvSpPr/>
-          <p:nvPr>
-            <p:ph type="body" idx="9"/>
-          </p:nvPr>
-        </p:nvSpPr>
-        <p:spPr>
-          <a:xfrm>
-            <a:off x="457200" y="4663439"/>
-            <a:ext cx="5501640" cy="1097281"/>
-          </a:xfrm>
-          <a:prstGeom prst="rect">
-            <a:avLst/>
-          </a:prstGeom>
-          <a:noFill/>
-        </p:spPr>
-        <p:txBody>
-          <a:bodyPr wrap="square" lIns="0" rIns="0">
-            <a:noAutofit/>
-          </a:bodyPr>
-          <a:lstStyle/>
-          <a:p>
-            <a:pPr algn="l"/>
-            <a:r>
-              <a:rPr sz="3400" b="0" i="0">
-                <a:solidFill>
-                  <a:srgbClr val="191919"/>
-                </a:solidFill>
-                <a:latin typeface="Arial"/>
-              </a:rPr>
-              <a:t>New markets through partnerships</a:t>
-            </a:r>
-          </a:p>
-        </p:txBody>
-      </p:sp>
-      <p:sp>
-        <p:nvSpPr>
-          <p:cNvPr id="15" name="TextBox 14"/>
-          <p:cNvSpPr/>
-          <p:nvPr>
-            <p:ph type="body" idx="13"/>
-          </p:nvPr>
-        </p:nvSpPr>
-        <p:spPr>
-          <a:xfrm>
-            <a:off x="6233160" y="3767328"/>
-            <a:ext cx="5501640" cy="621791"/>
-          </a:xfrm>
-          <a:prstGeom prst="rect">
-            <a:avLst/>
-          </a:prstGeom>
-          <a:noFill/>
-        </p:spPr>
-        <p:txBody>
-          <a:bodyPr wrap="none" lIns="0" rIns="0">
-            <a:noAutofit/>
-          </a:bodyPr>
-          <a:lstStyle/>
-          <a:p>
-            <a:pPr algn="l"/>
-            <a:r>
-              <a:rPr sz="3400" b="1" i="0">
-                <a:solidFill>
-                  <a:srgbClr val="6C6A64"/>
-                </a:solidFill>
-                <a:latin typeface="Arial"/>
-              </a:rPr>
-              <a:t>Threats</a:t>
-            </a:r>
-          </a:p>
-        </p:txBody>
-      </p:sp>
-      <p:sp>
-        <p:nvSpPr>
-          <p:cNvPr id="16" name="Rectangle 15"/>
-          <p:cNvSpPr/>
-          <p:nvPr>
-            <p:ph type="body" idx="14"/>
-          </p:nvPr>
-        </p:nvSpPr>
-        <p:spPr>
-          <a:xfrm>
-            <a:off x="6233160" y="4443983"/>
-            <a:ext cx="1650492" cy="54864"/>
-          </a:xfrm>
-          <a:prstGeom prst="rect">
-            <a:avLst/>
-          </a:prstGeom>
-          <a:solidFill>
-            <a:srgbClr val="6C6A64"/>
-          </a:solidFill>
-          <a:ln>
-            <a:noFill/>
-          </a:ln>
-          <a:effectLst/>
-        </p:spPr>
-        <p:txBody>
-          <a:bodyPr rtlCol="0" anchor="ctr"/>
-          <a:lstStyle/>
-          <a:p>
-            <a:pPr algn="ctr"/>
-          </a:p>
-        </p:txBody>
-      </p:sp>
-      <p:sp>
-        <p:nvSpPr>
-          <p:cNvPr id="17" name="TextBox 16"/>
-          <p:cNvSpPr/>
-          <p:nvPr>
-            <p:ph type="body" idx="15"/>
-          </p:nvPr>
-        </p:nvSpPr>
-        <p:spPr>
-          <a:xfrm>
-            <a:off x="6233160" y="4663439"/>
-            <a:ext cx="5501640" cy="1097281"/>
-          </a:xfrm>
-          <a:prstGeom prst="rect">
-            <a:avLst/>
-          </a:prstGeom>
-          <a:noFill/>
-        </p:spPr>
-        <p:txBody>
-          <a:bodyPr wrap="square" lIns="0" rIns="0">
-            <a:noAutofit/>
-          </a:bodyPr>
-          <a:lstStyle/>
-          <a:p>
-            <a:pPr algn="l"/>
-            <a:r>
-              <a:rPr sz="3400" b="0" i="0">
-                <a:solidFill>
-                  <a:srgbClr val="191919"/>
-                </a:solidFill>
-                <a:latin typeface="Arial"/>
-              </a:rPr>
-              <a:t>New entrants driving price pressure</a:t>
-            </a:r>
-          </a:p>
-        </p:txBody>
-      </p:sp>
-    </p:spTree>
-    <p:extLst>
-      <p:ext uri="{BB962C8B-B14F-4D97-AF65-F5344CB8AC3E}">
-        <p14:creationId xmlns:p14="http://schemas.microsoft.com/office/powerpoint/2010/main" val="1212999818"/>
-      </p:ext>
-    </p:extLst>
-  </p:cSld>
-  <p:clrMapOvr>
-    <a:masterClrMapping/>
-  </p:clrMapOvr>
-</p:sldLayout>
-</file>
-
-<file path=ppt/slideLayouts/slideLayout41.xml><?xml version="1.0" encoding="utf-8"?>
-<p:sldLayout xmlns:a="http://schemas.openxmlformats.org/drawingml/2006/main" xmlns:r="http://schemas.openxmlformats.org/officeDocument/2006/relationships" xmlns:p="http://schemas.openxmlformats.org/presentationml/2006/main" type="blank" preserve="1">
   <p:cSld name="slidekit · Comparison Matrix">
     <p:bg>
       <p:bgPr>
@@ -13374,8 +12716,8 @@
         </p:nvSpPr>
         <p:spPr>
           <a:xfrm>
-            <a:off x="10363200" y="6035040"/>
-            <a:ext cx="1371600" cy="365760"/>
+            <a:off x="11186160" y="6035040"/>
+            <a:ext cx="548640" cy="365760"/>
           </a:xfrm>
         </p:spPr>
         <p:txBody>
@@ -13418,7 +12760,7 @@
             <a:r>
               <a:rPr sz="4200" b="1" i="0">
                 <a:solidFill>
-                  <a:srgbClr val="262625"/>
+                  <a:srgbClr val="D97757"/>
                 </a:solidFill>
                 <a:latin typeface="Arial"/>
               </a:rPr>
@@ -15541,7 +14883,6 @@
     <p:sldLayoutId id="2147483738" r:id="rId39"/>
     <p:sldLayoutId id="2147483739" r:id="rId40"/>
     <p:sldLayoutId id="2147483740" r:id="rId41"/>
-    <p:sldLayoutId id="2147483741" r:id="rId42"/>
   </p:sldLayoutIdLst>
   <p:txStyles>
     <p:titleStyle>
@@ -15840,7 +15181,7 @@
             <a:r>
               <a:rPr sz="6000" b="1" i="0">
                 <a:solidFill>
-                  <a:srgbClr val="262625"/>
+                  <a:srgbClr val="D97757"/>
                 </a:solidFill>
                 <a:latin typeface="Arial"/>
               </a:rPr>
@@ -15936,7 +15277,7 @@
             <a:r>
               <a:rPr sz="4200" b="1" i="0">
                 <a:solidFill>
-                  <a:srgbClr val="262625"/>
+                  <a:srgbClr val="D97757"/>
                 </a:solidFill>
                 <a:latin typeface="Arial"/>
               </a:rPr>
@@ -15971,7 +15312,7 @@
             <a:r>
               <a:rPr sz="4200" b="1" i="0">
                 <a:solidFill>
-                  <a:srgbClr val="262625"/>
+                  <a:srgbClr val="D97757"/>
                 </a:solidFill>
                 <a:latin typeface="Arial"/>
               </a:rPr>
@@ -15989,13 +15330,13 @@
         <p:spPr>
           <a:xfrm>
             <a:off x="457200" y="2194560"/>
-            <a:ext cx="784098" cy="54864"/>
+            <a:ext cx="593303" cy="54864"/>
           </a:xfrm>
           <a:prstGeom prst="rect">
             <a:avLst/>
           </a:prstGeom>
           <a:solidFill>
-            <a:srgbClr val="262625"/>
+            <a:srgbClr val="D97757"/>
           </a:solidFill>
           <a:ln>
             <a:noFill/>
@@ -16050,7 +15391,7 @@
             <a:r>
               <a:rPr sz="3400" b="1" i="0">
                 <a:solidFill>
-                  <a:srgbClr val="262625"/>
+                  <a:srgbClr val="D97757"/>
                 </a:solidFill>
                 <a:latin typeface="Arial"/>
               </a:rPr>
@@ -16120,7 +15461,7 @@
             <a:r>
               <a:rPr sz="4200" b="1" i="0">
                 <a:solidFill>
-                  <a:srgbClr val="262625"/>
+                  <a:srgbClr val="D97757"/>
                 </a:solidFill>
                 <a:latin typeface="Arial"/>
               </a:rPr>
@@ -16138,13 +15479,13 @@
         <p:spPr>
           <a:xfrm>
             <a:off x="3345180" y="2194560"/>
-            <a:ext cx="784098" cy="54864"/>
+            <a:ext cx="593303" cy="54864"/>
           </a:xfrm>
           <a:prstGeom prst="rect">
             <a:avLst/>
           </a:prstGeom>
           <a:solidFill>
-            <a:srgbClr val="262625"/>
+            <a:srgbClr val="D97757"/>
           </a:solidFill>
           <a:ln>
             <a:noFill/>
@@ -16199,7 +15540,7 @@
             <a:r>
               <a:rPr sz="3400" b="1" i="0">
                 <a:solidFill>
-                  <a:srgbClr val="262625"/>
+                  <a:srgbClr val="D97757"/>
                 </a:solidFill>
                 <a:latin typeface="Arial"/>
               </a:rPr>
@@ -16269,7 +15610,7 @@
             <a:r>
               <a:rPr sz="4200" b="1" i="0">
                 <a:solidFill>
-                  <a:srgbClr val="262625"/>
+                  <a:srgbClr val="D97757"/>
                 </a:solidFill>
                 <a:latin typeface="Arial"/>
               </a:rPr>
@@ -16287,13 +15628,13 @@
         <p:spPr>
           <a:xfrm>
             <a:off x="6233160" y="2194560"/>
-            <a:ext cx="784098" cy="54864"/>
+            <a:ext cx="593303" cy="54864"/>
           </a:xfrm>
           <a:prstGeom prst="rect">
             <a:avLst/>
           </a:prstGeom>
           <a:solidFill>
-            <a:srgbClr val="262625"/>
+            <a:srgbClr val="D97757"/>
           </a:solidFill>
           <a:ln>
             <a:noFill/>
@@ -16348,7 +15689,7 @@
             <a:r>
               <a:rPr sz="3400" b="1" i="0">
                 <a:solidFill>
-                  <a:srgbClr val="262625"/>
+                  <a:srgbClr val="D97757"/>
                 </a:solidFill>
                 <a:latin typeface="Arial"/>
               </a:rPr>
@@ -16418,7 +15759,7 @@
             <a:r>
               <a:rPr sz="4200" b="1" i="0">
                 <a:solidFill>
-                  <a:srgbClr val="262625"/>
+                  <a:srgbClr val="D97757"/>
                 </a:solidFill>
                 <a:latin typeface="Arial"/>
               </a:rPr>
@@ -16436,13 +15777,13 @@
         <p:spPr>
           <a:xfrm>
             <a:off x="9121140" y="2194560"/>
-            <a:ext cx="784098" cy="54864"/>
+            <a:ext cx="593303" cy="54864"/>
           </a:xfrm>
           <a:prstGeom prst="rect">
             <a:avLst/>
           </a:prstGeom>
           <a:solidFill>
-            <a:srgbClr val="262625"/>
+            <a:srgbClr val="D97757"/>
           </a:solidFill>
           <a:ln>
             <a:noFill/>
@@ -16497,7 +15838,7 @@
             <a:r>
               <a:rPr sz="3400" b="1" i="0">
                 <a:solidFill>
-                  <a:srgbClr val="262625"/>
+                  <a:srgbClr val="D97757"/>
                 </a:solidFill>
                 <a:latin typeface="Arial"/>
               </a:rPr>
@@ -16551,25 +15892,25 @@
         </p:nvSpPr>
         <p:spPr>
           <a:xfrm>
-            <a:off x="10363200" y="6035040"/>
-            <a:ext cx="1371600" cy="365760"/>
-          </a:xfrm>
-          <a:prstGeom prst="rect">
-            <a:avLst/>
-          </a:prstGeom>
-          <a:noFill/>
-        </p:spPr>
-        <p:txBody>
-          <a:bodyPr wrap="none" lIns="0" rIns="0">
-            <a:noAutofit/>
-          </a:bodyPr>
-          <a:lstStyle/>
-          <a:p>
-            <a:pPr algn="l"/>
+            <a:off x="11186160" y="6035040"/>
+            <a:ext cx="548640" cy="365760"/>
+          </a:xfrm>
+          <a:prstGeom prst="rect">
+            <a:avLst/>
+          </a:prstGeom>
+          <a:noFill/>
+        </p:spPr>
+        <p:txBody>
+          <a:bodyPr wrap="none" lIns="0" rIns="0">
+            <a:noAutofit/>
+          </a:bodyPr>
+          <a:lstStyle/>
+          <a:p>
+            <a:pPr algn="r"/>
             <a:fld id="{4B0E1F8A-6C1D-4E2A-9F3B-7A5C8D2E1F60}" type="slidenum">
               <a:rPr sz="1600" b="0" i="0">
                 <a:solidFill>
-                  <a:srgbClr val="6C6A64"/>
+                  <a:srgbClr val="191919"/>
                 </a:solidFill>
                 <a:latin typeface="Arial"/>
               </a:rPr>
@@ -16630,7 +15971,7 @@
             <a:r>
               <a:rPr sz="4200" b="1" i="0">
                 <a:solidFill>
-                  <a:srgbClr val="262625"/>
+                  <a:srgbClr val="D97757"/>
                 </a:solidFill>
                 <a:latin typeface="Arial"/>
               </a:rPr>
@@ -16665,7 +16006,7 @@
             <a:r>
               <a:rPr sz="3400" b="1" i="0">
                 <a:solidFill>
-                  <a:srgbClr val="262625"/>
+                  <a:srgbClr val="D97757"/>
                 </a:solidFill>
                 <a:latin typeface="Arial"/>
               </a:rPr>
@@ -16682,14 +16023,14 @@
         </p:nvSpPr>
         <p:spPr>
           <a:xfrm>
-            <a:off x="548640" y="2176271"/>
-            <a:ext cx="1650492" cy="54864"/>
+            <a:off x="457200" y="2176271"/>
+            <a:ext cx="1800151" cy="54864"/>
           </a:xfrm>
           <a:prstGeom prst="rect">
             <a:avLst/>
           </a:prstGeom>
           <a:solidFill>
-            <a:srgbClr val="262625"/>
+            <a:srgbClr val="D97757"/>
           </a:solidFill>
           <a:ln>
             <a:noFill/>
@@ -16744,7 +16085,7 @@
             <a:r>
               <a:rPr sz="3400" b="1" i="0">
                 <a:solidFill>
-                  <a:srgbClr val="6C6A64"/>
+                  <a:srgbClr val="191919"/>
                 </a:solidFill>
                 <a:latin typeface="Arial"/>
               </a:rPr>
@@ -16761,14 +16102,14 @@
         </p:nvSpPr>
         <p:spPr>
           <a:xfrm>
-            <a:off x="6324600" y="2176271"/>
-            <a:ext cx="1650492" cy="54864"/>
+            <a:off x="6233160" y="2176271"/>
+            <a:ext cx="2639504" cy="54864"/>
           </a:xfrm>
           <a:prstGeom prst="rect">
             <a:avLst/>
           </a:prstGeom>
           <a:solidFill>
-            <a:srgbClr val="6C6A64"/>
+            <a:srgbClr val="191919"/>
           </a:solidFill>
           <a:ln>
             <a:noFill/>
@@ -17017,25 +16358,25 @@
         </p:nvSpPr>
         <p:spPr>
           <a:xfrm>
-            <a:off x="10363200" y="6035040"/>
-            <a:ext cx="1371600" cy="365760"/>
-          </a:xfrm>
-          <a:prstGeom prst="rect">
-            <a:avLst/>
-          </a:prstGeom>
-          <a:noFill/>
-        </p:spPr>
-        <p:txBody>
-          <a:bodyPr wrap="none" lIns="0" rIns="0">
-            <a:noAutofit/>
-          </a:bodyPr>
-          <a:lstStyle/>
-          <a:p>
-            <a:pPr algn="l"/>
+            <a:off x="11186160" y="6035040"/>
+            <a:ext cx="548640" cy="365760"/>
+          </a:xfrm>
+          <a:prstGeom prst="rect">
+            <a:avLst/>
+          </a:prstGeom>
+          <a:noFill/>
+        </p:spPr>
+        <p:txBody>
+          <a:bodyPr wrap="none" lIns="0" rIns="0">
+            <a:noAutofit/>
+          </a:bodyPr>
+          <a:lstStyle/>
+          <a:p>
+            <a:pPr algn="r"/>
             <a:fld id="{4B0E1F8A-6C1D-4E2A-9F3B-7A5C8D2E1F60}" type="slidenum">
               <a:rPr sz="1600" b="0" i="0">
                 <a:solidFill>
-                  <a:srgbClr val="6C6A64"/>
+                  <a:srgbClr val="191919"/>
                 </a:solidFill>
                 <a:latin typeface="Arial"/>
               </a:rPr>
@@ -17096,7 +16437,7 @@
             <a:r>
               <a:rPr sz="4200" b="1" i="0">
                 <a:solidFill>
-                  <a:srgbClr val="262625"/>
+                  <a:srgbClr val="D97757"/>
                 </a:solidFill>
                 <a:latin typeface="Arial"/>
               </a:rPr>
@@ -17131,7 +16472,7 @@
             <a:r>
               <a:rPr sz="3400" b="1" i="0">
                 <a:solidFill>
-                  <a:srgbClr val="262625"/>
+                  <a:srgbClr val="D97757"/>
                 </a:solidFill>
                 <a:latin typeface="Arial"/>
               </a:rPr>
@@ -17166,7 +16507,7 @@
             <a:r>
               <a:rPr sz="3400" b="1" i="0">
                 <a:solidFill>
-                  <a:srgbClr val="262625"/>
+                  <a:srgbClr val="D97757"/>
                 </a:solidFill>
                 <a:latin typeface="Arial"/>
               </a:rPr>
@@ -17395,25 +16736,25 @@
         </p:nvSpPr>
         <p:spPr>
           <a:xfrm>
-            <a:off x="10363200" y="6035040"/>
-            <a:ext cx="1371600" cy="365760"/>
-          </a:xfrm>
-          <a:prstGeom prst="rect">
-            <a:avLst/>
-          </a:prstGeom>
-          <a:noFill/>
-        </p:spPr>
-        <p:txBody>
-          <a:bodyPr wrap="none" lIns="0" rIns="0">
-            <a:noAutofit/>
-          </a:bodyPr>
-          <a:lstStyle/>
-          <a:p>
-            <a:pPr algn="l"/>
+            <a:off x="11186160" y="6035040"/>
+            <a:ext cx="548640" cy="365760"/>
+          </a:xfrm>
+          <a:prstGeom prst="rect">
+            <a:avLst/>
+          </a:prstGeom>
+          <a:noFill/>
+        </p:spPr>
+        <p:txBody>
+          <a:bodyPr wrap="none" lIns="0" rIns="0">
+            <a:noAutofit/>
+          </a:bodyPr>
+          <a:lstStyle/>
+          <a:p>
+            <a:pPr algn="r"/>
             <a:fld id="{4B0E1F8A-6C1D-4E2A-9F3B-7A5C8D2E1F60}" type="slidenum">
               <a:rPr sz="1600" b="0" i="0">
                 <a:solidFill>
-                  <a:srgbClr val="6C6A64"/>
+                  <a:srgbClr val="191919"/>
                 </a:solidFill>
                 <a:latin typeface="Arial"/>
               </a:rPr>
@@ -17474,7 +16815,7 @@
             <a:r>
               <a:rPr sz="4200" b="1" i="0">
                 <a:solidFill>
-                  <a:srgbClr val="262625"/>
+                  <a:srgbClr val="D97757"/>
                 </a:solidFill>
                 <a:latin typeface="Arial"/>
               </a:rPr>
@@ -17509,7 +16850,7 @@
             <a:r>
               <a:rPr sz="3400" b="1" i="0">
                 <a:solidFill>
-                  <a:srgbClr val="262625"/>
+                  <a:srgbClr val="D97757"/>
                 </a:solidFill>
                 <a:latin typeface="Arial"/>
               </a:rPr>
@@ -17544,7 +16885,7 @@
             <a:r>
               <a:rPr sz="3400" b="1" i="0">
                 <a:solidFill>
-                  <a:srgbClr val="262625"/>
+                  <a:srgbClr val="D97757"/>
                 </a:solidFill>
                 <a:latin typeface="Arial"/>
               </a:rPr>
@@ -17887,25 +17228,25 @@
         </p:nvSpPr>
         <p:spPr>
           <a:xfrm>
-            <a:off x="10363200" y="6035040"/>
-            <a:ext cx="1371600" cy="365760"/>
-          </a:xfrm>
-          <a:prstGeom prst="rect">
-            <a:avLst/>
-          </a:prstGeom>
-          <a:noFill/>
-        </p:spPr>
-        <p:txBody>
-          <a:bodyPr wrap="none" lIns="0" rIns="0">
-            <a:noAutofit/>
-          </a:bodyPr>
-          <a:lstStyle/>
-          <a:p>
-            <a:pPr algn="l"/>
+            <a:off x="11186160" y="6035040"/>
+            <a:ext cx="548640" cy="365760"/>
+          </a:xfrm>
+          <a:prstGeom prst="rect">
+            <a:avLst/>
+          </a:prstGeom>
+          <a:noFill/>
+        </p:spPr>
+        <p:txBody>
+          <a:bodyPr wrap="none" lIns="0" rIns="0">
+            <a:noAutofit/>
+          </a:bodyPr>
+          <a:lstStyle/>
+          <a:p>
+            <a:pPr algn="r"/>
             <a:fld id="{4B0E1F8A-6C1D-4E2A-9F3B-7A5C8D2E1F60}" type="slidenum">
               <a:rPr sz="1600" b="0" i="0">
                 <a:solidFill>
-                  <a:srgbClr val="6C6A64"/>
+                  <a:srgbClr val="191919"/>
                 </a:solidFill>
                 <a:latin typeface="Arial"/>
               </a:rPr>
@@ -17966,7 +17307,7 @@
             <a:r>
               <a:rPr sz="4200" b="1" i="0">
                 <a:solidFill>
-                  <a:srgbClr val="262625"/>
+                  <a:srgbClr val="D97757"/>
                 </a:solidFill>
                 <a:latin typeface="Arial"/>
               </a:rPr>
@@ -18441,25 +17782,25 @@
         </p:nvSpPr>
         <p:spPr>
           <a:xfrm>
-            <a:off x="10363200" y="6035040"/>
-            <a:ext cx="1371600" cy="365760"/>
-          </a:xfrm>
-          <a:prstGeom prst="rect">
-            <a:avLst/>
-          </a:prstGeom>
-          <a:noFill/>
-        </p:spPr>
-        <p:txBody>
-          <a:bodyPr wrap="none" lIns="0" rIns="0">
-            <a:noAutofit/>
-          </a:bodyPr>
-          <a:lstStyle/>
-          <a:p>
-            <a:pPr algn="l"/>
+            <a:off x="11186160" y="6035040"/>
+            <a:ext cx="548640" cy="365760"/>
+          </a:xfrm>
+          <a:prstGeom prst="rect">
+            <a:avLst/>
+          </a:prstGeom>
+          <a:noFill/>
+        </p:spPr>
+        <p:txBody>
+          <a:bodyPr wrap="none" lIns="0" rIns="0">
+            <a:noAutofit/>
+          </a:bodyPr>
+          <a:lstStyle/>
+          <a:p>
+            <a:pPr algn="r"/>
             <a:fld id="{4B0E1F8A-6C1D-4E2A-9F3B-7A5C8D2E1F60}" type="slidenum">
               <a:rPr sz="1600" b="0" i="0">
                 <a:solidFill>
-                  <a:srgbClr val="6C6A64"/>
+                  <a:srgbClr val="191919"/>
                 </a:solidFill>
                 <a:latin typeface="Arial"/>
               </a:rPr>
@@ -18599,7 +17940,7 @@
             <a:r>
               <a:rPr sz="3400" b="0" i="0">
                 <a:solidFill>
-                  <a:srgbClr val="6C6A64"/>
+                  <a:srgbClr val="191919"/>
                 </a:solidFill>
                 <a:latin typeface="Arial"/>
               </a:rPr>
@@ -18618,25 +17959,25 @@
         </p:nvSpPr>
         <p:spPr>
           <a:xfrm>
-            <a:off x="10363200" y="6035040"/>
-            <a:ext cx="1371600" cy="365760"/>
-          </a:xfrm>
-          <a:prstGeom prst="rect">
-            <a:avLst/>
-          </a:prstGeom>
-          <a:noFill/>
-        </p:spPr>
-        <p:txBody>
-          <a:bodyPr wrap="none" lIns="0" rIns="0">
-            <a:noAutofit/>
-          </a:bodyPr>
-          <a:lstStyle/>
-          <a:p>
-            <a:pPr algn="l"/>
+            <a:off x="11186160" y="6035040"/>
+            <a:ext cx="548640" cy="365760"/>
+          </a:xfrm>
+          <a:prstGeom prst="rect">
+            <a:avLst/>
+          </a:prstGeom>
+          <a:noFill/>
+        </p:spPr>
+        <p:txBody>
+          <a:bodyPr wrap="none" lIns="0" rIns="0">
+            <a:noAutofit/>
+          </a:bodyPr>
+          <a:lstStyle/>
+          <a:p>
+            <a:pPr algn="r"/>
             <a:fld id="{4B0E1F8A-6C1D-4E2A-9F3B-7A5C8D2E1F60}" type="slidenum">
               <a:rPr sz="1600" b="0" i="0">
                 <a:solidFill>
-                  <a:srgbClr val="6C6A64"/>
+                  <a:srgbClr val="191919"/>
                 </a:solidFill>
                 <a:latin typeface="Arial"/>
               </a:rPr>
@@ -18697,7 +18038,7 @@
             <a:r>
               <a:rPr sz="4200" b="1" i="0">
                 <a:solidFill>
-                  <a:srgbClr val="191919"/>
+                  <a:srgbClr val="D97757"/>
                 </a:solidFill>
                 <a:latin typeface="Arial"/>
               </a:rPr>
@@ -19040,25 +18381,25 @@
         </p:nvSpPr>
         <p:spPr>
           <a:xfrm>
-            <a:off x="10363200" y="6035040"/>
-            <a:ext cx="1371600" cy="365760"/>
-          </a:xfrm>
-          <a:prstGeom prst="rect">
-            <a:avLst/>
-          </a:prstGeom>
-          <a:noFill/>
-        </p:spPr>
-        <p:txBody>
-          <a:bodyPr wrap="none" lIns="0" rIns="0">
-            <a:noAutofit/>
-          </a:bodyPr>
-          <a:lstStyle/>
-          <a:p>
-            <a:pPr algn="l"/>
+            <a:off x="11186160" y="6035040"/>
+            <a:ext cx="548640" cy="365760"/>
+          </a:xfrm>
+          <a:prstGeom prst="rect">
+            <a:avLst/>
+          </a:prstGeom>
+          <a:noFill/>
+        </p:spPr>
+        <p:txBody>
+          <a:bodyPr wrap="none" lIns="0" rIns="0">
+            <a:noAutofit/>
+          </a:bodyPr>
+          <a:lstStyle/>
+          <a:p>
+            <a:pPr algn="r"/>
             <a:fld id="{4B0E1F8A-6C1D-4E2A-9F3B-7A5C8D2E1F60}" type="slidenum">
               <a:rPr sz="1600" b="0" i="0">
                 <a:solidFill>
-                  <a:srgbClr val="6C6A64"/>
+                  <a:srgbClr val="191919"/>
                 </a:solidFill>
                 <a:latin typeface="Arial"/>
               </a:rPr>
@@ -19217,25 +18558,25 @@
         </p:nvSpPr>
         <p:spPr>
           <a:xfrm>
-            <a:off x="10363200" y="6035040"/>
-            <a:ext cx="1371600" cy="365760"/>
-          </a:xfrm>
-          <a:prstGeom prst="rect">
-            <a:avLst/>
-          </a:prstGeom>
-          <a:noFill/>
-        </p:spPr>
-        <p:txBody>
-          <a:bodyPr wrap="none" lIns="0" rIns="0">
-            <a:noAutofit/>
-          </a:bodyPr>
-          <a:lstStyle/>
-          <a:p>
-            <a:pPr algn="l"/>
+            <a:off x="11186160" y="6035040"/>
+            <a:ext cx="548640" cy="365760"/>
+          </a:xfrm>
+          <a:prstGeom prst="rect">
+            <a:avLst/>
+          </a:prstGeom>
+          <a:noFill/>
+        </p:spPr>
+        <p:txBody>
+          <a:bodyPr wrap="none" lIns="0" rIns="0">
+            <a:noAutofit/>
+          </a:bodyPr>
+          <a:lstStyle/>
+          <a:p>
+            <a:pPr algn="r"/>
             <a:fld id="{4B0E1F8A-6C1D-4E2A-9F3B-7A5C8D2E1F60}" type="slidenum">
               <a:rPr sz="1600" b="0" i="0">
                 <a:solidFill>
-                  <a:srgbClr val="6C6A64"/>
+                  <a:srgbClr val="191919"/>
                 </a:solidFill>
                 <a:latin typeface="Arial"/>
               </a:rPr>
@@ -19410,7 +18751,7 @@
             <a:r>
               <a:rPr sz="3400" b="0" i="0">
                 <a:solidFill>
-                  <a:srgbClr val="6C6A64"/>
+                  <a:srgbClr val="191919"/>
                 </a:solidFill>
                 <a:latin typeface="Arial"/>
               </a:rPr>
@@ -19429,25 +18770,25 @@
         </p:nvSpPr>
         <p:spPr>
           <a:xfrm>
-            <a:off x="10363200" y="6035040"/>
-            <a:ext cx="1371600" cy="365760"/>
-          </a:xfrm>
-          <a:prstGeom prst="rect">
-            <a:avLst/>
-          </a:prstGeom>
-          <a:noFill/>
-        </p:spPr>
-        <p:txBody>
-          <a:bodyPr wrap="none" lIns="0" rIns="0">
-            <a:noAutofit/>
-          </a:bodyPr>
-          <a:lstStyle/>
-          <a:p>
-            <a:pPr algn="l"/>
+            <a:off x="11186160" y="6035040"/>
+            <a:ext cx="548640" cy="365760"/>
+          </a:xfrm>
+          <a:prstGeom prst="rect">
+            <a:avLst/>
+          </a:prstGeom>
+          <a:noFill/>
+        </p:spPr>
+        <p:txBody>
+          <a:bodyPr wrap="none" lIns="0" rIns="0">
+            <a:noAutofit/>
+          </a:bodyPr>
+          <a:lstStyle/>
+          <a:p>
+            <a:pPr algn="r"/>
             <a:fld id="{4B0E1F8A-6C1D-4E2A-9F3B-7A5C8D2E1F60}" type="slidenum">
               <a:rPr sz="1600" b="0" i="0">
                 <a:solidFill>
-                  <a:srgbClr val="6C6A64"/>
+                  <a:srgbClr val="191919"/>
                 </a:solidFill>
                 <a:latin typeface="Arial"/>
               </a:rPr>
@@ -19508,7 +18849,7 @@
             <a:r>
               <a:rPr sz="4200" b="1" i="0">
                 <a:solidFill>
-                  <a:srgbClr val="262625"/>
+                  <a:srgbClr val="D97757"/>
                 </a:solidFill>
                 <a:latin typeface="Arial"/>
               </a:rPr>
@@ -19737,25 +19078,25 @@
         </p:nvSpPr>
         <p:spPr>
           <a:xfrm>
-            <a:off x="10363200" y="6035040"/>
-            <a:ext cx="1371600" cy="365760"/>
-          </a:xfrm>
-          <a:prstGeom prst="rect">
-            <a:avLst/>
-          </a:prstGeom>
-          <a:noFill/>
-        </p:spPr>
-        <p:txBody>
-          <a:bodyPr wrap="none" lIns="0" rIns="0">
-            <a:noAutofit/>
-          </a:bodyPr>
-          <a:lstStyle/>
-          <a:p>
-            <a:pPr algn="l"/>
+            <a:off x="11186160" y="6035040"/>
+            <a:ext cx="548640" cy="365760"/>
+          </a:xfrm>
+          <a:prstGeom prst="rect">
+            <a:avLst/>
+          </a:prstGeom>
+          <a:noFill/>
+        </p:spPr>
+        <p:txBody>
+          <a:bodyPr wrap="none" lIns="0" rIns="0">
+            <a:noAutofit/>
+          </a:bodyPr>
+          <a:lstStyle/>
+          <a:p>
+            <a:pPr algn="r"/>
             <a:fld id="{4B0E1F8A-6C1D-4E2A-9F3B-7A5C8D2E1F60}" type="slidenum">
               <a:rPr sz="1600" b="0" i="0">
                 <a:solidFill>
-                  <a:srgbClr val="6C6A64"/>
+                  <a:srgbClr val="191919"/>
                 </a:solidFill>
                 <a:latin typeface="Arial"/>
               </a:rPr>
@@ -19816,7 +19157,7 @@
             <a:r>
               <a:rPr sz="4200" b="1" i="0">
                 <a:solidFill>
-                  <a:srgbClr val="191919"/>
+                  <a:srgbClr val="D97757"/>
                 </a:solidFill>
                 <a:latin typeface="Arial"/>
               </a:rPr>
@@ -19975,25 +19316,25 @@
         </p:nvSpPr>
         <p:spPr>
           <a:xfrm>
-            <a:off x="10363200" y="6035040"/>
-            <a:ext cx="1371600" cy="365760"/>
-          </a:xfrm>
-          <a:prstGeom prst="rect">
-            <a:avLst/>
-          </a:prstGeom>
-          <a:noFill/>
-        </p:spPr>
-        <p:txBody>
-          <a:bodyPr wrap="none" lIns="0" rIns="0">
-            <a:noAutofit/>
-          </a:bodyPr>
-          <a:lstStyle/>
-          <a:p>
-            <a:pPr algn="l"/>
+            <a:off x="11186160" y="6035040"/>
+            <a:ext cx="548640" cy="365760"/>
+          </a:xfrm>
+          <a:prstGeom prst="rect">
+            <a:avLst/>
+          </a:prstGeom>
+          <a:noFill/>
+        </p:spPr>
+        <p:txBody>
+          <a:bodyPr wrap="none" lIns="0" rIns="0">
+            <a:noAutofit/>
+          </a:bodyPr>
+          <a:lstStyle/>
+          <a:p>
+            <a:pPr algn="r"/>
             <a:fld id="{4B0E1F8A-6C1D-4E2A-9F3B-7A5C8D2E1F60}" type="slidenum">
               <a:rPr sz="1600" b="0" i="0">
                 <a:solidFill>
-                  <a:srgbClr val="6C6A64"/>
+                  <a:srgbClr val="191919"/>
                 </a:solidFill>
                 <a:latin typeface="Arial"/>
               </a:rPr>
@@ -20054,7 +19395,7 @@
             <a:r>
               <a:rPr sz="4200" b="1" i="0">
                 <a:solidFill>
-                  <a:srgbClr val="262625"/>
+                  <a:srgbClr val="D97757"/>
                 </a:solidFill>
                 <a:latin typeface="Arial"/>
               </a:rPr>
@@ -20072,7 +19413,7 @@
         <p:spPr>
           <a:xfrm>
             <a:off x="457200" y="1499616"/>
-            <a:ext cx="3576320" cy="518159"/>
+            <a:ext cx="11277600" cy="518159"/>
           </a:xfrm>
           <a:prstGeom prst="rect">
             <a:avLst/>
@@ -20106,8 +19447,8 @@
         </p:nvSpPr>
         <p:spPr>
           <a:xfrm>
-            <a:off x="457200" y="2154935"/>
-            <a:ext cx="4714081" cy="3605785"/>
+            <a:off x="457200" y="2109215"/>
+            <a:ext cx="11277600" cy="627889"/>
           </a:xfrm>
           <a:prstGeom prst="rect">
             <a:avLst/>
@@ -20141,8 +19482,8 @@
         </p:nvSpPr>
         <p:spPr>
           <a:xfrm>
-            <a:off x="4307840" y="1499616"/>
-            <a:ext cx="3576320" cy="518159"/>
+            <a:off x="457200" y="3011424"/>
+            <a:ext cx="11277600" cy="518159"/>
           </a:xfrm>
           <a:prstGeom prst="rect">
             <a:avLst/>
@@ -20176,8 +19517,8 @@
         </p:nvSpPr>
         <p:spPr>
           <a:xfrm>
-            <a:off x="4307840" y="2154935"/>
-            <a:ext cx="3870046" cy="3605785"/>
+            <a:off x="457200" y="3621023"/>
+            <a:ext cx="11277600" cy="627889"/>
           </a:xfrm>
           <a:prstGeom prst="rect">
             <a:avLst/>
@@ -20211,8 +19552,8 @@
         </p:nvSpPr>
         <p:spPr>
           <a:xfrm>
-            <a:off x="8158480" y="1499616"/>
-            <a:ext cx="3576320" cy="518159"/>
+            <a:off x="457200" y="4523232"/>
+            <a:ext cx="11277600" cy="518159"/>
           </a:xfrm>
           <a:prstGeom prst="rect">
             <a:avLst/>
@@ -20246,8 +19587,8 @@
         </p:nvSpPr>
         <p:spPr>
           <a:xfrm>
-            <a:off x="8158480" y="2154935"/>
-            <a:ext cx="4023539" cy="3605785"/>
+            <a:off x="457200" y="5132831"/>
+            <a:ext cx="11277600" cy="627889"/>
           </a:xfrm>
           <a:prstGeom prst="rect">
             <a:avLst/>
@@ -20283,25 +19624,25 @@
         </p:nvSpPr>
         <p:spPr>
           <a:xfrm>
-            <a:off x="10363200" y="6035040"/>
-            <a:ext cx="1371600" cy="365760"/>
-          </a:xfrm>
-          <a:prstGeom prst="rect">
-            <a:avLst/>
-          </a:prstGeom>
-          <a:noFill/>
-        </p:spPr>
-        <p:txBody>
-          <a:bodyPr wrap="none" lIns="0" rIns="0">
-            <a:noAutofit/>
-          </a:bodyPr>
-          <a:lstStyle/>
-          <a:p>
-            <a:pPr algn="l"/>
+            <a:off x="11186160" y="6035040"/>
+            <a:ext cx="548640" cy="365760"/>
+          </a:xfrm>
+          <a:prstGeom prst="rect">
+            <a:avLst/>
+          </a:prstGeom>
+          <a:noFill/>
+        </p:spPr>
+        <p:txBody>
+          <a:bodyPr wrap="none" lIns="0" rIns="0">
+            <a:noAutofit/>
+          </a:bodyPr>
+          <a:lstStyle/>
+          <a:p>
+            <a:pPr algn="r"/>
             <a:fld id="{4B0E1F8A-6C1D-4E2A-9F3B-7A5C8D2E1F60}" type="slidenum">
               <a:rPr sz="1600" b="0" i="0">
                 <a:solidFill>
-                  <a:srgbClr val="6C6A64"/>
+                  <a:srgbClr val="191919"/>
                 </a:solidFill>
                 <a:latin typeface="Arial"/>
               </a:rPr>
@@ -20362,7 +19703,7 @@
             <a:r>
               <a:rPr sz="4200" b="1" i="0">
                 <a:solidFill>
-                  <a:srgbClr val="191919"/>
+                  <a:srgbClr val="D97757"/>
                 </a:solidFill>
                 <a:latin typeface="Arial"/>
               </a:rPr>
@@ -20397,7 +19738,7 @@
             <a:r>
               <a:rPr sz="4200" b="1" i="0">
                 <a:solidFill>
-                  <a:srgbClr val="262625"/>
+                  <a:srgbClr val="D97757"/>
                 </a:solidFill>
                 <a:latin typeface="Arial"/>
               </a:rPr>
@@ -20432,7 +19773,7 @@
             <a:r>
               <a:rPr sz="4200" b="1" i="0">
                 <a:solidFill>
-                  <a:srgbClr val="262625"/>
+                  <a:srgbClr val="D97757"/>
                 </a:solidFill>
                 <a:latin typeface="Arial"/>
               </a:rPr>
@@ -20502,7 +19843,7 @@
             <a:r>
               <a:rPr sz="4200" b="1" i="0">
                 <a:solidFill>
-                  <a:srgbClr val="262625"/>
+                  <a:srgbClr val="D97757"/>
                 </a:solidFill>
                 <a:latin typeface="Arial"/>
               </a:rPr>
@@ -20537,7 +19878,7 @@
             <a:r>
               <a:rPr sz="4200" b="1" i="0">
                 <a:solidFill>
-                  <a:srgbClr val="262625"/>
+                  <a:srgbClr val="D97757"/>
                 </a:solidFill>
                 <a:latin typeface="Arial"/>
               </a:rPr>
@@ -20607,7 +19948,7 @@
             <a:r>
               <a:rPr sz="4200" b="1" i="0">
                 <a:solidFill>
-                  <a:srgbClr val="262625"/>
+                  <a:srgbClr val="D97757"/>
                 </a:solidFill>
                 <a:latin typeface="Arial"/>
               </a:rPr>
@@ -20642,7 +19983,7 @@
             <a:r>
               <a:rPr sz="4200" b="1" i="0">
                 <a:solidFill>
-                  <a:srgbClr val="262625"/>
+                  <a:srgbClr val="D97757"/>
                 </a:solidFill>
                 <a:latin typeface="Arial"/>
               </a:rPr>
@@ -20696,25 +20037,25 @@
         </p:nvSpPr>
         <p:spPr>
           <a:xfrm>
-            <a:off x="10363200" y="6035040"/>
-            <a:ext cx="1371600" cy="365760"/>
-          </a:xfrm>
-          <a:prstGeom prst="rect">
-            <a:avLst/>
-          </a:prstGeom>
-          <a:noFill/>
-        </p:spPr>
-        <p:txBody>
-          <a:bodyPr wrap="none" lIns="0" rIns="0">
-            <a:noAutofit/>
-          </a:bodyPr>
-          <a:lstStyle/>
-          <a:p>
-            <a:pPr algn="l"/>
+            <a:off x="11186160" y="6035040"/>
+            <a:ext cx="548640" cy="365760"/>
+          </a:xfrm>
+          <a:prstGeom prst="rect">
+            <a:avLst/>
+          </a:prstGeom>
+          <a:noFill/>
+        </p:spPr>
+        <p:txBody>
+          <a:bodyPr wrap="none" lIns="0" rIns="0">
+            <a:noAutofit/>
+          </a:bodyPr>
+          <a:lstStyle/>
+          <a:p>
+            <a:pPr algn="r"/>
             <a:fld id="{4B0E1F8A-6C1D-4E2A-9F3B-7A5C8D2E1F60}" type="slidenum">
               <a:rPr sz="1600" b="0" i="0">
                 <a:solidFill>
-                  <a:srgbClr val="6C6A64"/>
+                  <a:srgbClr val="191919"/>
                 </a:solidFill>
                 <a:latin typeface="Arial"/>
               </a:rPr>
@@ -20775,7 +20116,7 @@
             <a:r>
               <a:rPr sz="4200" b="1" i="0">
                 <a:solidFill>
-                  <a:srgbClr val="262625"/>
+                  <a:srgbClr val="D97757"/>
                 </a:solidFill>
                 <a:latin typeface="Arial"/>
               </a:rPr>
@@ -21004,25 +20345,25 @@
         </p:nvSpPr>
         <p:spPr>
           <a:xfrm>
-            <a:off x="10363200" y="6035040"/>
-            <a:ext cx="1371600" cy="365760"/>
-          </a:xfrm>
-          <a:prstGeom prst="rect">
-            <a:avLst/>
-          </a:prstGeom>
-          <a:noFill/>
-        </p:spPr>
-        <p:txBody>
-          <a:bodyPr wrap="none" lIns="0" rIns="0">
-            <a:noAutofit/>
-          </a:bodyPr>
-          <a:lstStyle/>
-          <a:p>
-            <a:pPr algn="l"/>
+            <a:off x="11186160" y="6035040"/>
+            <a:ext cx="548640" cy="365760"/>
+          </a:xfrm>
+          <a:prstGeom prst="rect">
+            <a:avLst/>
+          </a:prstGeom>
+          <a:noFill/>
+        </p:spPr>
+        <p:txBody>
+          <a:bodyPr wrap="none" lIns="0" rIns="0">
+            <a:noAutofit/>
+          </a:bodyPr>
+          <a:lstStyle/>
+          <a:p>
+            <a:pPr algn="r"/>
             <a:fld id="{4B0E1F8A-6C1D-4E2A-9F3B-7A5C8D2E1F60}" type="slidenum">
               <a:rPr sz="1600" b="0" i="0">
                 <a:solidFill>
-                  <a:srgbClr val="6C6A64"/>
+                  <a:srgbClr val="191919"/>
                 </a:solidFill>
                 <a:latin typeface="Arial"/>
               </a:rPr>
